--- a/how_to_poster_erstellen.pptx
+++ b/how_to_poster_erstellen.pptx
@@ -9,7 +9,19 @@
     <p:sldId id="257" r:id="rId3"/>
     <p:sldId id="258" r:id="rId4"/>
     <p:sldId id="259" r:id="rId5"/>
-    <p:sldId id="260" r:id="rId6"/>
+    <p:sldId id="266" r:id="rId6"/>
+    <p:sldId id="268" r:id="rId7"/>
+    <p:sldId id="267" r:id="rId8"/>
+    <p:sldId id="271" r:id="rId9"/>
+    <p:sldId id="274" r:id="rId10"/>
+    <p:sldId id="269" r:id="rId11"/>
+    <p:sldId id="275" r:id="rId12"/>
+    <p:sldId id="276" r:id="rId13"/>
+    <p:sldId id="260" r:id="rId14"/>
+    <p:sldId id="263" r:id="rId15"/>
+    <p:sldId id="264" r:id="rId16"/>
+    <p:sldId id="262" r:id="rId17"/>
+    <p:sldId id="265" r:id="rId18"/>
   </p:sldIdLst>
   <p:sldSz cx="12192000" cy="6858000"/>
   <p:notesSz cx="6858000" cy="9144000"/>
@@ -108,7 +120,872 @@
       </a:defRPr>
     </a:lvl9pPr>
   </p:defaultTextStyle>
+  <p:extLst>
+    <p:ext uri="{EFAFB233-063F-42B5-8137-9DF3F51BA10A}">
+      <p15:sldGuideLst xmlns:p15="http://schemas.microsoft.com/office/powerpoint/2012/main"/>
+    </p:ext>
+  </p:extLst>
 </p:presentation>
+</file>
+
+<file path=ppt/revisionInfo.xml><?xml version="1.0" encoding="utf-8"?>
+<p1510:revInfo xmlns:a="http://schemas.openxmlformats.org/drawingml/2006/main" xmlns:r="http://schemas.openxmlformats.org/officeDocument/2006/relationships" xmlns:p1510="http://schemas.microsoft.com/office/powerpoint/2015/10/main">
+  <p1510:revLst>
+    <p1510:client id="{459B27FC-D8FF-4853-A2CD-BD7F0C60DA31}" v="5" dt="2026-08-27T15:12:54.076"/>
+  </p1510:revLst>
+</p1510:revInfo>
+</file>
+
+<file path=ppt/changesInfos/changesInfo1.xml><?xml version="1.0" encoding="utf-8"?>
+<pc:chgInfo xmlns:a="http://schemas.openxmlformats.org/drawingml/2006/main" xmlns:r="http://schemas.openxmlformats.org/officeDocument/2006/relationships" xmlns:ac="http://schemas.microsoft.com/office/drawing/2013/main/command" xmlns:pc="http://schemas.microsoft.com/office/powerpoint/2013/main/command">
+  <pc:docChgLst>
+    <pc:chgData name="Eike Bergen" userId="34d6753244d59a95" providerId="LiveId" clId="{CA5F72F2-797A-4277-99D1-EC0A0D5AF1A9}"/>
+    <pc:docChg chg="undo custSel addSld delSld modSld sldOrd modMainMaster">
+      <pc:chgData name="Eike Bergen" userId="34d6753244d59a95" providerId="LiveId" clId="{CA5F72F2-797A-4277-99D1-EC0A0D5AF1A9}" dt="2026-08-27T15:14:46.620" v="3388" actId="14100"/>
+      <pc:docMkLst>
+        <pc:docMk/>
+      </pc:docMkLst>
+      <pc:sldChg chg="modSp mod">
+        <pc:chgData name="Eike Bergen" userId="34d6753244d59a95" providerId="LiveId" clId="{CA5F72F2-797A-4277-99D1-EC0A0D5AF1A9}" dt="2026-08-13T09:09:56.403" v="1497" actId="20577"/>
+        <pc:sldMkLst>
+          <pc:docMk/>
+          <pc:sldMk cId="1190633288" sldId="257"/>
+        </pc:sldMkLst>
+        <pc:spChg chg="mod">
+          <ac:chgData name="Eike Bergen" userId="34d6753244d59a95" providerId="LiveId" clId="{CA5F72F2-797A-4277-99D1-EC0A0D5AF1A9}" dt="2026-08-13T09:09:56.403" v="1497" actId="20577"/>
+          <ac:spMkLst>
+            <pc:docMk/>
+            <pc:sldMk cId="1190633288" sldId="257"/>
+            <ac:spMk id="3" creationId="{06679FC3-7846-A093-2CD0-D52EEC2335BA}"/>
+          </ac:spMkLst>
+        </pc:spChg>
+      </pc:sldChg>
+      <pc:sldChg chg="addSp modSp mod">
+        <pc:chgData name="Eike Bergen" userId="34d6753244d59a95" providerId="LiveId" clId="{CA5F72F2-797A-4277-99D1-EC0A0D5AF1A9}" dt="2026-08-12T09:08:34.119" v="131" actId="1076"/>
+        <pc:sldMkLst>
+          <pc:docMk/>
+          <pc:sldMk cId="4030606367" sldId="259"/>
+        </pc:sldMkLst>
+        <pc:spChg chg="add mod">
+          <ac:chgData name="Eike Bergen" userId="34d6753244d59a95" providerId="LiveId" clId="{CA5F72F2-797A-4277-99D1-EC0A0D5AF1A9}" dt="2026-08-12T09:08:34.119" v="131" actId="1076"/>
+          <ac:spMkLst>
+            <pc:docMk/>
+            <pc:sldMk cId="4030606367" sldId="259"/>
+            <ac:spMk id="2" creationId="{0235E926-2175-F712-CA12-70A92A48A472}"/>
+          </ac:spMkLst>
+        </pc:spChg>
+        <pc:spChg chg="mod">
+          <ac:chgData name="Eike Bergen" userId="34d6753244d59a95" providerId="LiveId" clId="{CA5F72F2-797A-4277-99D1-EC0A0D5AF1A9}" dt="2026-08-12T09:07:24.507" v="40" actId="20577"/>
+          <ac:spMkLst>
+            <pc:docMk/>
+            <pc:sldMk cId="4030606367" sldId="259"/>
+            <ac:spMk id="8" creationId="{797228E5-AF59-B64D-0D0B-91DB8E9ACF52}"/>
+          </ac:spMkLst>
+        </pc:spChg>
+        <pc:spChg chg="mod">
+          <ac:chgData name="Eike Bergen" userId="34d6753244d59a95" providerId="LiveId" clId="{CA5F72F2-797A-4277-99D1-EC0A0D5AF1A9}" dt="2026-08-12T09:07:42.677" v="86" actId="20577"/>
+          <ac:spMkLst>
+            <pc:docMk/>
+            <pc:sldMk cId="4030606367" sldId="259"/>
+            <ac:spMk id="12" creationId="{9F4CB3E5-AF61-61B4-DB9C-CB00E3AB8564}"/>
+          </ac:spMkLst>
+        </pc:spChg>
+      </pc:sldChg>
+      <pc:sldChg chg="delSp mod">
+        <pc:chgData name="Eike Bergen" userId="34d6753244d59a95" providerId="LiveId" clId="{CA5F72F2-797A-4277-99D1-EC0A0D5AF1A9}" dt="2026-08-12T12:24:57.909" v="289" actId="478"/>
+        <pc:sldMkLst>
+          <pc:docMk/>
+          <pc:sldMk cId="2350023243" sldId="260"/>
+        </pc:sldMkLst>
+      </pc:sldChg>
+      <pc:sldChg chg="delSp mod">
+        <pc:chgData name="Eike Bergen" userId="34d6753244d59a95" providerId="LiveId" clId="{CA5F72F2-797A-4277-99D1-EC0A0D5AF1A9}" dt="2026-08-12T12:25:04.764" v="292" actId="478"/>
+        <pc:sldMkLst>
+          <pc:docMk/>
+          <pc:sldMk cId="2495751301" sldId="262"/>
+        </pc:sldMkLst>
+      </pc:sldChg>
+      <pc:sldChg chg="addSp delSp modSp mod">
+        <pc:chgData name="Eike Bergen" userId="34d6753244d59a95" providerId="LiveId" clId="{CA5F72F2-797A-4277-99D1-EC0A0D5AF1A9}" dt="2026-08-27T13:42:41.065" v="3185" actId="478"/>
+        <pc:sldMkLst>
+          <pc:docMk/>
+          <pc:sldMk cId="639737774" sldId="263"/>
+        </pc:sldMkLst>
+        <pc:spChg chg="mod">
+          <ac:chgData name="Eike Bergen" userId="34d6753244d59a95" providerId="LiveId" clId="{CA5F72F2-797A-4277-99D1-EC0A0D5AF1A9}" dt="2026-08-27T12:27:48.845" v="3178" actId="255"/>
+          <ac:spMkLst>
+            <pc:docMk/>
+            <pc:sldMk cId="639737774" sldId="263"/>
+            <ac:spMk id="3" creationId="{8079D132-64C8-5209-EBC1-BC46DEC5C26B}"/>
+          </ac:spMkLst>
+        </pc:spChg>
+        <pc:picChg chg="add mod modCrop">
+          <ac:chgData name="Eike Bergen" userId="34d6753244d59a95" providerId="LiveId" clId="{CA5F72F2-797A-4277-99D1-EC0A0D5AF1A9}" dt="2026-08-27T12:29:27.310" v="3180" actId="732"/>
+          <ac:picMkLst>
+            <pc:docMk/>
+            <pc:sldMk cId="639737774" sldId="263"/>
+            <ac:picMk id="4" creationId="{B7D8F575-1824-D363-F24D-1D92FBFBD624}"/>
+          </ac:picMkLst>
+        </pc:picChg>
+        <pc:picChg chg="add del mod">
+          <ac:chgData name="Eike Bergen" userId="34d6753244d59a95" providerId="LiveId" clId="{CA5F72F2-797A-4277-99D1-EC0A0D5AF1A9}" dt="2026-08-27T13:42:41.065" v="3185" actId="478"/>
+          <ac:picMkLst>
+            <pc:docMk/>
+            <pc:sldMk cId="639737774" sldId="263"/>
+            <ac:picMk id="6" creationId="{62C27678-A20B-0CD7-C5EC-6F737FC51F94}"/>
+          </ac:picMkLst>
+        </pc:picChg>
+      </pc:sldChg>
+      <pc:sldChg chg="delSp mod">
+        <pc:chgData name="Eike Bergen" userId="34d6753244d59a95" providerId="LiveId" clId="{CA5F72F2-797A-4277-99D1-EC0A0D5AF1A9}" dt="2026-08-12T12:25:03.474" v="291" actId="478"/>
+        <pc:sldMkLst>
+          <pc:docMk/>
+          <pc:sldMk cId="644172504" sldId="264"/>
+        </pc:sldMkLst>
+      </pc:sldChg>
+      <pc:sldChg chg="delSp mod">
+        <pc:chgData name="Eike Bergen" userId="34d6753244d59a95" providerId="LiveId" clId="{CA5F72F2-797A-4277-99D1-EC0A0D5AF1A9}" dt="2026-08-12T12:25:10.117" v="293" actId="478"/>
+        <pc:sldMkLst>
+          <pc:docMk/>
+          <pc:sldMk cId="2192745407" sldId="265"/>
+        </pc:sldMkLst>
+      </pc:sldChg>
+      <pc:sldChg chg="modSp mod">
+        <pc:chgData name="Eike Bergen" userId="34d6753244d59a95" providerId="LiveId" clId="{CA5F72F2-797A-4277-99D1-EC0A0D5AF1A9}" dt="2026-08-12T09:09:59.934" v="155" actId="14100"/>
+        <pc:sldMkLst>
+          <pc:docMk/>
+          <pc:sldMk cId="2000672445" sldId="266"/>
+        </pc:sldMkLst>
+        <pc:spChg chg="mod">
+          <ac:chgData name="Eike Bergen" userId="34d6753244d59a95" providerId="LiveId" clId="{CA5F72F2-797A-4277-99D1-EC0A0D5AF1A9}" dt="2026-08-12T09:09:12.589" v="151" actId="1076"/>
+          <ac:spMkLst>
+            <pc:docMk/>
+            <pc:sldMk cId="2000672445" sldId="266"/>
+            <ac:spMk id="6" creationId="{D2A4DE08-20B2-CA3B-B51C-3FC96AB694C0}"/>
+          </ac:spMkLst>
+        </pc:spChg>
+        <pc:spChg chg="mod">
+          <ac:chgData name="Eike Bergen" userId="34d6753244d59a95" providerId="LiveId" clId="{CA5F72F2-797A-4277-99D1-EC0A0D5AF1A9}" dt="2026-08-12T09:08:46.977" v="132" actId="1076"/>
+          <ac:spMkLst>
+            <pc:docMk/>
+            <pc:sldMk cId="2000672445" sldId="266"/>
+            <ac:spMk id="21" creationId="{EE50BE0F-2BF4-B9CD-FBEB-EB257D6DFE8C}"/>
+          </ac:spMkLst>
+        </pc:spChg>
+        <pc:spChg chg="mod">
+          <ac:chgData name="Eike Bergen" userId="34d6753244d59a95" providerId="LiveId" clId="{CA5F72F2-797A-4277-99D1-EC0A0D5AF1A9}" dt="2026-08-12T09:09:53.713" v="154" actId="20577"/>
+          <ac:spMkLst>
+            <pc:docMk/>
+            <pc:sldMk cId="2000672445" sldId="266"/>
+            <ac:spMk id="30" creationId="{3E7C82B2-E432-FA17-A9F9-47909D09548B}"/>
+          </ac:spMkLst>
+        </pc:spChg>
+        <pc:grpChg chg="mod">
+          <ac:chgData name="Eike Bergen" userId="34d6753244d59a95" providerId="LiveId" clId="{CA5F72F2-797A-4277-99D1-EC0A0D5AF1A9}" dt="2026-08-12T09:08:46.977" v="132" actId="1076"/>
+          <ac:grpSpMkLst>
+            <pc:docMk/>
+            <pc:sldMk cId="2000672445" sldId="266"/>
+            <ac:grpSpMk id="13" creationId="{1A03192A-82CC-05B0-D67C-FCC3C1F5C3BF}"/>
+          </ac:grpSpMkLst>
+        </pc:grpChg>
+        <pc:grpChg chg="mod">
+          <ac:chgData name="Eike Bergen" userId="34d6753244d59a95" providerId="LiveId" clId="{CA5F72F2-797A-4277-99D1-EC0A0D5AF1A9}" dt="2026-08-12T09:08:46.977" v="132" actId="1076"/>
+          <ac:grpSpMkLst>
+            <pc:docMk/>
+            <pc:sldMk cId="2000672445" sldId="266"/>
+            <ac:grpSpMk id="14" creationId="{68E70CAF-BF95-AFBB-F3D9-2F0F51AE7578}"/>
+          </ac:grpSpMkLst>
+        </pc:grpChg>
+        <pc:grpChg chg="mod">
+          <ac:chgData name="Eike Bergen" userId="34d6753244d59a95" providerId="LiveId" clId="{CA5F72F2-797A-4277-99D1-EC0A0D5AF1A9}" dt="2026-08-12T09:08:46.977" v="132" actId="1076"/>
+          <ac:grpSpMkLst>
+            <pc:docMk/>
+            <pc:sldMk cId="2000672445" sldId="266"/>
+            <ac:grpSpMk id="22" creationId="{CD096A2B-F924-9ED9-C705-7F494384881B}"/>
+          </ac:grpSpMkLst>
+        </pc:grpChg>
+        <pc:grpChg chg="mod">
+          <ac:chgData name="Eike Bergen" userId="34d6753244d59a95" providerId="LiveId" clId="{CA5F72F2-797A-4277-99D1-EC0A0D5AF1A9}" dt="2026-08-12T09:08:46.977" v="132" actId="1076"/>
+          <ac:grpSpMkLst>
+            <pc:docMk/>
+            <pc:sldMk cId="2000672445" sldId="266"/>
+            <ac:grpSpMk id="25" creationId="{A5B90B8A-B646-6CE1-E63E-2E3D17745A3C}"/>
+          </ac:grpSpMkLst>
+        </pc:grpChg>
+        <pc:grpChg chg="mod">
+          <ac:chgData name="Eike Bergen" userId="34d6753244d59a95" providerId="LiveId" clId="{CA5F72F2-797A-4277-99D1-EC0A0D5AF1A9}" dt="2026-08-12T09:08:46.977" v="132" actId="1076"/>
+          <ac:grpSpMkLst>
+            <pc:docMk/>
+            <pc:sldMk cId="2000672445" sldId="266"/>
+            <ac:grpSpMk id="28" creationId="{F16EBE8F-E812-A9D4-D83E-AF17F2C72EC1}"/>
+          </ac:grpSpMkLst>
+        </pc:grpChg>
+        <pc:grpChg chg="mod">
+          <ac:chgData name="Eike Bergen" userId="34d6753244d59a95" providerId="LiveId" clId="{CA5F72F2-797A-4277-99D1-EC0A0D5AF1A9}" dt="2026-08-12T09:08:46.977" v="132" actId="1076"/>
+          <ac:grpSpMkLst>
+            <pc:docMk/>
+            <pc:sldMk cId="2000672445" sldId="266"/>
+            <ac:grpSpMk id="32" creationId="{C6709645-8859-CAE5-1FED-4F042C111281}"/>
+          </ac:grpSpMkLst>
+        </pc:grpChg>
+        <pc:grpChg chg="mod">
+          <ac:chgData name="Eike Bergen" userId="34d6753244d59a95" providerId="LiveId" clId="{CA5F72F2-797A-4277-99D1-EC0A0D5AF1A9}" dt="2026-08-12T09:08:46.977" v="132" actId="1076"/>
+          <ac:grpSpMkLst>
+            <pc:docMk/>
+            <pc:sldMk cId="2000672445" sldId="266"/>
+            <ac:grpSpMk id="37" creationId="{AB989011-C65A-54A4-6856-53B58E0B8F3A}"/>
+          </ac:grpSpMkLst>
+        </pc:grpChg>
+        <pc:grpChg chg="mod">
+          <ac:chgData name="Eike Bergen" userId="34d6753244d59a95" providerId="LiveId" clId="{CA5F72F2-797A-4277-99D1-EC0A0D5AF1A9}" dt="2026-08-12T09:08:46.977" v="132" actId="1076"/>
+          <ac:grpSpMkLst>
+            <pc:docMk/>
+            <pc:sldMk cId="2000672445" sldId="266"/>
+            <ac:grpSpMk id="42" creationId="{A9CE8140-3E51-E3B3-0C6D-93E40AB6F95E}"/>
+          </ac:grpSpMkLst>
+        </pc:grpChg>
+        <pc:picChg chg="mod">
+          <ac:chgData name="Eike Bergen" userId="34d6753244d59a95" providerId="LiveId" clId="{CA5F72F2-797A-4277-99D1-EC0A0D5AF1A9}" dt="2026-08-12T09:08:46.977" v="132" actId="1076"/>
+          <ac:picMkLst>
+            <pc:docMk/>
+            <pc:sldMk cId="2000672445" sldId="266"/>
+            <ac:picMk id="5" creationId="{CA8A903D-FB82-34B4-90AC-59FB0CD284EA}"/>
+          </ac:picMkLst>
+        </pc:picChg>
+        <pc:cxnChg chg="mod">
+          <ac:chgData name="Eike Bergen" userId="34d6753244d59a95" providerId="LiveId" clId="{CA5F72F2-797A-4277-99D1-EC0A0D5AF1A9}" dt="2026-08-12T09:09:59.934" v="155" actId="14100"/>
+          <ac:cxnSpMkLst>
+            <pc:docMk/>
+            <pc:sldMk cId="2000672445" sldId="266"/>
+            <ac:cxnSpMk id="38" creationId="{8CD96D1F-6E82-3F37-5398-84FFEA8101EC}"/>
+          </ac:cxnSpMkLst>
+        </pc:cxnChg>
+      </pc:sldChg>
+      <pc:sldChg chg="addSp delSp modSp mod ord">
+        <pc:chgData name="Eike Bergen" userId="34d6753244d59a95" providerId="LiveId" clId="{CA5F72F2-797A-4277-99D1-EC0A0D5AF1A9}" dt="2026-08-27T15:12:23.315" v="3324" actId="1076"/>
+        <pc:sldMkLst>
+          <pc:docMk/>
+          <pc:sldMk cId="284897638" sldId="267"/>
+        </pc:sldMkLst>
+        <pc:spChg chg="add mod">
+          <ac:chgData name="Eike Bergen" userId="34d6753244d59a95" providerId="LiveId" clId="{CA5F72F2-797A-4277-99D1-EC0A0D5AF1A9}" dt="2026-08-27T15:12:23.315" v="3324" actId="1076"/>
+          <ac:spMkLst>
+            <pc:docMk/>
+            <pc:sldMk cId="284897638" sldId="267"/>
+            <ac:spMk id="4" creationId="{430DA3FF-48B0-3EFD-9EAF-6C2A5484D3C9}"/>
+          </ac:spMkLst>
+        </pc:spChg>
+        <pc:spChg chg="add mod">
+          <ac:chgData name="Eike Bergen" userId="34d6753244d59a95" providerId="LiveId" clId="{CA5F72F2-797A-4277-99D1-EC0A0D5AF1A9}" dt="2026-08-12T12:25:21.686" v="304" actId="1036"/>
+          <ac:spMkLst>
+            <pc:docMk/>
+            <pc:sldMk cId="284897638" sldId="267"/>
+            <ac:spMk id="22" creationId="{BC2C03A6-575D-0885-B9AF-A7275BAEF8F3}"/>
+          </ac:spMkLst>
+        </pc:spChg>
+        <pc:spChg chg="add mod">
+          <ac:chgData name="Eike Bergen" userId="34d6753244d59a95" providerId="LiveId" clId="{CA5F72F2-797A-4277-99D1-EC0A0D5AF1A9}" dt="2026-08-12T12:25:21.686" v="304" actId="1036"/>
+          <ac:spMkLst>
+            <pc:docMk/>
+            <pc:sldMk cId="284897638" sldId="267"/>
+            <ac:spMk id="25" creationId="{91256032-FB9E-8B86-FDFB-843515EF2D05}"/>
+          </ac:spMkLst>
+        </pc:spChg>
+        <pc:spChg chg="add mod">
+          <ac:chgData name="Eike Bergen" userId="34d6753244d59a95" providerId="LiveId" clId="{CA5F72F2-797A-4277-99D1-EC0A0D5AF1A9}" dt="2026-08-12T12:25:21.686" v="304" actId="1036"/>
+          <ac:spMkLst>
+            <pc:docMk/>
+            <pc:sldMk cId="284897638" sldId="267"/>
+            <ac:spMk id="28" creationId="{4EB766A6-1C35-5FAE-B500-A9BAFA20C325}"/>
+          </ac:spMkLst>
+        </pc:spChg>
+        <pc:spChg chg="add mod">
+          <ac:chgData name="Eike Bergen" userId="34d6753244d59a95" providerId="LiveId" clId="{CA5F72F2-797A-4277-99D1-EC0A0D5AF1A9}" dt="2026-08-12T12:25:33.045" v="325" actId="20577"/>
+          <ac:spMkLst>
+            <pc:docMk/>
+            <pc:sldMk cId="284897638" sldId="267"/>
+            <ac:spMk id="31" creationId="{AEB4A2AA-36E9-3226-C4F5-DB5B8CE9E0F4}"/>
+          </ac:spMkLst>
+        </pc:spChg>
+        <pc:picChg chg="add mod modCrop">
+          <ac:chgData name="Eike Bergen" userId="34d6753244d59a95" providerId="LiveId" clId="{CA5F72F2-797A-4277-99D1-EC0A0D5AF1A9}" dt="2026-08-12T12:25:21.686" v="304" actId="1036"/>
+          <ac:picMkLst>
+            <pc:docMk/>
+            <pc:sldMk cId="284897638" sldId="267"/>
+            <ac:picMk id="3" creationId="{E067FC7B-B213-628F-A62C-07D52FE3FB12}"/>
+          </ac:picMkLst>
+        </pc:picChg>
+        <pc:picChg chg="add mod">
+          <ac:chgData name="Eike Bergen" userId="34d6753244d59a95" providerId="LiveId" clId="{CA5F72F2-797A-4277-99D1-EC0A0D5AF1A9}" dt="2026-08-12T12:25:21.686" v="304" actId="1036"/>
+          <ac:picMkLst>
+            <pc:docMk/>
+            <pc:sldMk cId="284897638" sldId="267"/>
+            <ac:picMk id="6" creationId="{EADCDB57-BB0C-4DD8-D01D-EF98A0E8CB6D}"/>
+          </ac:picMkLst>
+        </pc:picChg>
+        <pc:cxnChg chg="add mod">
+          <ac:chgData name="Eike Bergen" userId="34d6753244d59a95" providerId="LiveId" clId="{CA5F72F2-797A-4277-99D1-EC0A0D5AF1A9}" dt="2026-08-12T12:25:21.686" v="304" actId="1036"/>
+          <ac:cxnSpMkLst>
+            <pc:docMk/>
+            <pc:sldMk cId="284897638" sldId="267"/>
+            <ac:cxnSpMk id="7" creationId="{D53B8E5E-5A49-37F8-90E8-A66C67920ED1}"/>
+          </ac:cxnSpMkLst>
+        </pc:cxnChg>
+        <pc:cxnChg chg="add mod">
+          <ac:chgData name="Eike Bergen" userId="34d6753244d59a95" providerId="LiveId" clId="{CA5F72F2-797A-4277-99D1-EC0A0D5AF1A9}" dt="2026-08-12T12:25:21.686" v="304" actId="1036"/>
+          <ac:cxnSpMkLst>
+            <pc:docMk/>
+            <pc:sldMk cId="284897638" sldId="267"/>
+            <ac:cxnSpMk id="10" creationId="{DCB8E1E3-B796-98EB-77BD-6959B1AAB29D}"/>
+          </ac:cxnSpMkLst>
+        </pc:cxnChg>
+        <pc:cxnChg chg="add mod">
+          <ac:chgData name="Eike Bergen" userId="34d6753244d59a95" providerId="LiveId" clId="{CA5F72F2-797A-4277-99D1-EC0A0D5AF1A9}" dt="2026-08-12T12:25:21.686" v="304" actId="1036"/>
+          <ac:cxnSpMkLst>
+            <pc:docMk/>
+            <pc:sldMk cId="284897638" sldId="267"/>
+            <ac:cxnSpMk id="14" creationId="{DD0C0141-D86A-F8C5-7DFE-34D4028C9D74}"/>
+          </ac:cxnSpMkLst>
+        </pc:cxnChg>
+        <pc:cxnChg chg="add mod">
+          <ac:chgData name="Eike Bergen" userId="34d6753244d59a95" providerId="LiveId" clId="{CA5F72F2-797A-4277-99D1-EC0A0D5AF1A9}" dt="2026-08-12T12:25:21.686" v="304" actId="1036"/>
+          <ac:cxnSpMkLst>
+            <pc:docMk/>
+            <pc:sldMk cId="284897638" sldId="267"/>
+            <ac:cxnSpMk id="16" creationId="{E451FD46-0122-3C36-2A18-7D1C736066E8}"/>
+          </ac:cxnSpMkLst>
+        </pc:cxnChg>
+        <pc:cxnChg chg="add mod">
+          <ac:chgData name="Eike Bergen" userId="34d6753244d59a95" providerId="LiveId" clId="{CA5F72F2-797A-4277-99D1-EC0A0D5AF1A9}" dt="2026-08-12T12:22:47.689" v="242" actId="14100"/>
+          <ac:cxnSpMkLst>
+            <pc:docMk/>
+            <pc:sldMk cId="284897638" sldId="267"/>
+            <ac:cxnSpMk id="19" creationId="{1EB71193-0803-7CE0-E326-45744A1697EA}"/>
+          </ac:cxnSpMkLst>
+        </pc:cxnChg>
+      </pc:sldChg>
+      <pc:sldChg chg="delSp modSp mod">
+        <pc:chgData name="Eike Bergen" userId="34d6753244d59a95" providerId="LiveId" clId="{CA5F72F2-797A-4277-99D1-EC0A0D5AF1A9}" dt="2026-08-25T08:27:25.493" v="1508" actId="1076"/>
+        <pc:sldMkLst>
+          <pc:docMk/>
+          <pc:sldMk cId="4239604439" sldId="268"/>
+        </pc:sldMkLst>
+        <pc:spChg chg="mod">
+          <ac:chgData name="Eike Bergen" userId="34d6753244d59a95" providerId="LiveId" clId="{CA5F72F2-797A-4277-99D1-EC0A0D5AF1A9}" dt="2026-08-12T09:10:50.313" v="196" actId="1076"/>
+          <ac:spMkLst>
+            <pc:docMk/>
+            <pc:sldMk cId="4239604439" sldId="268"/>
+            <ac:spMk id="9" creationId="{BDAD4982-3478-658B-C3A9-A0662CC01D18}"/>
+          </ac:spMkLst>
+        </pc:spChg>
+        <pc:spChg chg="mod">
+          <ac:chgData name="Eike Bergen" userId="34d6753244d59a95" providerId="LiveId" clId="{CA5F72F2-797A-4277-99D1-EC0A0D5AF1A9}" dt="2026-08-25T08:27:25.493" v="1508" actId="1076"/>
+          <ac:spMkLst>
+            <pc:docMk/>
+            <pc:sldMk cId="4239604439" sldId="268"/>
+            <ac:spMk id="35" creationId="{F8D5DE31-ADD1-A11A-3043-81F95DFFD2DA}"/>
+          </ac:spMkLst>
+        </pc:spChg>
+        <pc:spChg chg="mod">
+          <ac:chgData name="Eike Bergen" userId="34d6753244d59a95" providerId="LiveId" clId="{CA5F72F2-797A-4277-99D1-EC0A0D5AF1A9}" dt="2026-08-12T09:18:08.501" v="200" actId="14100"/>
+          <ac:spMkLst>
+            <pc:docMk/>
+            <pc:sldMk cId="4239604439" sldId="268"/>
+            <ac:spMk id="51" creationId="{4AED358C-F0F1-BF2F-CFA1-C9B8B0ABDEBB}"/>
+          </ac:spMkLst>
+        </pc:spChg>
+        <pc:spChg chg="mod">
+          <ac:chgData name="Eike Bergen" userId="34d6753244d59a95" providerId="LiveId" clId="{CA5F72F2-797A-4277-99D1-EC0A0D5AF1A9}" dt="2026-08-12T09:18:15.175" v="211" actId="1035"/>
+          <ac:spMkLst>
+            <pc:docMk/>
+            <pc:sldMk cId="4239604439" sldId="268"/>
+            <ac:spMk id="57" creationId="{EAA85426-56DF-99AB-B66F-B5AF85D0EED5}"/>
+          </ac:spMkLst>
+        </pc:spChg>
+      </pc:sldChg>
+      <pc:sldChg chg="addSp delSp modSp add mod">
+        <pc:chgData name="Eike Bergen" userId="34d6753244d59a95" providerId="LiveId" clId="{CA5F72F2-797A-4277-99D1-EC0A0D5AF1A9}" dt="2026-08-27T09:37:15.844" v="2897" actId="20577"/>
+        <pc:sldMkLst>
+          <pc:docMk/>
+          <pc:sldMk cId="2982264796" sldId="269"/>
+        </pc:sldMkLst>
+        <pc:spChg chg="add mod">
+          <ac:chgData name="Eike Bergen" userId="34d6753244d59a95" providerId="LiveId" clId="{CA5F72F2-797A-4277-99D1-EC0A0D5AF1A9}" dt="2026-08-27T09:35:59.031" v="2876" actId="1076"/>
+          <ac:spMkLst>
+            <pc:docMk/>
+            <pc:sldMk cId="2982264796" sldId="269"/>
+            <ac:spMk id="9" creationId="{B7A43935-0266-582F-5D9B-67E0659EBCCD}"/>
+          </ac:spMkLst>
+        </pc:spChg>
+        <pc:spChg chg="add mod">
+          <ac:chgData name="Eike Bergen" userId="34d6753244d59a95" providerId="LiveId" clId="{CA5F72F2-797A-4277-99D1-EC0A0D5AF1A9}" dt="2026-08-27T09:36:15.539" v="2882" actId="20577"/>
+          <ac:spMkLst>
+            <pc:docMk/>
+            <pc:sldMk cId="2982264796" sldId="269"/>
+            <ac:spMk id="11" creationId="{0B1393D6-3F5C-6CE1-C25B-379E0D147A15}"/>
+          </ac:spMkLst>
+        </pc:spChg>
+        <pc:spChg chg="add mod">
+          <ac:chgData name="Eike Bergen" userId="34d6753244d59a95" providerId="LiveId" clId="{CA5F72F2-797A-4277-99D1-EC0A0D5AF1A9}" dt="2026-08-25T14:36:07.910" v="2847" actId="20577"/>
+          <ac:spMkLst>
+            <pc:docMk/>
+            <pc:sldMk cId="2982264796" sldId="269"/>
+            <ac:spMk id="37" creationId="{13B20FB3-84FF-9302-A0CD-73826ABF4C2E}"/>
+          </ac:spMkLst>
+        </pc:spChg>
+        <pc:spChg chg="add mod">
+          <ac:chgData name="Eike Bergen" userId="34d6753244d59a95" providerId="LiveId" clId="{CA5F72F2-797A-4277-99D1-EC0A0D5AF1A9}" dt="2026-08-25T13:07:46.743" v="2397" actId="1076"/>
+          <ac:spMkLst>
+            <pc:docMk/>
+            <pc:sldMk cId="2982264796" sldId="269"/>
+            <ac:spMk id="39" creationId="{CFB95A12-799B-BFD6-FCF9-1D538BC1A5DC}"/>
+          </ac:spMkLst>
+        </pc:spChg>
+        <pc:spChg chg="add mod">
+          <ac:chgData name="Eike Bergen" userId="34d6753244d59a95" providerId="LiveId" clId="{CA5F72F2-797A-4277-99D1-EC0A0D5AF1A9}" dt="2026-08-25T13:07:48.582" v="2398" actId="1076"/>
+          <ac:spMkLst>
+            <pc:docMk/>
+            <pc:sldMk cId="2982264796" sldId="269"/>
+            <ac:spMk id="41" creationId="{AD8161E1-A74B-50F9-FBB7-E0D01A8F08DE}"/>
+          </ac:spMkLst>
+        </pc:spChg>
+        <pc:spChg chg="add mod">
+          <ac:chgData name="Eike Bergen" userId="34d6753244d59a95" providerId="LiveId" clId="{CA5F72F2-797A-4277-99D1-EC0A0D5AF1A9}" dt="2026-08-25T13:10:18.535" v="2587" actId="14100"/>
+          <ac:spMkLst>
+            <pc:docMk/>
+            <pc:sldMk cId="2982264796" sldId="269"/>
+            <ac:spMk id="43" creationId="{0760B68A-F919-DC15-3F0F-588762E067E1}"/>
+          </ac:spMkLst>
+        </pc:spChg>
+        <pc:spChg chg="add mod">
+          <ac:chgData name="Eike Bergen" userId="34d6753244d59a95" providerId="LiveId" clId="{CA5F72F2-797A-4277-99D1-EC0A0D5AF1A9}" dt="2026-08-25T13:08:37.275" v="2431" actId="1076"/>
+          <ac:spMkLst>
+            <pc:docMk/>
+            <pc:sldMk cId="2982264796" sldId="269"/>
+            <ac:spMk id="45" creationId="{21BD8E3F-3D6A-4975-C6C3-E0997D7FA525}"/>
+          </ac:spMkLst>
+        </pc:spChg>
+        <pc:spChg chg="add mod">
+          <ac:chgData name="Eike Bergen" userId="34d6753244d59a95" providerId="LiveId" clId="{CA5F72F2-797A-4277-99D1-EC0A0D5AF1A9}" dt="2026-08-25T13:08:13.404" v="2427" actId="113"/>
+          <ac:spMkLst>
+            <pc:docMk/>
+            <pc:sldMk cId="2982264796" sldId="269"/>
+            <ac:spMk id="47" creationId="{B77A61C4-BC69-87B8-70AB-E5BEB9A44991}"/>
+          </ac:spMkLst>
+        </pc:spChg>
+        <pc:spChg chg="add mod">
+          <ac:chgData name="Eike Bergen" userId="34d6753244d59a95" providerId="LiveId" clId="{CA5F72F2-797A-4277-99D1-EC0A0D5AF1A9}" dt="2026-08-27T09:37:15.844" v="2897" actId="20577"/>
+          <ac:spMkLst>
+            <pc:docMk/>
+            <pc:sldMk cId="2982264796" sldId="269"/>
+            <ac:spMk id="57" creationId="{CAA575FC-02A1-FA1E-1DD1-DD670C87ED85}"/>
+          </ac:spMkLst>
+        </pc:spChg>
+        <pc:grpChg chg="add mod">
+          <ac:chgData name="Eike Bergen" userId="34d6753244d59a95" providerId="LiveId" clId="{CA5F72F2-797A-4277-99D1-EC0A0D5AF1A9}" dt="2026-08-25T13:04:15.535" v="2258" actId="1076"/>
+          <ac:grpSpMkLst>
+            <pc:docMk/>
+            <pc:sldMk cId="2982264796" sldId="269"/>
+            <ac:grpSpMk id="35" creationId="{54E31EEA-D9DC-5063-885B-9C703124BDF2}"/>
+          </ac:grpSpMkLst>
+        </pc:grpChg>
+        <pc:picChg chg="add mod topLvl">
+          <ac:chgData name="Eike Bergen" userId="34d6753244d59a95" providerId="LiveId" clId="{CA5F72F2-797A-4277-99D1-EC0A0D5AF1A9}" dt="2026-08-25T13:01:38.922" v="2134" actId="164"/>
+          <ac:picMkLst>
+            <pc:docMk/>
+            <pc:sldMk cId="2982264796" sldId="269"/>
+            <ac:picMk id="21" creationId="{CDD2D5DE-1F69-0554-B101-073F5BBD947F}"/>
+          </ac:picMkLst>
+        </pc:picChg>
+        <pc:picChg chg="add mod">
+          <ac:chgData name="Eike Bergen" userId="34d6753244d59a95" providerId="LiveId" clId="{CA5F72F2-797A-4277-99D1-EC0A0D5AF1A9}" dt="2026-08-25T13:01:38.922" v="2134" actId="164"/>
+          <ac:picMkLst>
+            <pc:docMk/>
+            <pc:sldMk cId="2982264796" sldId="269"/>
+            <ac:picMk id="32" creationId="{93F44898-AA33-B204-74C5-86523BC319BE}"/>
+          </ac:picMkLst>
+        </pc:picChg>
+        <pc:picChg chg="add mod">
+          <ac:chgData name="Eike Bergen" userId="34d6753244d59a95" providerId="LiveId" clId="{CA5F72F2-797A-4277-99D1-EC0A0D5AF1A9}" dt="2026-08-25T13:01:38.922" v="2134" actId="164"/>
+          <ac:picMkLst>
+            <pc:docMk/>
+            <pc:sldMk cId="2982264796" sldId="269"/>
+            <ac:picMk id="34" creationId="{AC2513DD-304A-10CF-3B1F-B63AD83BD6FF}"/>
+          </ac:picMkLst>
+        </pc:picChg>
+        <pc:cxnChg chg="add mod">
+          <ac:chgData name="Eike Bergen" userId="34d6753244d59a95" providerId="LiveId" clId="{CA5F72F2-797A-4277-99D1-EC0A0D5AF1A9}" dt="2026-08-25T13:15:48.661" v="2595" actId="14100"/>
+          <ac:cxnSpMkLst>
+            <pc:docMk/>
+            <pc:sldMk cId="2982264796" sldId="269"/>
+            <ac:cxnSpMk id="51" creationId="{BF812FC1-AAE1-F347-99E9-ACFDD224C53F}"/>
+          </ac:cxnSpMkLst>
+        </pc:cxnChg>
+      </pc:sldChg>
+      <pc:sldChg chg="addSp delSp modSp add mod">
+        <pc:chgData name="Eike Bergen" userId="34d6753244d59a95" providerId="LiveId" clId="{CA5F72F2-797A-4277-99D1-EC0A0D5AF1A9}" dt="2026-08-27T15:14:46.620" v="3388" actId="14100"/>
+        <pc:sldMkLst>
+          <pc:docMk/>
+          <pc:sldMk cId="1473549473" sldId="271"/>
+        </pc:sldMkLst>
+        <pc:spChg chg="add mod">
+          <ac:chgData name="Eike Bergen" userId="34d6753244d59a95" providerId="LiveId" clId="{CA5F72F2-797A-4277-99D1-EC0A0D5AF1A9}" dt="2026-08-12T13:00:00.651" v="355" actId="20577"/>
+          <ac:spMkLst>
+            <pc:docMk/>
+            <pc:sldMk cId="1473549473" sldId="271"/>
+            <ac:spMk id="4" creationId="{0E805E7F-B45D-DB25-DE8D-6974F4F7B8DA}"/>
+          </ac:spMkLst>
+        </pc:spChg>
+        <pc:spChg chg="add mod">
+          <ac:chgData name="Eike Bergen" userId="34d6753244d59a95" providerId="LiveId" clId="{CA5F72F2-797A-4277-99D1-EC0A0D5AF1A9}" dt="2026-08-27T15:13:03.263" v="3330" actId="14100"/>
+          <ac:spMkLst>
+            <pc:docMk/>
+            <pc:sldMk cId="1473549473" sldId="271"/>
+            <ac:spMk id="6" creationId="{141452B4-CFAD-7236-D8C3-D2CC34D6B2FE}"/>
+          </ac:spMkLst>
+        </pc:spChg>
+        <pc:spChg chg="add mod">
+          <ac:chgData name="Eike Bergen" userId="34d6753244d59a95" providerId="LiveId" clId="{CA5F72F2-797A-4277-99D1-EC0A0D5AF1A9}" dt="2026-08-27T15:14:07.401" v="3379" actId="1076"/>
+          <ac:spMkLst>
+            <pc:docMk/>
+            <pc:sldMk cId="1473549473" sldId="271"/>
+            <ac:spMk id="8" creationId="{7EAD2F98-1827-4E12-D815-272A8EC871F5}"/>
+          </ac:spMkLst>
+        </pc:spChg>
+        <pc:spChg chg="add mod">
+          <ac:chgData name="Eike Bergen" userId="34d6753244d59a95" providerId="LiveId" clId="{CA5F72F2-797A-4277-99D1-EC0A0D5AF1A9}" dt="2026-08-27T15:13:54.577" v="3376" actId="14100"/>
+          <ac:spMkLst>
+            <pc:docMk/>
+            <pc:sldMk cId="1473549473" sldId="271"/>
+            <ac:spMk id="13" creationId="{967D69C0-9B8B-0A3C-40FF-230CD4AC288F}"/>
+          </ac:spMkLst>
+        </pc:spChg>
+        <pc:spChg chg="add mod">
+          <ac:chgData name="Eike Bergen" userId="34d6753244d59a95" providerId="LiveId" clId="{CA5F72F2-797A-4277-99D1-EC0A0D5AF1A9}" dt="2026-08-27T15:14:37.786" v="3385" actId="1076"/>
+          <ac:spMkLst>
+            <pc:docMk/>
+            <pc:sldMk cId="1473549473" sldId="271"/>
+            <ac:spMk id="16" creationId="{56631B93-FD8F-95E3-CDCD-E73DE01B7D43}"/>
+          </ac:spMkLst>
+        </pc:spChg>
+        <pc:spChg chg="add mod">
+          <ac:chgData name="Eike Bergen" userId="34d6753244d59a95" providerId="LiveId" clId="{CA5F72F2-797A-4277-99D1-EC0A0D5AF1A9}" dt="2026-08-12T13:09:32.562" v="740" actId="164"/>
+          <ac:spMkLst>
+            <pc:docMk/>
+            <pc:sldMk cId="1473549473" sldId="271"/>
+            <ac:spMk id="20" creationId="{A7809688-DE08-235B-E505-983A15E0A0FD}"/>
+          </ac:spMkLst>
+        </pc:spChg>
+        <pc:spChg chg="add mod">
+          <ac:chgData name="Eike Bergen" userId="34d6753244d59a95" providerId="LiveId" clId="{CA5F72F2-797A-4277-99D1-EC0A0D5AF1A9}" dt="2026-08-12T13:09:32.562" v="740" actId="164"/>
+          <ac:spMkLst>
+            <pc:docMk/>
+            <pc:sldMk cId="1473549473" sldId="271"/>
+            <ac:spMk id="22" creationId="{1E2AD645-EF10-21C9-D2AC-A253DF28FB66}"/>
+          </ac:spMkLst>
+        </pc:spChg>
+        <pc:spChg chg="add mod">
+          <ac:chgData name="Eike Bergen" userId="34d6753244d59a95" providerId="LiveId" clId="{CA5F72F2-797A-4277-99D1-EC0A0D5AF1A9}" dt="2026-08-12T13:09:32.562" v="740" actId="164"/>
+          <ac:spMkLst>
+            <pc:docMk/>
+            <pc:sldMk cId="1473549473" sldId="271"/>
+            <ac:spMk id="23" creationId="{F6998BE1-2612-21F8-621E-EB02AB52449B}"/>
+          </ac:spMkLst>
+        </pc:spChg>
+        <pc:spChg chg="add mod">
+          <ac:chgData name="Eike Bergen" userId="34d6753244d59a95" providerId="LiveId" clId="{CA5F72F2-797A-4277-99D1-EC0A0D5AF1A9}" dt="2026-08-27T15:14:37.786" v="3385" actId="1076"/>
+          <ac:spMkLst>
+            <pc:docMk/>
+            <pc:sldMk cId="1473549473" sldId="271"/>
+            <ac:spMk id="26" creationId="{2B3613DE-4471-5D68-BD86-92B45062FB32}"/>
+          </ac:spMkLst>
+        </pc:spChg>
+        <pc:spChg chg="add mod">
+          <ac:chgData name="Eike Bergen" userId="34d6753244d59a95" providerId="LiveId" clId="{CA5F72F2-797A-4277-99D1-EC0A0D5AF1A9}" dt="2026-08-27T15:14:46.620" v="3388" actId="14100"/>
+          <ac:spMkLst>
+            <pc:docMk/>
+            <pc:sldMk cId="1473549473" sldId="271"/>
+            <ac:spMk id="31" creationId="{FEDC8352-33E1-61E3-0511-F44E31FAD781}"/>
+          </ac:spMkLst>
+        </pc:spChg>
+        <pc:grpChg chg="add mod">
+          <ac:chgData name="Eike Bergen" userId="34d6753244d59a95" providerId="LiveId" clId="{CA5F72F2-797A-4277-99D1-EC0A0D5AF1A9}" dt="2026-08-27T15:14:37.786" v="3385" actId="1076"/>
+          <ac:grpSpMkLst>
+            <pc:docMk/>
+            <pc:sldMk cId="1473549473" sldId="271"/>
+            <ac:grpSpMk id="24" creationId="{2DBAEF5A-DAE2-CD30-F814-EE183431285C}"/>
+          </ac:grpSpMkLst>
+        </pc:grpChg>
+        <pc:picChg chg="add mod">
+          <ac:chgData name="Eike Bergen" userId="34d6753244d59a95" providerId="LiveId" clId="{CA5F72F2-797A-4277-99D1-EC0A0D5AF1A9}" dt="2026-08-27T15:12:56.674" v="3328" actId="1076"/>
+          <ac:picMkLst>
+            <pc:docMk/>
+            <pc:sldMk cId="1473549473" sldId="271"/>
+            <ac:picMk id="3" creationId="{D2A11528-4D8A-3551-2F40-6C326BD69432}"/>
+          </ac:picMkLst>
+        </pc:picChg>
+        <pc:picChg chg="add mod">
+          <ac:chgData name="Eike Bergen" userId="34d6753244d59a95" providerId="LiveId" clId="{CA5F72F2-797A-4277-99D1-EC0A0D5AF1A9}" dt="2026-08-12T13:09:32.562" v="740" actId="164"/>
+          <ac:picMkLst>
+            <pc:docMk/>
+            <pc:sldMk cId="1473549473" sldId="271"/>
+            <ac:picMk id="10" creationId="{DA79E76B-6EB7-136F-9207-D7EADD9767AE}"/>
+          </ac:picMkLst>
+        </pc:picChg>
+        <pc:picChg chg="add mod">
+          <ac:chgData name="Eike Bergen" userId="34d6753244d59a95" providerId="LiveId" clId="{CA5F72F2-797A-4277-99D1-EC0A0D5AF1A9}" dt="2026-08-12T13:09:32.562" v="740" actId="164"/>
+          <ac:picMkLst>
+            <pc:docMk/>
+            <pc:sldMk cId="1473549473" sldId="271"/>
+            <ac:picMk id="12" creationId="{18F346DC-0EE4-9296-1386-2BBAFC54247D}"/>
+          </ac:picMkLst>
+        </pc:picChg>
+        <pc:picChg chg="add mod modCrop">
+          <ac:chgData name="Eike Bergen" userId="34d6753244d59a95" providerId="LiveId" clId="{CA5F72F2-797A-4277-99D1-EC0A0D5AF1A9}" dt="2026-08-27T15:14:07.401" v="3379" actId="1076"/>
+          <ac:picMkLst>
+            <pc:docMk/>
+            <pc:sldMk cId="1473549473" sldId="271"/>
+            <ac:picMk id="14" creationId="{DA7B5752-3FBD-083F-4938-42FA6107CFC3}"/>
+          </ac:picMkLst>
+        </pc:picChg>
+        <pc:cxnChg chg="add mod">
+          <ac:chgData name="Eike Bergen" userId="34d6753244d59a95" providerId="LiveId" clId="{CA5F72F2-797A-4277-99D1-EC0A0D5AF1A9}" dt="2026-08-27T15:13:54.577" v="3376" actId="14100"/>
+          <ac:cxnSpMkLst>
+            <pc:docMk/>
+            <pc:sldMk cId="1473549473" sldId="271"/>
+            <ac:cxnSpMk id="2" creationId="{7334C3A0-0213-A4E5-5786-BE6F428CD760}"/>
+          </ac:cxnSpMkLst>
+        </pc:cxnChg>
+        <pc:cxnChg chg="add mod">
+          <ac:chgData name="Eike Bergen" userId="34d6753244d59a95" providerId="LiveId" clId="{CA5F72F2-797A-4277-99D1-EC0A0D5AF1A9}" dt="2026-08-27T15:14:09.923" v="3380" actId="14100"/>
+          <ac:cxnSpMkLst>
+            <pc:docMk/>
+            <pc:sldMk cId="1473549473" sldId="271"/>
+            <ac:cxnSpMk id="5" creationId="{41E24C68-AAA0-23C8-0C78-05431CAF913A}"/>
+          </ac:cxnSpMkLst>
+        </pc:cxnChg>
+      </pc:sldChg>
+      <pc:sldChg chg="addSp delSp modSp add mod">
+        <pc:chgData name="Eike Bergen" userId="34d6753244d59a95" providerId="LiveId" clId="{CA5F72F2-797A-4277-99D1-EC0A0D5AF1A9}" dt="2026-08-12T13:24:03.226" v="1445" actId="20577"/>
+        <pc:sldMkLst>
+          <pc:docMk/>
+          <pc:sldMk cId="3088996399" sldId="274"/>
+        </pc:sldMkLst>
+        <pc:spChg chg="add mod">
+          <ac:chgData name="Eike Bergen" userId="34d6753244d59a95" providerId="LiveId" clId="{CA5F72F2-797A-4277-99D1-EC0A0D5AF1A9}" dt="2026-08-12T13:19:13.913" v="1309" actId="20577"/>
+          <ac:spMkLst>
+            <pc:docMk/>
+            <pc:sldMk cId="3088996399" sldId="274"/>
+            <ac:spMk id="4" creationId="{E435DA02-4A3B-87AF-EB25-33F50201A583}"/>
+          </ac:spMkLst>
+        </pc:spChg>
+        <pc:spChg chg="add mod">
+          <ac:chgData name="Eike Bergen" userId="34d6753244d59a95" providerId="LiveId" clId="{CA5F72F2-797A-4277-99D1-EC0A0D5AF1A9}" dt="2026-08-12T13:24:03.226" v="1445" actId="20577"/>
+          <ac:spMkLst>
+            <pc:docMk/>
+            <pc:sldMk cId="3088996399" sldId="274"/>
+            <ac:spMk id="7" creationId="{968378E3-EA16-ED21-6DDC-827463FEB970}"/>
+          </ac:spMkLst>
+        </pc:spChg>
+        <pc:spChg chg="add mod">
+          <ac:chgData name="Eike Bergen" userId="34d6753244d59a95" providerId="LiveId" clId="{CA5F72F2-797A-4277-99D1-EC0A0D5AF1A9}" dt="2026-08-12T13:22:16.217" v="1396" actId="255"/>
+          <ac:spMkLst>
+            <pc:docMk/>
+            <pc:sldMk cId="3088996399" sldId="274"/>
+            <ac:spMk id="16" creationId="{5FC30080-F955-468A-4414-6980E3535A95}"/>
+          </ac:spMkLst>
+        </pc:spChg>
+        <pc:grpChg chg="mod">
+          <ac:chgData name="Eike Bergen" userId="34d6753244d59a95" providerId="LiveId" clId="{CA5F72F2-797A-4277-99D1-EC0A0D5AF1A9}" dt="2026-08-12T13:17:00.509" v="1000" actId="1076"/>
+          <ac:grpSpMkLst>
+            <pc:docMk/>
+            <pc:sldMk cId="3088996399" sldId="274"/>
+            <ac:grpSpMk id="11" creationId="{DE5BB375-D00D-F74C-7E31-D8A8446E30EC}"/>
+          </ac:grpSpMkLst>
+        </pc:grpChg>
+      </pc:sldChg>
+      <pc:sldChg chg="addSp delSp modSp new mod">
+        <pc:chgData name="Eike Bergen" userId="34d6753244d59a95" providerId="LiveId" clId="{CA5F72F2-797A-4277-99D1-EC0A0D5AF1A9}" dt="2026-08-25T14:31:55.837" v="2699" actId="732"/>
+        <pc:sldMkLst>
+          <pc:docMk/>
+          <pc:sldMk cId="1291413361" sldId="275"/>
+        </pc:sldMkLst>
+        <pc:picChg chg="add mod ord">
+          <ac:chgData name="Eike Bergen" userId="34d6753244d59a95" providerId="LiveId" clId="{CA5F72F2-797A-4277-99D1-EC0A0D5AF1A9}" dt="2026-08-25T12:42:39.228" v="1945" actId="22"/>
+          <ac:picMkLst>
+            <pc:docMk/>
+            <pc:sldMk cId="1291413361" sldId="275"/>
+            <ac:picMk id="5" creationId="{9360B620-1C53-FD3E-530C-B069DA0FD501}"/>
+          </ac:picMkLst>
+        </pc:picChg>
+        <pc:picChg chg="add mod modCrop">
+          <ac:chgData name="Eike Bergen" userId="34d6753244d59a95" providerId="LiveId" clId="{CA5F72F2-797A-4277-99D1-EC0A0D5AF1A9}" dt="2026-08-25T14:31:55.837" v="2699" actId="732"/>
+          <ac:picMkLst>
+            <pc:docMk/>
+            <pc:sldMk cId="1291413361" sldId="275"/>
+            <ac:picMk id="7" creationId="{69347A1F-EC0F-53D9-4FD3-27D5A4959364}"/>
+          </ac:picMkLst>
+        </pc:picChg>
+      </pc:sldChg>
+      <pc:sldChg chg="addSp delSp modSp new mod">
+        <pc:chgData name="Eike Bergen" userId="34d6753244d59a95" providerId="LiveId" clId="{CA5F72F2-797A-4277-99D1-EC0A0D5AF1A9}" dt="2026-08-27T12:08:36.131" v="3155" actId="114"/>
+        <pc:sldMkLst>
+          <pc:docMk/>
+          <pc:sldMk cId="647590783" sldId="276"/>
+        </pc:sldMkLst>
+        <pc:spChg chg="del">
+          <ac:chgData name="Eike Bergen" userId="34d6753244d59a95" providerId="LiveId" clId="{CA5F72F2-797A-4277-99D1-EC0A0D5AF1A9}" dt="2026-08-27T12:06:38.270" v="2901" actId="478"/>
+          <ac:spMkLst>
+            <pc:docMk/>
+            <pc:sldMk cId="647590783" sldId="276"/>
+            <ac:spMk id="2" creationId="{02B18742-A1AC-A4E6-152B-BF2965C8A235}"/>
+          </ac:spMkLst>
+        </pc:spChg>
+        <pc:spChg chg="del">
+          <ac:chgData name="Eike Bergen" userId="34d6753244d59a95" providerId="LiveId" clId="{CA5F72F2-797A-4277-99D1-EC0A0D5AF1A9}" dt="2026-08-27T12:06:24.121" v="2899" actId="478"/>
+          <ac:spMkLst>
+            <pc:docMk/>
+            <pc:sldMk cId="647590783" sldId="276"/>
+            <ac:spMk id="3" creationId="{F65347F3-6A51-BE8D-92D4-DF1CAF5F5534}"/>
+          </ac:spMkLst>
+        </pc:spChg>
+        <pc:spChg chg="add mod">
+          <ac:chgData name="Eike Bergen" userId="34d6753244d59a95" providerId="LiveId" clId="{CA5F72F2-797A-4277-99D1-EC0A0D5AF1A9}" dt="2026-08-27T12:06:44.562" v="2918" actId="20577"/>
+          <ac:spMkLst>
+            <pc:docMk/>
+            <pc:sldMk cId="647590783" sldId="276"/>
+            <ac:spMk id="4" creationId="{1E536E23-BDFE-DA1C-5918-DB92D358279C}"/>
+          </ac:spMkLst>
+        </pc:spChg>
+        <pc:spChg chg="add mod">
+          <ac:chgData name="Eike Bergen" userId="34d6753244d59a95" providerId="LiveId" clId="{CA5F72F2-797A-4277-99D1-EC0A0D5AF1A9}" dt="2026-08-27T12:08:36.131" v="3155" actId="114"/>
+          <ac:spMkLst>
+            <pc:docMk/>
+            <pc:sldMk cId="647590783" sldId="276"/>
+            <ac:spMk id="6" creationId="{89773B32-3E51-1A76-5AE3-FCC1E676BAD4}"/>
+          </ac:spMkLst>
+        </pc:spChg>
+      </pc:sldChg>
+      <pc:sldChg chg="modSp new del mod">
+        <pc:chgData name="Eike Bergen" userId="34d6753244d59a95" providerId="LiveId" clId="{CA5F72F2-797A-4277-99D1-EC0A0D5AF1A9}" dt="2026-08-26T07:57:18.224" v="2875" actId="2696"/>
+        <pc:sldMkLst>
+          <pc:docMk/>
+          <pc:sldMk cId="889954016" sldId="276"/>
+        </pc:sldMkLst>
+      </pc:sldChg>
+      <pc:sldChg chg="addSp delSp modSp add del mod">
+        <pc:chgData name="Eike Bergen" userId="34d6753244d59a95" providerId="LiveId" clId="{CA5F72F2-797A-4277-99D1-EC0A0D5AF1A9}" dt="2026-08-27T15:12:26.449" v="3325" actId="2696"/>
+        <pc:sldMkLst>
+          <pc:docMk/>
+          <pc:sldMk cId="2790534434" sldId="277"/>
+        </pc:sldMkLst>
+        <pc:spChg chg="add mod">
+          <ac:chgData name="Eike Bergen" userId="34d6753244d59a95" providerId="LiveId" clId="{CA5F72F2-797A-4277-99D1-EC0A0D5AF1A9}" dt="2026-08-27T15:11:45.833" v="3319" actId="14100"/>
+          <ac:spMkLst>
+            <pc:docMk/>
+            <pc:sldMk cId="2790534434" sldId="277"/>
+            <ac:spMk id="4" creationId="{B019607B-3677-1913-BE6A-1E413FBD0898}"/>
+          </ac:spMkLst>
+        </pc:spChg>
+        <pc:spChg chg="del">
+          <ac:chgData name="Eike Bergen" userId="34d6753244d59a95" providerId="LiveId" clId="{CA5F72F2-797A-4277-99D1-EC0A0D5AF1A9}" dt="2026-08-27T15:09:04.412" v="3188" actId="478"/>
+          <ac:spMkLst>
+            <pc:docMk/>
+            <pc:sldMk cId="2790534434" sldId="277"/>
+            <ac:spMk id="22" creationId="{1C52ED5F-AA12-C270-0CA2-EF77973C2ECA}"/>
+          </ac:spMkLst>
+        </pc:spChg>
+        <pc:spChg chg="del">
+          <ac:chgData name="Eike Bergen" userId="34d6753244d59a95" providerId="LiveId" clId="{CA5F72F2-797A-4277-99D1-EC0A0D5AF1A9}" dt="2026-08-27T15:09:04.412" v="3188" actId="478"/>
+          <ac:spMkLst>
+            <pc:docMk/>
+            <pc:sldMk cId="2790534434" sldId="277"/>
+            <ac:spMk id="25" creationId="{38CC684E-C804-88F7-3FE8-B42265119E39}"/>
+          </ac:spMkLst>
+        </pc:spChg>
+        <pc:spChg chg="del">
+          <ac:chgData name="Eike Bergen" userId="34d6753244d59a95" providerId="LiveId" clId="{CA5F72F2-797A-4277-99D1-EC0A0D5AF1A9}" dt="2026-08-27T15:09:04.412" v="3188" actId="478"/>
+          <ac:spMkLst>
+            <pc:docMk/>
+            <pc:sldMk cId="2790534434" sldId="277"/>
+            <ac:spMk id="28" creationId="{902947CE-F6BB-9339-E58B-0F8BACCA6A8E}"/>
+          </ac:spMkLst>
+        </pc:spChg>
+        <pc:picChg chg="del">
+          <ac:chgData name="Eike Bergen" userId="34d6753244d59a95" providerId="LiveId" clId="{CA5F72F2-797A-4277-99D1-EC0A0D5AF1A9}" dt="2026-08-27T15:08:59.040" v="3187" actId="478"/>
+          <ac:picMkLst>
+            <pc:docMk/>
+            <pc:sldMk cId="2790534434" sldId="277"/>
+            <ac:picMk id="3" creationId="{0FCFF494-1CC5-DF90-073A-570DECD66CE8}"/>
+          </ac:picMkLst>
+        </pc:picChg>
+        <pc:picChg chg="del">
+          <ac:chgData name="Eike Bergen" userId="34d6753244d59a95" providerId="LiveId" clId="{CA5F72F2-797A-4277-99D1-EC0A0D5AF1A9}" dt="2026-08-27T15:09:04.412" v="3188" actId="478"/>
+          <ac:picMkLst>
+            <pc:docMk/>
+            <pc:sldMk cId="2790534434" sldId="277"/>
+            <ac:picMk id="6" creationId="{50C1B047-4809-26EA-3895-FB5A8A6F703D}"/>
+          </ac:picMkLst>
+        </pc:picChg>
+        <pc:cxnChg chg="del mod">
+          <ac:chgData name="Eike Bergen" userId="34d6753244d59a95" providerId="LiveId" clId="{CA5F72F2-797A-4277-99D1-EC0A0D5AF1A9}" dt="2026-08-27T15:09:04.412" v="3188" actId="478"/>
+          <ac:cxnSpMkLst>
+            <pc:docMk/>
+            <pc:sldMk cId="2790534434" sldId="277"/>
+            <ac:cxnSpMk id="7" creationId="{2567563D-9D4E-54A2-D00A-01EE377BE343}"/>
+          </ac:cxnSpMkLst>
+        </pc:cxnChg>
+        <pc:cxnChg chg="del">
+          <ac:chgData name="Eike Bergen" userId="34d6753244d59a95" providerId="LiveId" clId="{CA5F72F2-797A-4277-99D1-EC0A0D5AF1A9}" dt="2026-08-27T15:09:04.412" v="3188" actId="478"/>
+          <ac:cxnSpMkLst>
+            <pc:docMk/>
+            <pc:sldMk cId="2790534434" sldId="277"/>
+            <ac:cxnSpMk id="10" creationId="{E17A3C2C-53B3-643D-0395-E636426C8C21}"/>
+          </ac:cxnSpMkLst>
+        </pc:cxnChg>
+        <pc:cxnChg chg="del mod">
+          <ac:chgData name="Eike Bergen" userId="34d6753244d59a95" providerId="LiveId" clId="{CA5F72F2-797A-4277-99D1-EC0A0D5AF1A9}" dt="2026-08-27T15:09:04.412" v="3188" actId="478"/>
+          <ac:cxnSpMkLst>
+            <pc:docMk/>
+            <pc:sldMk cId="2790534434" sldId="277"/>
+            <ac:cxnSpMk id="14" creationId="{040D2F92-3B77-C368-F541-BA647672E517}"/>
+          </ac:cxnSpMkLst>
+        </pc:cxnChg>
+        <pc:cxnChg chg="del">
+          <ac:chgData name="Eike Bergen" userId="34d6753244d59a95" providerId="LiveId" clId="{CA5F72F2-797A-4277-99D1-EC0A0D5AF1A9}" dt="2026-08-27T15:09:04.412" v="3188" actId="478"/>
+          <ac:cxnSpMkLst>
+            <pc:docMk/>
+            <pc:sldMk cId="2790534434" sldId="277"/>
+            <ac:cxnSpMk id="16" creationId="{A636622F-ECC4-2CB0-CF45-3C2C8CCB1053}"/>
+          </ac:cxnSpMkLst>
+        </pc:cxnChg>
+        <pc:cxnChg chg="del">
+          <ac:chgData name="Eike Bergen" userId="34d6753244d59a95" providerId="LiveId" clId="{CA5F72F2-797A-4277-99D1-EC0A0D5AF1A9}" dt="2026-08-27T15:09:04.412" v="3188" actId="478"/>
+          <ac:cxnSpMkLst>
+            <pc:docMk/>
+            <pc:sldMk cId="2790534434" sldId="277"/>
+            <ac:cxnSpMk id="19" creationId="{34593AE6-A94A-5923-48D2-D7346D58D254}"/>
+          </ac:cxnSpMkLst>
+        </pc:cxnChg>
+      </pc:sldChg>
+      <pc:sldMasterChg chg="addSp mod">
+        <pc:chgData name="Eike Bergen" userId="34d6753244d59a95" providerId="LiveId" clId="{CA5F72F2-797A-4277-99D1-EC0A0D5AF1A9}" dt="2026-08-12T12:24:40.774" v="286" actId="22"/>
+        <pc:sldMasterMkLst>
+          <pc:docMk/>
+          <pc:sldMasterMk cId="1559102650" sldId="2147483648"/>
+        </pc:sldMasterMkLst>
+        <pc:picChg chg="add">
+          <ac:chgData name="Eike Bergen" userId="34d6753244d59a95" providerId="LiveId" clId="{CA5F72F2-797A-4277-99D1-EC0A0D5AF1A9}" dt="2026-08-12T12:24:40.774" v="286" actId="22"/>
+          <ac:picMkLst>
+            <pc:docMk/>
+            <pc:sldMasterMk cId="1559102650" sldId="2147483648"/>
+            <ac:picMk id="8" creationId="{E22187C5-6500-5DA5-5BE1-2F6433586F1A}"/>
+          </ac:picMkLst>
+        </pc:picChg>
+      </pc:sldMasterChg>
+    </pc:docChg>
+  </pc:docChgLst>
+</pc:chgInfo>
 </file>
 
 <file path=ppt/slideLayouts/slideLayout1.xml><?xml version="1.0" encoding="utf-8"?>
@@ -258,7 +1135,7 @@
           <a:p>
             <a:fld id="{3B971AEA-5E0D-4C90-8C62-B63406D75F5C}" type="datetimeFigureOut">
               <a:rPr lang="de-DE" smtClean="0"/>
-              <a:t>28.01.2026</a:t>
+              <a:t>27.08.2026</a:t>
             </a:fld>
             <a:endParaRPr lang="de-DE"/>
           </a:p>
@@ -456,7 +1333,7 @@
           <a:p>
             <a:fld id="{3B971AEA-5E0D-4C90-8C62-B63406D75F5C}" type="datetimeFigureOut">
               <a:rPr lang="de-DE" smtClean="0"/>
-              <a:t>28.01.2026</a:t>
+              <a:t>27.08.2026</a:t>
             </a:fld>
             <a:endParaRPr lang="de-DE"/>
           </a:p>
@@ -664,7 +1541,7 @@
           <a:p>
             <a:fld id="{3B971AEA-5E0D-4C90-8C62-B63406D75F5C}" type="datetimeFigureOut">
               <a:rPr lang="de-DE" smtClean="0"/>
-              <a:t>28.01.2026</a:t>
+              <a:t>27.08.2026</a:t>
             </a:fld>
             <a:endParaRPr lang="de-DE"/>
           </a:p>
@@ -862,7 +1739,7 @@
           <a:p>
             <a:fld id="{3B971AEA-5E0D-4C90-8C62-B63406D75F5C}" type="datetimeFigureOut">
               <a:rPr lang="de-DE" smtClean="0"/>
-              <a:t>28.01.2026</a:t>
+              <a:t>27.08.2026</a:t>
             </a:fld>
             <a:endParaRPr lang="de-DE"/>
           </a:p>
@@ -1137,7 +2014,7 @@
           <a:p>
             <a:fld id="{3B971AEA-5E0D-4C90-8C62-B63406D75F5C}" type="datetimeFigureOut">
               <a:rPr lang="de-DE" smtClean="0"/>
-              <a:t>28.01.2026</a:t>
+              <a:t>27.08.2026</a:t>
             </a:fld>
             <a:endParaRPr lang="de-DE"/>
           </a:p>
@@ -1402,7 +2279,7 @@
           <a:p>
             <a:fld id="{3B971AEA-5E0D-4C90-8C62-B63406D75F5C}" type="datetimeFigureOut">
               <a:rPr lang="de-DE" smtClean="0"/>
-              <a:t>28.01.2026</a:t>
+              <a:t>27.08.2026</a:t>
             </a:fld>
             <a:endParaRPr lang="de-DE"/>
           </a:p>
@@ -1814,7 +2691,7 @@
           <a:p>
             <a:fld id="{3B971AEA-5E0D-4C90-8C62-B63406D75F5C}" type="datetimeFigureOut">
               <a:rPr lang="de-DE" smtClean="0"/>
-              <a:t>28.01.2026</a:t>
+              <a:t>27.08.2026</a:t>
             </a:fld>
             <a:endParaRPr lang="de-DE"/>
           </a:p>
@@ -1955,7 +2832,7 @@
           <a:p>
             <a:fld id="{3B971AEA-5E0D-4C90-8C62-B63406D75F5C}" type="datetimeFigureOut">
               <a:rPr lang="de-DE" smtClean="0"/>
-              <a:t>28.01.2026</a:t>
+              <a:t>27.08.2026</a:t>
             </a:fld>
             <a:endParaRPr lang="de-DE"/>
           </a:p>
@@ -2068,7 +2945,7 @@
           <a:p>
             <a:fld id="{3B971AEA-5E0D-4C90-8C62-B63406D75F5C}" type="datetimeFigureOut">
               <a:rPr lang="de-DE" smtClean="0"/>
-              <a:t>28.01.2026</a:t>
+              <a:t>27.08.2026</a:t>
             </a:fld>
             <a:endParaRPr lang="de-DE"/>
           </a:p>
@@ -2379,7 +3256,7 @@
           <a:p>
             <a:fld id="{3B971AEA-5E0D-4C90-8C62-B63406D75F5C}" type="datetimeFigureOut">
               <a:rPr lang="de-DE" smtClean="0"/>
-              <a:t>28.01.2026</a:t>
+              <a:t>27.08.2026</a:t>
             </a:fld>
             <a:endParaRPr lang="de-DE"/>
           </a:p>
@@ -2667,7 +3544,7 @@
           <a:p>
             <a:fld id="{3B971AEA-5E0D-4C90-8C62-B63406D75F5C}" type="datetimeFigureOut">
               <a:rPr lang="de-DE" smtClean="0"/>
-              <a:t>28.01.2026</a:t>
+              <a:t>27.08.2026</a:t>
             </a:fld>
             <a:endParaRPr lang="de-DE"/>
           </a:p>
@@ -2908,7 +3785,7 @@
           <a:p>
             <a:fld id="{3B971AEA-5E0D-4C90-8C62-B63406D75F5C}" type="datetimeFigureOut">
               <a:rPr lang="de-DE" smtClean="0"/>
-              <a:t>28.01.2026</a:t>
+              <a:t>27.08.2026</a:t>
             </a:fld>
             <a:endParaRPr lang="de-DE"/>
           </a:p>
@@ -2953,7 +3830,7 @@
             </a:lvl1pPr>
           </a:lstStyle>
           <a:p>
-            <a:endParaRPr lang="de-DE"/>
+            <a:endParaRPr lang="de-DE" dirty="0"/>
           </a:p>
         </p:txBody>
       </p:sp>
@@ -3000,10 +3877,46 @@
               <a:rPr lang="de-DE" smtClean="0"/>
               <a:t>‹Nr.›</a:t>
             </a:fld>
-            <a:endParaRPr lang="de-DE"/>
+            <a:endParaRPr lang="de-DE" dirty="0"/>
           </a:p>
         </p:txBody>
       </p:sp>
+      <p:pic>
+        <p:nvPicPr>
+          <p:cNvPr id="8" name="Grafik 7" descr="Logo des Profilbereichs Modeling &amp; Simulation Sciences">
+            <a:extLst>
+              <a:ext uri="{FF2B5EF4-FFF2-40B4-BE49-F238E27FC236}">
+                <a16:creationId xmlns:a16="http://schemas.microsoft.com/office/drawing/2014/main" id="{E22187C5-6500-5DA5-5BE1-2F6433586F1A}"/>
+              </a:ext>
+            </a:extLst>
+          </p:cNvPr>
+          <p:cNvPicPr>
+            <a:picLocks noChangeAspect="1"/>
+          </p:cNvPicPr>
+          <p:nvPr userDrawn="1"/>
+        </p:nvPicPr>
+        <p:blipFill>
+          <a:blip>
+            <a:extLst>
+              <a:ext uri="{96DAC541-7B7A-43D3-8B79-37D633B846F1}">
+                <asvg:svgBlip xmlns:asvg="http://schemas.microsoft.com/office/drawing/2016/SVG/main" r:embed="rId13"/>
+              </a:ext>
+            </a:extLst>
+          </a:blip>
+          <a:stretch>
+            <a:fillRect/>
+          </a:stretch>
+        </p:blipFill>
+        <p:spPr>
+          <a:xfrm>
+            <a:off x="9769467" y="6243899"/>
+            <a:ext cx="2298073" cy="559491"/>
+          </a:xfrm>
+          <a:prstGeom prst="rect">
+            <a:avLst/>
+          </a:prstGeom>
+        </p:spPr>
+      </p:pic>
     </p:spTree>
     <p:extLst>
       <p:ext uri="{BB962C8B-B14F-4D97-AF65-F5344CB8AC3E}">
@@ -3348,17 +4261,1366 @@
           <a:p>
             <a:r>
               <a:rPr lang="de-DE" dirty="0"/>
-              <a:t>Anleitung zur Poster Erstellung</a:t>
+              <a:t>Manual </a:t>
+            </a:r>
+            <a:r>
+              <a:rPr lang="de-DE" dirty="0" err="1"/>
+              <a:t>for</a:t>
+            </a:r>
+            <a:r>
+              <a:rPr lang="de-DE" dirty="0"/>
+              <a:t> </a:t>
+            </a:r>
+            <a:r>
+              <a:rPr lang="de-DE" dirty="0" err="1"/>
+              <a:t>poster</a:t>
+            </a:r>
+            <a:r>
+              <a:rPr lang="de-DE" dirty="0"/>
+              <a:t> </a:t>
+            </a:r>
+            <a:r>
+              <a:rPr lang="de-DE" dirty="0" err="1"/>
+              <a:t>creation</a:t>
+            </a:r>
+            <a:endParaRPr lang="de-DE" dirty="0"/>
+          </a:p>
+        </p:txBody>
+      </p:sp>
+      <p:pic>
+        <p:nvPicPr>
+          <p:cNvPr id="9" name="Grafik 8" descr="Logo des Profilbereichs Modeling &amp; Simulation Sciences">
+            <a:extLst>
+              <a:ext uri="{FF2B5EF4-FFF2-40B4-BE49-F238E27FC236}">
+                <a16:creationId xmlns:a16="http://schemas.microsoft.com/office/drawing/2014/main" id="{E1B78E5C-5B7C-7215-186C-908C0EE9D75F}"/>
+              </a:ext>
+            </a:extLst>
+          </p:cNvPr>
+          <p:cNvPicPr>
+            <a:picLocks noChangeAspect="1"/>
+          </p:cNvPicPr>
+          <p:nvPr/>
+        </p:nvPicPr>
+        <p:blipFill>
+          <a:blip>
+            <a:extLst>
+              <a:ext uri="{96DAC541-7B7A-43D3-8B79-37D633B846F1}">
+                <asvg:svgBlip xmlns:asvg="http://schemas.microsoft.com/office/drawing/2016/SVG/main" r:embed="rId2"/>
+              </a:ext>
+            </a:extLst>
+          </a:blip>
+          <a:stretch>
+            <a:fillRect/>
+          </a:stretch>
+        </p:blipFill>
+        <p:spPr>
+          <a:xfrm>
+            <a:off x="9769467" y="6243899"/>
+            <a:ext cx="2298073" cy="559491"/>
+          </a:xfrm>
+          <a:prstGeom prst="rect">
+            <a:avLst/>
+          </a:prstGeom>
+        </p:spPr>
+      </p:pic>
+    </p:spTree>
+    <p:extLst>
+      <p:ext uri="{BB962C8B-B14F-4D97-AF65-F5344CB8AC3E}">
+        <p14:creationId xmlns:p14="http://schemas.microsoft.com/office/powerpoint/2010/main" val="3292178943"/>
+      </p:ext>
+    </p:extLst>
+  </p:cSld>
+  <p:clrMapOvr>
+    <a:masterClrMapping/>
+  </p:clrMapOvr>
+</p:sld>
+</file>
+
+<file path=ppt/slides/slide10.xml><?xml version="1.0" encoding="utf-8"?>
+<p:sld xmlns:a="http://schemas.openxmlformats.org/drawingml/2006/main" xmlns:r="http://schemas.openxmlformats.org/officeDocument/2006/relationships" xmlns:p="http://schemas.openxmlformats.org/presentationml/2006/main">
+  <p:cSld>
+    <p:spTree>
+      <p:nvGrpSpPr>
+        <p:cNvPr id="1" name="">
+          <a:extLst>
+            <a:ext uri="{FF2B5EF4-FFF2-40B4-BE49-F238E27FC236}">
+              <a16:creationId xmlns:a16="http://schemas.microsoft.com/office/drawing/2014/main" id="{050D2CC2-5B56-0520-9A0E-2FC9B897BF25}"/>
+            </a:ext>
+          </a:extLst>
+        </p:cNvPr>
+        <p:cNvGrpSpPr/>
+        <p:nvPr/>
+      </p:nvGrpSpPr>
+      <p:grpSpPr>
+        <a:xfrm>
+          <a:off x="0" y="0"/>
+          <a:ext cx="0" cy="0"/>
+          <a:chOff x="0" y="0"/>
+          <a:chExt cx="0" cy="0"/>
+        </a:xfrm>
+      </p:grpSpPr>
+      <p:sp>
+        <p:nvSpPr>
+          <p:cNvPr id="9" name="Titel 1">
+            <a:extLst>
+              <a:ext uri="{FF2B5EF4-FFF2-40B4-BE49-F238E27FC236}">
+                <a16:creationId xmlns:a16="http://schemas.microsoft.com/office/drawing/2014/main" id="{B7A43935-0266-582F-5D9B-67E0659EBCCD}"/>
+              </a:ext>
+            </a:extLst>
+          </p:cNvPr>
+          <p:cNvSpPr>
+            <a:spLocks noGrp="1"/>
+          </p:cNvSpPr>
+          <p:nvPr>
+            <p:ph type="title"/>
+          </p:nvPr>
+        </p:nvSpPr>
+        <p:spPr>
+          <a:xfrm>
+            <a:off x="4535498" y="59004"/>
+            <a:ext cx="3121003" cy="554575"/>
+          </a:xfrm>
+        </p:spPr>
+        <p:txBody>
+          <a:bodyPr>
+            <a:normAutofit fontScale="90000"/>
+          </a:bodyPr>
+          <a:lstStyle/>
+          <a:p>
+            <a:r>
+              <a:rPr lang="de-DE" sz="3200" b="1" dirty="0">
+                <a:solidFill>
+                  <a:schemeClr val="tx2">
+                    <a:lumMod val="90000"/>
+                    <a:lumOff val="10000"/>
+                  </a:schemeClr>
+                </a:solidFill>
+              </a:rPr>
+              <a:t>Software Logo Box</a:t>
             </a:r>
           </a:p>
         </p:txBody>
       </p:sp>
       <p:sp>
         <p:nvSpPr>
-          <p:cNvPr id="3" name="Untertitel 2">
-            <a:extLst>
-              <a:ext uri="{FF2B5EF4-FFF2-40B4-BE49-F238E27FC236}">
-                <a16:creationId xmlns:a16="http://schemas.microsoft.com/office/drawing/2014/main" id="{00D23662-6D37-5DDE-F36A-005F15074A98}"/>
+          <p:cNvPr id="11" name="Textfeld 10">
+            <a:extLst>
+              <a:ext uri="{FF2B5EF4-FFF2-40B4-BE49-F238E27FC236}">
+                <a16:creationId xmlns:a16="http://schemas.microsoft.com/office/drawing/2014/main" id="{0B1393D6-3F5C-6CE1-C25B-379E0D147A15}"/>
+              </a:ext>
+            </a:extLst>
+          </p:cNvPr>
+          <p:cNvSpPr txBox="1"/>
+          <p:nvPr/>
+        </p:nvSpPr>
+        <p:spPr>
+          <a:xfrm>
+            <a:off x="1074932" y="558657"/>
+            <a:ext cx="10990478" cy="1200329"/>
+          </a:xfrm>
+          <a:prstGeom prst="rect">
+            <a:avLst/>
+          </a:prstGeom>
+          <a:noFill/>
+        </p:spPr>
+        <p:txBody>
+          <a:bodyPr wrap="square" rtlCol="0">
+            <a:spAutoFit/>
+          </a:bodyPr>
+          <a:lstStyle/>
+          <a:p>
+            <a:r>
+              <a:rPr lang="de-DE" dirty="0"/>
+              <a:t>The Software Logo Box </a:t>
+            </a:r>
+            <a:r>
+              <a:rPr lang="de-DE" dirty="0" err="1"/>
+              <a:t>consists</a:t>
+            </a:r>
+            <a:r>
+              <a:rPr lang="de-DE" dirty="0"/>
+              <a:t> of the </a:t>
+            </a:r>
+            <a:r>
+              <a:rPr lang="de-DE" b="1" dirty="0"/>
+              <a:t>catch </a:t>
+            </a:r>
+            <a:r>
+              <a:rPr lang="de-DE" b="1" dirty="0" err="1"/>
+              <a:t>phrase</a:t>
+            </a:r>
+            <a:r>
+              <a:rPr lang="de-DE" dirty="0"/>
+              <a:t>, the Software </a:t>
+            </a:r>
+            <a:r>
+              <a:rPr lang="de-DE" b="1" dirty="0"/>
+              <a:t>Logo</a:t>
+            </a:r>
+            <a:r>
+              <a:rPr lang="de-DE" dirty="0"/>
+              <a:t> and the Software </a:t>
+            </a:r>
+            <a:r>
+              <a:rPr lang="de-DE" b="1" dirty="0"/>
+              <a:t>QR-Code</a:t>
+            </a:r>
+            <a:r>
+              <a:rPr lang="de-DE" dirty="0"/>
+              <a:t>.</a:t>
+            </a:r>
+          </a:p>
+          <a:p>
+            <a:endParaRPr lang="de-DE" dirty="0"/>
+          </a:p>
+          <a:p>
+            <a:r>
+              <a:rPr lang="de-DE" dirty="0"/>
+              <a:t>The </a:t>
+            </a:r>
+            <a:r>
+              <a:rPr lang="de-DE" dirty="0" err="1"/>
+              <a:t>upper</a:t>
+            </a:r>
+            <a:r>
+              <a:rPr lang="de-DE" dirty="0"/>
+              <a:t> y-position of the logo and QR-Code </a:t>
+            </a:r>
+            <a:r>
+              <a:rPr lang="de-DE" dirty="0" err="1"/>
+              <a:t>is</a:t>
+            </a:r>
+            <a:r>
+              <a:rPr lang="de-DE" dirty="0"/>
+              <a:t> </a:t>
+            </a:r>
+            <a:r>
+              <a:rPr lang="de-DE" dirty="0" err="1"/>
+              <a:t>fixed</a:t>
+            </a:r>
+            <a:r>
+              <a:rPr lang="de-DE" dirty="0"/>
+              <a:t>, as </a:t>
+            </a:r>
+            <a:r>
+              <a:rPr lang="de-DE" dirty="0" err="1"/>
+              <a:t>well</a:t>
+            </a:r>
+            <a:r>
+              <a:rPr lang="de-DE" dirty="0"/>
+              <a:t> as the </a:t>
+            </a:r>
+            <a:r>
+              <a:rPr lang="de-DE" dirty="0" err="1"/>
+              <a:t>space</a:t>
+            </a:r>
+            <a:r>
+              <a:rPr lang="de-DE" dirty="0"/>
+              <a:t> </a:t>
+            </a:r>
+            <a:r>
+              <a:rPr lang="de-DE" dirty="0" err="1"/>
+              <a:t>they</a:t>
+            </a:r>
+            <a:r>
+              <a:rPr lang="de-DE" dirty="0"/>
+              <a:t> </a:t>
+            </a:r>
+            <a:r>
+              <a:rPr lang="de-DE" dirty="0" err="1"/>
+              <a:t>take</a:t>
+            </a:r>
+            <a:r>
+              <a:rPr lang="de-DE" dirty="0"/>
+              <a:t> </a:t>
+            </a:r>
+            <a:r>
+              <a:rPr lang="de-DE" dirty="0" err="1"/>
+              <a:t>up</a:t>
+            </a:r>
+            <a:r>
+              <a:rPr lang="de-DE" dirty="0"/>
+              <a:t> </a:t>
+            </a:r>
+            <a:r>
+              <a:rPr lang="de-DE" dirty="0" err="1"/>
+              <a:t>together</a:t>
+            </a:r>
+            <a:r>
+              <a:rPr lang="de-DE" dirty="0"/>
+              <a:t> in y-</a:t>
+            </a:r>
+            <a:r>
+              <a:rPr lang="de-DE" dirty="0" err="1"/>
+              <a:t>direction</a:t>
+            </a:r>
+            <a:r>
+              <a:rPr lang="de-DE" dirty="0"/>
+              <a:t>.</a:t>
+            </a:r>
+          </a:p>
+          <a:p>
+            <a:r>
+              <a:rPr lang="de-DE" dirty="0" err="1"/>
+              <a:t>They</a:t>
+            </a:r>
+            <a:r>
+              <a:rPr lang="de-DE" dirty="0"/>
+              <a:t> </a:t>
+            </a:r>
+            <a:r>
+              <a:rPr lang="de-DE" dirty="0" err="1"/>
+              <a:t>share</a:t>
+            </a:r>
+            <a:r>
+              <a:rPr lang="de-DE" dirty="0"/>
+              <a:t> the </a:t>
+            </a:r>
+            <a:r>
+              <a:rPr lang="de-DE" dirty="0" err="1"/>
+              <a:t>available</a:t>
+            </a:r>
+            <a:r>
+              <a:rPr lang="de-DE" dirty="0"/>
+              <a:t> </a:t>
+            </a:r>
+            <a:r>
+              <a:rPr lang="de-DE" dirty="0" err="1"/>
+              <a:t>space</a:t>
+            </a:r>
+            <a:r>
+              <a:rPr lang="de-DE" dirty="0"/>
+              <a:t> via the variable </a:t>
+            </a:r>
+            <a:r>
+              <a:rPr lang="de-DE" b="1" i="1" dirty="0"/>
+              <a:t>logo-ratio</a:t>
+            </a:r>
+            <a:r>
+              <a:rPr lang="de-DE" dirty="0"/>
+              <a:t> in the </a:t>
+            </a:r>
+            <a:r>
+              <a:rPr lang="de-DE" dirty="0" err="1"/>
+              <a:t>function</a:t>
+            </a:r>
+            <a:r>
+              <a:rPr lang="de-DE" dirty="0"/>
+              <a:t> </a:t>
+            </a:r>
+            <a:r>
+              <a:rPr lang="de-DE" b="1" dirty="0"/>
+              <a:t>#</a:t>
+            </a:r>
+            <a:r>
+              <a:rPr lang="de-DE" b="1" i="1" dirty="0"/>
+              <a:t>software-logo-box()</a:t>
+            </a:r>
+            <a:r>
+              <a:rPr lang="de-DE" dirty="0"/>
+              <a:t>.</a:t>
+            </a:r>
+            <a:endParaRPr lang="de-DE" b="1" i="1" dirty="0"/>
+          </a:p>
+        </p:txBody>
+      </p:sp>
+      <p:grpSp>
+        <p:nvGrpSpPr>
+          <p:cNvPr id="35" name="Gruppieren 34">
+            <a:extLst>
+              <a:ext uri="{FF2B5EF4-FFF2-40B4-BE49-F238E27FC236}">
+                <a16:creationId xmlns:a16="http://schemas.microsoft.com/office/drawing/2014/main" id="{54E31EEA-D9DC-5063-885B-9C703124BDF2}"/>
+              </a:ext>
+            </a:extLst>
+          </p:cNvPr>
+          <p:cNvGrpSpPr/>
+          <p:nvPr/>
+        </p:nvGrpSpPr>
+        <p:grpSpPr>
+          <a:xfrm>
+            <a:off x="951048" y="2354382"/>
+            <a:ext cx="2533049" cy="4305762"/>
+            <a:chOff x="4174082" y="2552238"/>
+            <a:chExt cx="2533049" cy="4305762"/>
+          </a:xfrm>
+        </p:grpSpPr>
+        <p:pic>
+          <p:nvPicPr>
+            <p:cNvPr id="21" name="Grafik 20">
+              <a:extLst>
+                <a:ext uri="{FF2B5EF4-FFF2-40B4-BE49-F238E27FC236}">
+                  <a16:creationId xmlns:a16="http://schemas.microsoft.com/office/drawing/2014/main" id="{CDD2D5DE-1F69-0554-B101-073F5BBD947F}"/>
+                </a:ext>
+              </a:extLst>
+            </p:cNvPr>
+            <p:cNvPicPr>
+              <a:picLocks noChangeAspect="1"/>
+            </p:cNvPicPr>
+            <p:nvPr/>
+          </p:nvPicPr>
+          <p:blipFill>
+            <a:blip r:embed="rId2"/>
+            <a:stretch>
+              <a:fillRect/>
+            </a:stretch>
+          </p:blipFill>
+          <p:spPr>
+            <a:xfrm>
+              <a:off x="4174082" y="3992238"/>
+              <a:ext cx="2507797" cy="1440000"/>
+            </a:xfrm>
+            <a:prstGeom prst="rect">
+              <a:avLst/>
+            </a:prstGeom>
+          </p:spPr>
+        </p:pic>
+        <p:pic>
+          <p:nvPicPr>
+            <p:cNvPr id="32" name="Grafik 31">
+              <a:extLst>
+                <a:ext uri="{FF2B5EF4-FFF2-40B4-BE49-F238E27FC236}">
+                  <a16:creationId xmlns:a16="http://schemas.microsoft.com/office/drawing/2014/main" id="{93F44898-AA33-B204-74C5-86523BC319BE}"/>
+                </a:ext>
+              </a:extLst>
+            </p:cNvPr>
+            <p:cNvPicPr>
+              <a:picLocks noChangeAspect="1"/>
+            </p:cNvPicPr>
+            <p:nvPr/>
+          </p:nvPicPr>
+          <p:blipFill>
+            <a:blip r:embed="rId3"/>
+            <a:stretch>
+              <a:fillRect/>
+            </a:stretch>
+          </p:blipFill>
+          <p:spPr>
+            <a:xfrm>
+              <a:off x="4174082" y="2552238"/>
+              <a:ext cx="2533049" cy="1440000"/>
+            </a:xfrm>
+            <a:prstGeom prst="rect">
+              <a:avLst/>
+            </a:prstGeom>
+          </p:spPr>
+        </p:pic>
+        <p:pic>
+          <p:nvPicPr>
+            <p:cNvPr id="34" name="Grafik 33">
+              <a:extLst>
+                <a:ext uri="{FF2B5EF4-FFF2-40B4-BE49-F238E27FC236}">
+                  <a16:creationId xmlns:a16="http://schemas.microsoft.com/office/drawing/2014/main" id="{AC2513DD-304A-10CF-3B1F-B63AD83BD6FF}"/>
+                </a:ext>
+              </a:extLst>
+            </p:cNvPr>
+            <p:cNvPicPr>
+              <a:picLocks noChangeAspect="1"/>
+            </p:cNvPicPr>
+            <p:nvPr/>
+          </p:nvPicPr>
+          <p:blipFill>
+            <a:blip r:embed="rId4"/>
+            <a:stretch>
+              <a:fillRect/>
+            </a:stretch>
+          </p:blipFill>
+          <p:spPr>
+            <a:xfrm>
+              <a:off x="4184838" y="5418000"/>
+              <a:ext cx="2522293" cy="1440000"/>
+            </a:xfrm>
+            <a:prstGeom prst="rect">
+              <a:avLst/>
+            </a:prstGeom>
+          </p:spPr>
+        </p:pic>
+      </p:grpSp>
+      <p:sp>
+        <p:nvSpPr>
+          <p:cNvPr id="37" name="Textfeld 36">
+            <a:extLst>
+              <a:ext uri="{FF2B5EF4-FFF2-40B4-BE49-F238E27FC236}">
+                <a16:creationId xmlns:a16="http://schemas.microsoft.com/office/drawing/2014/main" id="{13B20FB3-84FF-9302-A0CD-73826ABF4C2E}"/>
+              </a:ext>
+            </a:extLst>
+          </p:cNvPr>
+          <p:cNvSpPr txBox="1"/>
+          <p:nvPr/>
+        </p:nvSpPr>
+        <p:spPr>
+          <a:xfrm>
+            <a:off x="6868563" y="2674880"/>
+            <a:ext cx="5024673" cy="2308324"/>
+          </a:xfrm>
+          <a:prstGeom prst="rect">
+            <a:avLst/>
+          </a:prstGeom>
+          <a:noFill/>
+        </p:spPr>
+        <p:txBody>
+          <a:bodyPr wrap="square">
+            <a:spAutoFit/>
+          </a:bodyPr>
+          <a:lstStyle/>
+          <a:p>
+            <a:pPr marL="285750" indent="-285750">
+              <a:buFont typeface="Arial" panose="020B0604020202020204" pitchFamily="34" charset="0"/>
+              <a:buChar char="•"/>
+            </a:pPr>
+            <a:r>
+              <a:rPr lang="de-DE" b="1" i="1" dirty="0"/>
+              <a:t>Extreme Cases</a:t>
+            </a:r>
+          </a:p>
+          <a:p>
+            <a:pPr marL="285750" indent="-285750">
+              <a:buFont typeface="Arial" panose="020B0604020202020204" pitchFamily="34" charset="0"/>
+              <a:buChar char="•"/>
+            </a:pPr>
+            <a:r>
+              <a:rPr lang="de-DE" b="1" i="1" dirty="0"/>
+              <a:t>logo-ratio: </a:t>
+            </a:r>
+            <a:r>
+              <a:rPr lang="de-DE" b="1" dirty="0"/>
+              <a:t>0</a:t>
+            </a:r>
+            <a:r>
+              <a:rPr lang="de-DE" dirty="0"/>
+              <a:t> → logo </a:t>
+            </a:r>
+            <a:r>
+              <a:rPr lang="de-DE" dirty="0" err="1"/>
+              <a:t>disappears</a:t>
+            </a:r>
+            <a:endParaRPr lang="de-DE" dirty="0"/>
+          </a:p>
+          <a:p>
+            <a:pPr marL="285750" indent="-285750">
+              <a:buFont typeface="Arial" panose="020B0604020202020204" pitchFamily="34" charset="0"/>
+              <a:buChar char="•"/>
+            </a:pPr>
+            <a:r>
+              <a:rPr lang="de-DE" b="1" i="1" dirty="0"/>
+              <a:t>logo-ratio:</a:t>
+            </a:r>
+            <a:r>
+              <a:rPr lang="de-DE" b="1" dirty="0"/>
+              <a:t>100</a:t>
+            </a:r>
+            <a:r>
+              <a:rPr lang="de-DE" dirty="0"/>
+              <a:t> → QR-Code </a:t>
+            </a:r>
+            <a:r>
+              <a:rPr lang="de-DE" dirty="0" err="1"/>
+              <a:t>disappears</a:t>
+            </a:r>
+            <a:endParaRPr lang="de-DE" dirty="0"/>
+          </a:p>
+          <a:p>
+            <a:pPr marL="285750" indent="-285750">
+              <a:buFont typeface="Arial" panose="020B0604020202020204" pitchFamily="34" charset="0"/>
+              <a:buChar char="•"/>
+            </a:pPr>
+            <a:r>
+              <a:rPr lang="de-DE" b="1" i="1" dirty="0"/>
+              <a:t>logo-ratio: &gt;7</a:t>
+            </a:r>
+            <a:r>
+              <a:rPr lang="de-DE" b="1" dirty="0"/>
+              <a:t>0  </a:t>
+            </a:r>
+            <a:r>
+              <a:rPr lang="de-DE" dirty="0"/>
+              <a:t>→ the logo </a:t>
+            </a:r>
+            <a:r>
+              <a:rPr lang="de-DE" dirty="0" err="1"/>
+              <a:t>has</a:t>
+            </a:r>
+            <a:r>
+              <a:rPr lang="de-DE" dirty="0"/>
+              <a:t> </a:t>
+            </a:r>
+            <a:r>
+              <a:rPr lang="de-DE" dirty="0" err="1"/>
+              <a:t>already</a:t>
+            </a:r>
+            <a:r>
+              <a:rPr lang="de-DE" dirty="0"/>
+              <a:t> </a:t>
+            </a:r>
+            <a:r>
+              <a:rPr lang="de-DE" dirty="0" err="1"/>
+              <a:t>reached</a:t>
+            </a:r>
+            <a:r>
+              <a:rPr lang="de-DE" dirty="0"/>
+              <a:t> the </a:t>
+            </a:r>
+            <a:r>
+              <a:rPr lang="de-DE" dirty="0" err="1"/>
+              <a:t>available</a:t>
+            </a:r>
+            <a:r>
+              <a:rPr lang="de-DE" dirty="0"/>
+              <a:t> </a:t>
+            </a:r>
+            <a:r>
+              <a:rPr lang="de-DE" dirty="0" err="1"/>
+              <a:t>space</a:t>
+            </a:r>
+            <a:r>
+              <a:rPr lang="de-DE" dirty="0"/>
+              <a:t> in x-</a:t>
+            </a:r>
+            <a:r>
+              <a:rPr lang="de-DE" dirty="0" err="1"/>
+              <a:t>direction</a:t>
+            </a:r>
+            <a:r>
+              <a:rPr lang="de-DE" dirty="0"/>
+              <a:t> </a:t>
+            </a:r>
+            <a:r>
+              <a:rPr lang="de-DE" dirty="0" err="1"/>
+              <a:t>here</a:t>
+            </a:r>
+            <a:r>
+              <a:rPr lang="de-DE" dirty="0"/>
+              <a:t> and </a:t>
+            </a:r>
+            <a:r>
+              <a:rPr lang="de-DE" dirty="0" err="1"/>
+              <a:t>wont</a:t>
+            </a:r>
+            <a:r>
+              <a:rPr lang="de-DE" dirty="0"/>
+              <a:t> </a:t>
+            </a:r>
+            <a:r>
+              <a:rPr lang="de-DE" dirty="0" err="1"/>
+              <a:t>get</a:t>
+            </a:r>
+            <a:r>
+              <a:rPr lang="de-DE" dirty="0"/>
+              <a:t> </a:t>
+            </a:r>
+            <a:r>
+              <a:rPr lang="de-DE" dirty="0" err="1"/>
+              <a:t>bigger</a:t>
+            </a:r>
+            <a:r>
+              <a:rPr lang="de-DE" dirty="0"/>
+              <a:t>, </a:t>
+            </a:r>
+            <a:r>
+              <a:rPr lang="de-DE" dirty="0" err="1"/>
+              <a:t>only</a:t>
+            </a:r>
+            <a:r>
+              <a:rPr lang="de-DE" dirty="0"/>
+              <a:t> the QR code </a:t>
+            </a:r>
+            <a:r>
+              <a:rPr lang="de-DE" dirty="0" err="1"/>
+              <a:t>shrinks</a:t>
+            </a:r>
+            <a:r>
+              <a:rPr lang="de-DE" b="1" dirty="0"/>
+              <a:t>.</a:t>
+            </a:r>
+            <a:endParaRPr lang="de-DE" dirty="0"/>
+          </a:p>
+          <a:p>
+            <a:pPr marL="285750" indent="-285750">
+              <a:buFont typeface="Arial" panose="020B0604020202020204" pitchFamily="34" charset="0"/>
+              <a:buChar char="•"/>
+            </a:pPr>
+            <a:endParaRPr lang="de-DE" sz="1800" dirty="0"/>
+          </a:p>
+        </p:txBody>
+      </p:sp>
+      <p:sp>
+        <p:nvSpPr>
+          <p:cNvPr id="39" name="Textfeld 38">
+            <a:extLst>
+              <a:ext uri="{FF2B5EF4-FFF2-40B4-BE49-F238E27FC236}">
+                <a16:creationId xmlns:a16="http://schemas.microsoft.com/office/drawing/2014/main" id="{CFB95A12-799B-BFD6-FCF9-1D538BC1A5DC}"/>
+              </a:ext>
+            </a:extLst>
+          </p:cNvPr>
+          <p:cNvSpPr txBox="1"/>
+          <p:nvPr/>
+        </p:nvSpPr>
+        <p:spPr>
+          <a:xfrm>
+            <a:off x="4008422" y="3032186"/>
+            <a:ext cx="1695261" cy="369332"/>
+          </a:xfrm>
+          <a:prstGeom prst="rect">
+            <a:avLst/>
+          </a:prstGeom>
+          <a:noFill/>
+        </p:spPr>
+        <p:txBody>
+          <a:bodyPr wrap="square">
+            <a:spAutoFit/>
+          </a:bodyPr>
+          <a:lstStyle/>
+          <a:p>
+            <a:r>
+              <a:rPr lang="de-DE" sz="1800" b="1" i="1" dirty="0"/>
+              <a:t>logo-ratio: </a:t>
+            </a:r>
+            <a:r>
+              <a:rPr lang="de-DE" sz="1800" b="1" dirty="0"/>
+              <a:t>30</a:t>
+            </a:r>
+            <a:endParaRPr lang="de-DE" dirty="0"/>
+          </a:p>
+        </p:txBody>
+      </p:sp>
+      <p:sp>
+        <p:nvSpPr>
+          <p:cNvPr id="41" name="Textfeld 40">
+            <a:extLst>
+              <a:ext uri="{FF2B5EF4-FFF2-40B4-BE49-F238E27FC236}">
+                <a16:creationId xmlns:a16="http://schemas.microsoft.com/office/drawing/2014/main" id="{AD8161E1-A74B-50F9-FBB7-E0D01A8F08DE}"/>
+              </a:ext>
+            </a:extLst>
+          </p:cNvPr>
+          <p:cNvSpPr txBox="1"/>
+          <p:nvPr/>
+        </p:nvSpPr>
+        <p:spPr>
+          <a:xfrm>
+            <a:off x="4008422" y="4150107"/>
+            <a:ext cx="1695261" cy="369332"/>
+          </a:xfrm>
+          <a:prstGeom prst="rect">
+            <a:avLst/>
+          </a:prstGeom>
+          <a:noFill/>
+        </p:spPr>
+        <p:txBody>
+          <a:bodyPr wrap="square">
+            <a:spAutoFit/>
+          </a:bodyPr>
+          <a:lstStyle/>
+          <a:p>
+            <a:r>
+              <a:rPr lang="de-DE" sz="1800" b="1" i="1" dirty="0"/>
+              <a:t>logo-ratio: </a:t>
+            </a:r>
+            <a:r>
+              <a:rPr lang="de-DE" b="1" i="1" dirty="0"/>
+              <a:t>5</a:t>
+            </a:r>
+            <a:r>
+              <a:rPr lang="de-DE" sz="1800" b="1" dirty="0"/>
+              <a:t>0</a:t>
+            </a:r>
+            <a:endParaRPr lang="de-DE" dirty="0"/>
+          </a:p>
+        </p:txBody>
+      </p:sp>
+      <p:sp>
+        <p:nvSpPr>
+          <p:cNvPr id="43" name="Textfeld 42">
+            <a:extLst>
+              <a:ext uri="{FF2B5EF4-FFF2-40B4-BE49-F238E27FC236}">
+                <a16:creationId xmlns:a16="http://schemas.microsoft.com/office/drawing/2014/main" id="{0760B68A-F919-DC15-3F0F-588762E067E1}"/>
+              </a:ext>
+            </a:extLst>
+          </p:cNvPr>
+          <p:cNvSpPr txBox="1"/>
+          <p:nvPr/>
+        </p:nvSpPr>
+        <p:spPr>
+          <a:xfrm>
+            <a:off x="3957496" y="5622099"/>
+            <a:ext cx="2138504" cy="369332"/>
+          </a:xfrm>
+          <a:prstGeom prst="rect">
+            <a:avLst/>
+          </a:prstGeom>
+          <a:noFill/>
+        </p:spPr>
+        <p:txBody>
+          <a:bodyPr wrap="square">
+            <a:spAutoFit/>
+          </a:bodyPr>
+          <a:lstStyle/>
+          <a:p>
+            <a:r>
+              <a:rPr lang="de-DE" sz="1800" b="1" i="1" dirty="0"/>
+              <a:t>logo-ratio: </a:t>
+            </a:r>
+            <a:r>
+              <a:rPr lang="de-DE" b="1" i="1" dirty="0"/>
+              <a:t>7</a:t>
+            </a:r>
+            <a:r>
+              <a:rPr lang="de-DE" sz="1800" b="1" dirty="0"/>
+              <a:t>0</a:t>
+            </a:r>
+            <a:endParaRPr lang="de-DE" dirty="0"/>
+          </a:p>
+        </p:txBody>
+      </p:sp>
+      <p:sp>
+        <p:nvSpPr>
+          <p:cNvPr id="45" name="Textfeld 44">
+            <a:extLst>
+              <a:ext uri="{FF2B5EF4-FFF2-40B4-BE49-F238E27FC236}">
+                <a16:creationId xmlns:a16="http://schemas.microsoft.com/office/drawing/2014/main" id="{21BD8E3F-3D6A-4975-C6C3-E0997D7FA525}"/>
+              </a:ext>
+            </a:extLst>
+          </p:cNvPr>
+          <p:cNvSpPr txBox="1"/>
+          <p:nvPr/>
+        </p:nvSpPr>
+        <p:spPr>
+          <a:xfrm>
+            <a:off x="4388668" y="2098931"/>
+            <a:ext cx="6097508" cy="369332"/>
+          </a:xfrm>
+          <a:prstGeom prst="rect">
+            <a:avLst/>
+          </a:prstGeom>
+          <a:noFill/>
+        </p:spPr>
+        <p:txBody>
+          <a:bodyPr wrap="square">
+            <a:spAutoFit/>
+          </a:bodyPr>
+          <a:lstStyle/>
+          <a:p>
+            <a:r>
+              <a:rPr lang="de-DE" sz="1800" dirty="0">
+                <a:solidFill>
+                  <a:srgbClr val="FF0000"/>
+                </a:solidFill>
+              </a:rPr>
+              <a:t>Set the</a:t>
+            </a:r>
+            <a:r>
+              <a:rPr lang="de-DE" sz="1800" b="1" i="1" dirty="0">
+                <a:solidFill>
+                  <a:srgbClr val="FF0000"/>
+                </a:solidFill>
+              </a:rPr>
+              <a:t> logo-ratio </a:t>
+            </a:r>
+            <a:r>
+              <a:rPr lang="de-DE" sz="1800" dirty="0">
+                <a:solidFill>
+                  <a:srgbClr val="FF0000"/>
+                </a:solidFill>
+              </a:rPr>
+              <a:t>to a </a:t>
+            </a:r>
+            <a:r>
+              <a:rPr lang="de-DE" sz="1800" dirty="0" err="1">
+                <a:solidFill>
+                  <a:srgbClr val="FF0000"/>
+                </a:solidFill>
+              </a:rPr>
+              <a:t>value</a:t>
+            </a:r>
+            <a:r>
+              <a:rPr lang="de-DE" sz="1800" dirty="0">
+                <a:solidFill>
+                  <a:srgbClr val="FF0000"/>
+                </a:solidFill>
+              </a:rPr>
+              <a:t> </a:t>
+            </a:r>
+            <a:r>
+              <a:rPr lang="de-DE" sz="1800" dirty="0" err="1">
+                <a:solidFill>
+                  <a:srgbClr val="FF0000"/>
+                </a:solidFill>
+              </a:rPr>
+              <a:t>between</a:t>
+            </a:r>
+            <a:r>
+              <a:rPr lang="de-DE" sz="1800" dirty="0">
+                <a:solidFill>
+                  <a:srgbClr val="FF0000"/>
+                </a:solidFill>
+              </a:rPr>
+              <a:t> 0 and 100</a:t>
+            </a:r>
+          </a:p>
+        </p:txBody>
+      </p:sp>
+      <p:sp>
+        <p:nvSpPr>
+          <p:cNvPr id="47" name="Textfeld 46">
+            <a:extLst>
+              <a:ext uri="{FF2B5EF4-FFF2-40B4-BE49-F238E27FC236}">
+                <a16:creationId xmlns:a16="http://schemas.microsoft.com/office/drawing/2014/main" id="{B77A61C4-BC69-87B8-70AB-E5BEB9A44991}"/>
+              </a:ext>
+            </a:extLst>
+          </p:cNvPr>
+          <p:cNvSpPr txBox="1"/>
+          <p:nvPr/>
+        </p:nvSpPr>
+        <p:spPr>
+          <a:xfrm>
+            <a:off x="1705824" y="1892717"/>
+            <a:ext cx="1248944" cy="369332"/>
+          </a:xfrm>
+          <a:prstGeom prst="rect">
+            <a:avLst/>
+          </a:prstGeom>
+          <a:noFill/>
+        </p:spPr>
+        <p:txBody>
+          <a:bodyPr wrap="square">
+            <a:spAutoFit/>
+          </a:bodyPr>
+          <a:lstStyle/>
+          <a:p>
+            <a:r>
+              <a:rPr lang="de-DE" sz="1800" b="1" dirty="0" err="1"/>
+              <a:t>Example</a:t>
+            </a:r>
+            <a:r>
+              <a:rPr lang="de-DE" b="1" dirty="0" err="1"/>
+              <a:t>s</a:t>
+            </a:r>
+            <a:endParaRPr lang="de-DE" sz="1800" b="1" dirty="0"/>
+          </a:p>
+        </p:txBody>
+      </p:sp>
+      <p:cxnSp>
+        <p:nvCxnSpPr>
+          <p:cNvPr id="51" name="Gerade Verbindung mit Pfeil 50">
+            <a:extLst>
+              <a:ext uri="{FF2B5EF4-FFF2-40B4-BE49-F238E27FC236}">
+                <a16:creationId xmlns:a16="http://schemas.microsoft.com/office/drawing/2014/main" id="{BF812FC1-AAE1-F347-99E9-ACFDD224C53F}"/>
+              </a:ext>
+            </a:extLst>
+          </p:cNvPr>
+          <p:cNvCxnSpPr>
+            <a:cxnSpLocks/>
+          </p:cNvCxnSpPr>
+          <p:nvPr/>
+        </p:nvCxnSpPr>
+        <p:spPr>
+          <a:xfrm flipH="1">
+            <a:off x="4623725" y="3901171"/>
+            <a:ext cx="2528513" cy="1594282"/>
+          </a:xfrm>
+          <a:prstGeom prst="straightConnector1">
+            <a:avLst/>
+          </a:prstGeom>
+          <a:ln w="57150">
+            <a:solidFill>
+              <a:srgbClr val="FF0000"/>
+            </a:solidFill>
+            <a:tailEnd type="triangle"/>
+          </a:ln>
+        </p:spPr>
+        <p:style>
+          <a:lnRef idx="2">
+            <a:schemeClr val="accent1"/>
+          </a:lnRef>
+          <a:fillRef idx="0">
+            <a:schemeClr val="accent1"/>
+          </a:fillRef>
+          <a:effectRef idx="1">
+            <a:schemeClr val="accent1"/>
+          </a:effectRef>
+          <a:fontRef idx="minor">
+            <a:schemeClr val="tx1"/>
+          </a:fontRef>
+        </p:style>
+      </p:cxnSp>
+      <p:sp>
+        <p:nvSpPr>
+          <p:cNvPr id="57" name="Textfeld 56">
+            <a:extLst>
+              <a:ext uri="{FF2B5EF4-FFF2-40B4-BE49-F238E27FC236}">
+                <a16:creationId xmlns:a16="http://schemas.microsoft.com/office/drawing/2014/main" id="{CAA575FC-02A1-FA1E-1DD1-DD670C87ED85}"/>
+              </a:ext>
+            </a:extLst>
+          </p:cNvPr>
+          <p:cNvSpPr txBox="1"/>
+          <p:nvPr/>
+        </p:nvSpPr>
+        <p:spPr>
+          <a:xfrm>
+            <a:off x="5875857" y="5234382"/>
+            <a:ext cx="6189553" cy="954107"/>
+          </a:xfrm>
+          <a:prstGeom prst="rect">
+            <a:avLst/>
+          </a:prstGeom>
+          <a:noFill/>
+          <a:ln>
+            <a:solidFill>
+              <a:schemeClr val="tx1"/>
+            </a:solidFill>
+          </a:ln>
+        </p:spPr>
+        <p:txBody>
+          <a:bodyPr wrap="square">
+            <a:spAutoFit/>
+          </a:bodyPr>
+          <a:lstStyle/>
+          <a:p>
+            <a:r>
+              <a:rPr lang="de-DE" sz="1400" b="1" dirty="0">
+                <a:solidFill>
+                  <a:srgbClr val="FF0000"/>
+                </a:solidFill>
+              </a:rPr>
+              <a:t>Tipps:</a:t>
+            </a:r>
+          </a:p>
+          <a:p>
+            <a:r>
+              <a:rPr lang="de-DE" sz="1400" dirty="0">
+                <a:solidFill>
+                  <a:srgbClr val="FF0000"/>
+                </a:solidFill>
+              </a:rPr>
+              <a:t>It </a:t>
+            </a:r>
+            <a:r>
+              <a:rPr lang="de-DE" sz="1400" dirty="0" err="1">
+                <a:solidFill>
+                  <a:srgbClr val="FF0000"/>
+                </a:solidFill>
+              </a:rPr>
+              <a:t>is</a:t>
+            </a:r>
+            <a:r>
+              <a:rPr lang="de-DE" sz="1400" dirty="0">
+                <a:solidFill>
+                  <a:srgbClr val="FF0000"/>
+                </a:solidFill>
+              </a:rPr>
+              <a:t> </a:t>
+            </a:r>
+            <a:r>
+              <a:rPr lang="de-DE" sz="1400" dirty="0" err="1">
+                <a:solidFill>
+                  <a:srgbClr val="FF0000"/>
+                </a:solidFill>
+              </a:rPr>
+              <a:t>recommended</a:t>
+            </a:r>
+            <a:r>
+              <a:rPr lang="de-DE" sz="1400" dirty="0">
+                <a:solidFill>
+                  <a:srgbClr val="FF0000"/>
+                </a:solidFill>
+              </a:rPr>
+              <a:t> to </a:t>
+            </a:r>
+            <a:r>
+              <a:rPr lang="de-DE" sz="1400" dirty="0" err="1">
+                <a:solidFill>
+                  <a:srgbClr val="FF0000"/>
+                </a:solidFill>
+              </a:rPr>
+              <a:t>cut</a:t>
+            </a:r>
+            <a:r>
+              <a:rPr lang="de-DE" sz="1400" dirty="0">
+                <a:solidFill>
+                  <a:srgbClr val="FF0000"/>
+                </a:solidFill>
+              </a:rPr>
+              <a:t> </a:t>
+            </a:r>
+            <a:r>
+              <a:rPr lang="de-DE" sz="1400" dirty="0" err="1">
+                <a:solidFill>
+                  <a:srgbClr val="FF0000"/>
+                </a:solidFill>
+              </a:rPr>
+              <a:t>excess</a:t>
+            </a:r>
+            <a:r>
+              <a:rPr lang="de-DE" sz="1400" dirty="0">
+                <a:solidFill>
+                  <a:srgbClr val="FF0000"/>
+                </a:solidFill>
+              </a:rPr>
+              <a:t> </a:t>
+            </a:r>
+            <a:r>
+              <a:rPr lang="de-DE" sz="1400" dirty="0" err="1">
+                <a:solidFill>
+                  <a:srgbClr val="FF0000"/>
+                </a:solidFill>
+              </a:rPr>
+              <a:t>white</a:t>
+            </a:r>
+            <a:r>
+              <a:rPr lang="de-DE" sz="1400" dirty="0">
+                <a:solidFill>
+                  <a:srgbClr val="FF0000"/>
+                </a:solidFill>
+              </a:rPr>
+              <a:t> </a:t>
+            </a:r>
+            <a:r>
+              <a:rPr lang="de-DE" sz="1400" dirty="0" err="1">
+                <a:solidFill>
+                  <a:srgbClr val="FF0000"/>
+                </a:solidFill>
+              </a:rPr>
+              <a:t>spaces</a:t>
+            </a:r>
+            <a:r>
+              <a:rPr lang="de-DE" sz="1400" dirty="0">
+                <a:solidFill>
+                  <a:srgbClr val="FF0000"/>
+                </a:solidFill>
+              </a:rPr>
+              <a:t> </a:t>
+            </a:r>
+            <a:r>
+              <a:rPr lang="de-DE" sz="1400" dirty="0" err="1">
+                <a:solidFill>
+                  <a:srgbClr val="FF0000"/>
+                </a:solidFill>
+              </a:rPr>
+              <a:t>around</a:t>
+            </a:r>
+            <a:r>
+              <a:rPr lang="de-DE" sz="1400" dirty="0">
+                <a:solidFill>
+                  <a:srgbClr val="FF0000"/>
+                </a:solidFill>
+              </a:rPr>
+              <a:t> the logo to </a:t>
+            </a:r>
+            <a:r>
+              <a:rPr lang="de-DE" sz="1400" dirty="0" err="1">
+                <a:solidFill>
+                  <a:srgbClr val="FF0000"/>
+                </a:solidFill>
+              </a:rPr>
+              <a:t>prevent</a:t>
+            </a:r>
+            <a:r>
+              <a:rPr lang="de-DE" sz="1400" dirty="0">
+                <a:solidFill>
+                  <a:srgbClr val="FF0000"/>
+                </a:solidFill>
+              </a:rPr>
+              <a:t> </a:t>
+            </a:r>
+            <a:r>
+              <a:rPr lang="de-DE" sz="1400" dirty="0" err="1">
+                <a:solidFill>
+                  <a:srgbClr val="FF0000"/>
+                </a:solidFill>
+              </a:rPr>
+              <a:t>gaps</a:t>
+            </a:r>
+            <a:r>
+              <a:rPr lang="de-DE" sz="1400" dirty="0">
+                <a:solidFill>
+                  <a:srgbClr val="FF0000"/>
+                </a:solidFill>
+              </a:rPr>
+              <a:t> on the </a:t>
+            </a:r>
+            <a:r>
+              <a:rPr lang="de-DE" sz="1400" dirty="0" err="1">
+                <a:solidFill>
+                  <a:srgbClr val="FF0000"/>
+                </a:solidFill>
+              </a:rPr>
+              <a:t>poster</a:t>
+            </a:r>
+            <a:r>
+              <a:rPr lang="de-DE" sz="1400" dirty="0">
+                <a:solidFill>
+                  <a:srgbClr val="FF0000"/>
+                </a:solidFill>
+              </a:rPr>
+              <a:t>.</a:t>
+            </a:r>
+          </a:p>
+          <a:p>
+            <a:r>
+              <a:rPr lang="de-DE" sz="1400" dirty="0" err="1">
+                <a:solidFill>
+                  <a:srgbClr val="FF0000"/>
+                </a:solidFill>
+              </a:rPr>
+              <a:t>If</a:t>
+            </a:r>
+            <a:r>
+              <a:rPr lang="de-DE" sz="1400" dirty="0">
+                <a:solidFill>
+                  <a:srgbClr val="FF0000"/>
+                </a:solidFill>
+              </a:rPr>
+              <a:t> </a:t>
+            </a:r>
+            <a:r>
+              <a:rPr lang="de-DE" sz="1400" dirty="0" err="1">
+                <a:solidFill>
+                  <a:srgbClr val="FF0000"/>
+                </a:solidFill>
+              </a:rPr>
+              <a:t>your</a:t>
+            </a:r>
+            <a:r>
+              <a:rPr lang="de-DE" sz="1400" dirty="0">
+                <a:solidFill>
+                  <a:srgbClr val="FF0000"/>
+                </a:solidFill>
+              </a:rPr>
+              <a:t> catch </a:t>
+            </a:r>
+            <a:r>
+              <a:rPr lang="de-DE" sz="1400" dirty="0" err="1">
+                <a:solidFill>
+                  <a:srgbClr val="FF0000"/>
+                </a:solidFill>
+              </a:rPr>
+              <a:t>phrase</a:t>
+            </a:r>
+            <a:r>
+              <a:rPr lang="de-DE" sz="1400" dirty="0">
+                <a:solidFill>
+                  <a:srgbClr val="FF0000"/>
+                </a:solidFill>
+              </a:rPr>
+              <a:t> </a:t>
+            </a:r>
+            <a:r>
+              <a:rPr lang="de-DE" sz="1400" dirty="0" err="1">
+                <a:solidFill>
+                  <a:srgbClr val="FF0000"/>
+                </a:solidFill>
+              </a:rPr>
+              <a:t>is</a:t>
+            </a:r>
+            <a:r>
+              <a:rPr lang="de-DE" sz="1400" dirty="0">
+                <a:solidFill>
+                  <a:srgbClr val="FF0000"/>
+                </a:solidFill>
+              </a:rPr>
+              <a:t> </a:t>
+            </a:r>
+            <a:r>
+              <a:rPr lang="de-DE" sz="1400" dirty="0" err="1">
+                <a:solidFill>
+                  <a:srgbClr val="FF0000"/>
+                </a:solidFill>
+              </a:rPr>
+              <a:t>too</a:t>
+            </a:r>
+            <a:r>
+              <a:rPr lang="de-DE" sz="1400" dirty="0">
+                <a:solidFill>
+                  <a:srgbClr val="FF0000"/>
+                </a:solidFill>
+              </a:rPr>
+              <a:t> </a:t>
+            </a:r>
+            <a:r>
+              <a:rPr lang="de-DE" sz="1400" dirty="0" err="1">
+                <a:solidFill>
+                  <a:srgbClr val="FF0000"/>
+                </a:solidFill>
+              </a:rPr>
+              <a:t>long</a:t>
+            </a:r>
+            <a:r>
+              <a:rPr lang="de-DE" sz="1400" dirty="0">
+                <a:solidFill>
+                  <a:srgbClr val="FF0000"/>
+                </a:solidFill>
+              </a:rPr>
+              <a:t>, it will </a:t>
+            </a:r>
+            <a:r>
+              <a:rPr lang="de-DE" sz="1400" dirty="0" err="1">
+                <a:solidFill>
+                  <a:srgbClr val="FF0000"/>
+                </a:solidFill>
+              </a:rPr>
+              <a:t>be</a:t>
+            </a:r>
+            <a:r>
+              <a:rPr lang="de-DE" sz="1400" dirty="0">
+                <a:solidFill>
+                  <a:srgbClr val="FF0000"/>
+                </a:solidFill>
+              </a:rPr>
+              <a:t> </a:t>
+            </a:r>
+            <a:r>
+              <a:rPr lang="de-DE" sz="1400" dirty="0" err="1">
+                <a:solidFill>
+                  <a:srgbClr val="FF0000"/>
+                </a:solidFill>
+              </a:rPr>
+              <a:t>covered</a:t>
+            </a:r>
+            <a:r>
+              <a:rPr lang="de-DE" sz="1400" dirty="0">
+                <a:solidFill>
+                  <a:srgbClr val="FF0000"/>
+                </a:solidFill>
+              </a:rPr>
+              <a:t> by the logo and QR-Code.</a:t>
+            </a:r>
+          </a:p>
+        </p:txBody>
+      </p:sp>
+    </p:spTree>
+    <p:extLst>
+      <p:ext uri="{BB962C8B-B14F-4D97-AF65-F5344CB8AC3E}">
+        <p14:creationId xmlns:p14="http://schemas.microsoft.com/office/powerpoint/2010/main" val="2982264796"/>
+      </p:ext>
+    </p:extLst>
+  </p:cSld>
+  <p:clrMapOvr>
+    <a:masterClrMapping/>
+  </p:clrMapOvr>
+</p:sld>
+</file>
+
+<file path=ppt/slides/slide11.xml><?xml version="1.0" encoding="utf-8"?>
+<p:sld xmlns:a="http://schemas.openxmlformats.org/drawingml/2006/main" xmlns:r="http://schemas.openxmlformats.org/officeDocument/2006/relationships" xmlns:p="http://schemas.openxmlformats.org/presentationml/2006/main">
+  <p:cSld>
+    <p:spTree>
+      <p:nvGrpSpPr>
+        <p:cNvPr id="1" name=""/>
+        <p:cNvGrpSpPr/>
+        <p:nvPr/>
+      </p:nvGrpSpPr>
+      <p:grpSpPr>
+        <a:xfrm>
+          <a:off x="0" y="0"/>
+          <a:ext cx="0" cy="0"/>
+          <a:chOff x="0" y="0"/>
+          <a:chExt cx="0" cy="0"/>
+        </a:xfrm>
+      </p:grpSpPr>
+      <p:sp>
+        <p:nvSpPr>
+          <p:cNvPr id="2" name="Titel 1">
+            <a:extLst>
+              <a:ext uri="{FF2B5EF4-FFF2-40B4-BE49-F238E27FC236}">
+                <a16:creationId xmlns:a16="http://schemas.microsoft.com/office/drawing/2014/main" id="{942CC7F0-5F88-6EC3-CE22-79FE7E8C0DC7}"/>
               </a:ext>
             </a:extLst>
           </p:cNvPr>
@@ -3366,7 +5628,7 @@
             <a:spLocks noGrp="1"/>
           </p:cNvSpPr>
           <p:nvPr>
-            <p:ph type="subTitle" idx="1"/>
+            <p:ph type="title"/>
           </p:nvPr>
         </p:nvSpPr>
         <p:spPr/>
@@ -3378,10 +5640,1999 @@
           </a:p>
         </p:txBody>
       </p:sp>
+      <p:pic>
+        <p:nvPicPr>
+          <p:cNvPr id="5" name="Inhaltsplatzhalter 4">
+            <a:extLst>
+              <a:ext uri="{FF2B5EF4-FFF2-40B4-BE49-F238E27FC236}">
+                <a16:creationId xmlns:a16="http://schemas.microsoft.com/office/drawing/2014/main" id="{9360B620-1C53-FD3E-530C-B069DA0FD501}"/>
+              </a:ext>
+            </a:extLst>
+          </p:cNvPr>
+          <p:cNvPicPr>
+            <a:picLocks noGrp="1" noChangeAspect="1"/>
+          </p:cNvPicPr>
+          <p:nvPr>
+            <p:ph idx="1"/>
+          </p:nvPr>
+        </p:nvPicPr>
+        <p:blipFill>
+          <a:blip r:embed="rId2"/>
+          <a:stretch>
+            <a:fillRect/>
+          </a:stretch>
+        </p:blipFill>
+        <p:spPr>
+          <a:xfrm>
+            <a:off x="4400313" y="3434477"/>
+            <a:ext cx="3391373" cy="1133633"/>
+          </a:xfrm>
+          <a:prstGeom prst="rect">
+            <a:avLst/>
+          </a:prstGeom>
+        </p:spPr>
+      </p:pic>
+      <p:pic>
+        <p:nvPicPr>
+          <p:cNvPr id="7" name="Grafik 6">
+            <a:extLst>
+              <a:ext uri="{FF2B5EF4-FFF2-40B4-BE49-F238E27FC236}">
+                <a16:creationId xmlns:a16="http://schemas.microsoft.com/office/drawing/2014/main" id="{69347A1F-EC0F-53D9-4FD3-27D5A4959364}"/>
+              </a:ext>
+            </a:extLst>
+          </p:cNvPr>
+          <p:cNvPicPr>
+            <a:picLocks noChangeAspect="1"/>
+          </p:cNvPicPr>
+          <p:nvPr/>
+        </p:nvPicPr>
+        <p:blipFill>
+          <a:blip r:embed="rId3">
+            <a:extLst>
+              <a:ext uri="{28A0092B-C50C-407E-A947-70E740481C1C}">
+                <a14:useLocalDpi xmlns:a14="http://schemas.microsoft.com/office/drawing/2010/main" val="0"/>
+              </a:ext>
+            </a:extLst>
+          </a:blip>
+          <a:srcRect l="1336" t="13000" r="7583" b="3092"/>
+          <a:stretch>
+            <a:fillRect/>
+          </a:stretch>
+        </p:blipFill>
+        <p:spPr>
+          <a:xfrm>
+            <a:off x="1771048" y="1973179"/>
+            <a:ext cx="8094847" cy="3301465"/>
+          </a:xfrm>
+          <a:prstGeom prst="rect">
+            <a:avLst/>
+          </a:prstGeom>
+        </p:spPr>
+      </p:pic>
     </p:spTree>
     <p:extLst>
       <p:ext uri="{BB962C8B-B14F-4D97-AF65-F5344CB8AC3E}">
-        <p14:creationId xmlns:p14="http://schemas.microsoft.com/office/powerpoint/2010/main" val="3292178943"/>
+        <p14:creationId xmlns:p14="http://schemas.microsoft.com/office/powerpoint/2010/main" val="1291413361"/>
+      </p:ext>
+    </p:extLst>
+  </p:cSld>
+  <p:clrMapOvr>
+    <a:masterClrMapping/>
+  </p:clrMapOvr>
+</p:sld>
+</file>
+
+<file path=ppt/slides/slide12.xml><?xml version="1.0" encoding="utf-8"?>
+<p:sld xmlns:a="http://schemas.openxmlformats.org/drawingml/2006/main" xmlns:r="http://schemas.openxmlformats.org/officeDocument/2006/relationships" xmlns:p="http://schemas.openxmlformats.org/presentationml/2006/main">
+  <p:cSld>
+    <p:spTree>
+      <p:nvGrpSpPr>
+        <p:cNvPr id="1" name=""/>
+        <p:cNvGrpSpPr/>
+        <p:nvPr/>
+      </p:nvGrpSpPr>
+      <p:grpSpPr>
+        <a:xfrm>
+          <a:off x="0" y="0"/>
+          <a:ext cx="0" cy="0"/>
+          <a:chOff x="0" y="0"/>
+          <a:chExt cx="0" cy="0"/>
+        </a:xfrm>
+      </p:grpSpPr>
+      <p:sp>
+        <p:nvSpPr>
+          <p:cNvPr id="4" name="Titel 1">
+            <a:extLst>
+              <a:ext uri="{FF2B5EF4-FFF2-40B4-BE49-F238E27FC236}">
+                <a16:creationId xmlns:a16="http://schemas.microsoft.com/office/drawing/2014/main" id="{1E536E23-BDFE-DA1C-5918-DB92D358279C}"/>
+              </a:ext>
+            </a:extLst>
+          </p:cNvPr>
+          <p:cNvSpPr txBox="1">
+            <a:spLocks/>
+          </p:cNvSpPr>
+          <p:nvPr/>
+        </p:nvSpPr>
+        <p:spPr>
+          <a:xfrm>
+            <a:off x="3705792" y="126978"/>
+            <a:ext cx="4292965" cy="554575"/>
+          </a:xfrm>
+          <a:prstGeom prst="rect">
+            <a:avLst/>
+          </a:prstGeom>
+        </p:spPr>
+        <p:txBody>
+          <a:bodyPr vert="horz" lIns="91440" tIns="45720" rIns="91440" bIns="45720" rtlCol="0" anchor="ctr">
+            <a:normAutofit fontScale="97500"/>
+          </a:bodyPr>
+          <a:lstStyle>
+            <a:lvl1pPr algn="l" defTabSz="914400" rtl="0" eaLnBrk="1" latinLnBrk="0" hangingPunct="1">
+              <a:lnSpc>
+                <a:spcPct val="90000"/>
+              </a:lnSpc>
+              <a:spcBef>
+                <a:spcPct val="0"/>
+              </a:spcBef>
+              <a:buNone/>
+              <a:defRPr sz="4400" kern="1200">
+                <a:solidFill>
+                  <a:schemeClr val="tx1"/>
+                </a:solidFill>
+                <a:latin typeface="+mj-lt"/>
+                <a:ea typeface="+mj-ea"/>
+                <a:cs typeface="+mj-cs"/>
+              </a:defRPr>
+            </a:lvl1pPr>
+          </a:lstStyle>
+          <a:p>
+            <a:r>
+              <a:rPr lang="de-DE" sz="3200" b="1" dirty="0">
+                <a:solidFill>
+                  <a:schemeClr val="tx2">
+                    <a:lumMod val="90000"/>
+                    <a:lumOff val="10000"/>
+                  </a:schemeClr>
+                </a:solidFill>
+              </a:rPr>
+              <a:t>Folder </a:t>
+            </a:r>
+            <a:r>
+              <a:rPr lang="de-DE" sz="3200" b="1" dirty="0" err="1">
+                <a:solidFill>
+                  <a:schemeClr val="tx2">
+                    <a:lumMod val="90000"/>
+                    <a:lumOff val="10000"/>
+                  </a:schemeClr>
+                </a:solidFill>
+              </a:rPr>
+              <a:t>Structure</a:t>
+            </a:r>
+            <a:endParaRPr lang="de-DE" sz="3200" b="1" dirty="0">
+              <a:solidFill>
+                <a:schemeClr val="tx2">
+                  <a:lumMod val="90000"/>
+                  <a:lumOff val="10000"/>
+                </a:schemeClr>
+              </a:solidFill>
+            </a:endParaRPr>
+          </a:p>
+        </p:txBody>
+      </p:sp>
+      <p:sp>
+        <p:nvSpPr>
+          <p:cNvPr id="6" name="Textfeld 5">
+            <a:extLst>
+              <a:ext uri="{FF2B5EF4-FFF2-40B4-BE49-F238E27FC236}">
+                <a16:creationId xmlns:a16="http://schemas.microsoft.com/office/drawing/2014/main" id="{89773B32-3E51-1A76-5AE3-FCC1E676BAD4}"/>
+              </a:ext>
+            </a:extLst>
+          </p:cNvPr>
+          <p:cNvSpPr txBox="1"/>
+          <p:nvPr/>
+        </p:nvSpPr>
+        <p:spPr>
+          <a:xfrm>
+            <a:off x="1074932" y="558657"/>
+            <a:ext cx="10990478" cy="646331"/>
+          </a:xfrm>
+          <a:prstGeom prst="rect">
+            <a:avLst/>
+          </a:prstGeom>
+          <a:noFill/>
+        </p:spPr>
+        <p:txBody>
+          <a:bodyPr wrap="square" rtlCol="0">
+            <a:spAutoFit/>
+          </a:bodyPr>
+          <a:lstStyle/>
+          <a:p>
+            <a:r>
+              <a:rPr lang="de-DE" dirty="0"/>
+              <a:t>The typst </a:t>
+            </a:r>
+            <a:r>
+              <a:rPr lang="de-DE" dirty="0" err="1"/>
+              <a:t>file</a:t>
+            </a:r>
+            <a:r>
+              <a:rPr lang="de-DE" dirty="0"/>
+              <a:t> for all </a:t>
+            </a:r>
+            <a:r>
+              <a:rPr lang="de-DE" dirty="0" err="1"/>
+              <a:t>posters</a:t>
+            </a:r>
+            <a:r>
+              <a:rPr lang="de-DE" dirty="0"/>
+              <a:t> lies in the same </a:t>
+            </a:r>
+            <a:r>
+              <a:rPr lang="de-DE" dirty="0" err="1"/>
+              <a:t>folder</a:t>
+            </a:r>
+            <a:r>
+              <a:rPr lang="de-DE" dirty="0"/>
+              <a:t>, to </a:t>
+            </a:r>
+            <a:r>
+              <a:rPr lang="de-DE" dirty="0" err="1"/>
+              <a:t>make</a:t>
+            </a:r>
+            <a:r>
+              <a:rPr lang="de-DE" dirty="0"/>
+              <a:t> it </a:t>
+            </a:r>
+            <a:r>
+              <a:rPr lang="de-DE" dirty="0" err="1"/>
+              <a:t>easier</a:t>
+            </a:r>
+            <a:r>
+              <a:rPr lang="de-DE" dirty="0"/>
+              <a:t> for typst to find the </a:t>
+            </a:r>
+            <a:r>
+              <a:rPr lang="de-DE" dirty="0" err="1"/>
+              <a:t>library</a:t>
+            </a:r>
+            <a:r>
+              <a:rPr lang="de-DE" dirty="0"/>
+              <a:t>  </a:t>
+            </a:r>
+            <a:r>
+              <a:rPr lang="de-DE" i="1" dirty="0" err="1"/>
+              <a:t>mss_bib.typ</a:t>
+            </a:r>
+            <a:r>
+              <a:rPr lang="de-DE" i="1" dirty="0"/>
+              <a:t> </a:t>
+            </a:r>
+            <a:r>
+              <a:rPr lang="de-DE" dirty="0" err="1"/>
+              <a:t>which</a:t>
+            </a:r>
+            <a:r>
+              <a:rPr lang="de-DE" dirty="0"/>
+              <a:t> </a:t>
+            </a:r>
+            <a:r>
+              <a:rPr lang="de-DE" dirty="0" err="1"/>
+              <a:t>contains</a:t>
+            </a:r>
+            <a:r>
+              <a:rPr lang="de-DE" dirty="0"/>
+              <a:t> </a:t>
+            </a:r>
+            <a:r>
+              <a:rPr lang="de-DE" dirty="0" err="1"/>
+              <a:t>necessary</a:t>
+            </a:r>
+            <a:r>
+              <a:rPr lang="de-DE" dirty="0"/>
+              <a:t> </a:t>
+            </a:r>
+            <a:r>
+              <a:rPr lang="de-DE" dirty="0" err="1"/>
+              <a:t>custom</a:t>
+            </a:r>
+            <a:r>
+              <a:rPr lang="de-DE" dirty="0"/>
+              <a:t> </a:t>
+            </a:r>
+            <a:r>
+              <a:rPr lang="de-DE" dirty="0" err="1"/>
+              <a:t>functions</a:t>
+            </a:r>
+            <a:r>
+              <a:rPr lang="de-DE" dirty="0"/>
+              <a:t>.</a:t>
+            </a:r>
+            <a:endParaRPr lang="de-DE" b="1" dirty="0"/>
+          </a:p>
+        </p:txBody>
+      </p:sp>
+    </p:spTree>
+    <p:extLst>
+      <p:ext uri="{BB962C8B-B14F-4D97-AF65-F5344CB8AC3E}">
+        <p14:creationId xmlns:p14="http://schemas.microsoft.com/office/powerpoint/2010/main" val="647590783"/>
+      </p:ext>
+    </p:extLst>
+  </p:cSld>
+  <p:clrMapOvr>
+    <a:masterClrMapping/>
+  </p:clrMapOvr>
+</p:sld>
+</file>
+
+<file path=ppt/slides/slide13.xml><?xml version="1.0" encoding="utf-8"?>
+<p:sld xmlns:a="http://schemas.openxmlformats.org/drawingml/2006/main" xmlns:r="http://schemas.openxmlformats.org/officeDocument/2006/relationships" xmlns:p="http://schemas.openxmlformats.org/presentationml/2006/main">
+  <p:cSld>
+    <p:spTree>
+      <p:nvGrpSpPr>
+        <p:cNvPr id="1" name=""/>
+        <p:cNvGrpSpPr/>
+        <p:nvPr/>
+      </p:nvGrpSpPr>
+      <p:grpSpPr>
+        <a:xfrm>
+          <a:off x="0" y="0"/>
+          <a:ext cx="0" cy="0"/>
+          <a:chOff x="0" y="0"/>
+          <a:chExt cx="0" cy="0"/>
+        </a:xfrm>
+      </p:grpSpPr>
+      <p:sp>
+        <p:nvSpPr>
+          <p:cNvPr id="2" name="Titel 1">
+            <a:extLst>
+              <a:ext uri="{FF2B5EF4-FFF2-40B4-BE49-F238E27FC236}">
+                <a16:creationId xmlns:a16="http://schemas.microsoft.com/office/drawing/2014/main" id="{4DDCD6B6-DABA-FB83-E98B-7F1538D4061C}"/>
+              </a:ext>
+            </a:extLst>
+          </p:cNvPr>
+          <p:cNvSpPr>
+            <a:spLocks noGrp="1"/>
+          </p:cNvSpPr>
+          <p:nvPr>
+            <p:ph type="title"/>
+          </p:nvPr>
+        </p:nvSpPr>
+        <p:spPr/>
+        <p:txBody>
+          <a:bodyPr/>
+          <a:lstStyle/>
+          <a:p>
+            <a:r>
+              <a:rPr lang="de-DE" dirty="0"/>
+              <a:t>How </a:t>
+            </a:r>
+            <a:r>
+              <a:rPr lang="de-DE" dirty="0" err="1"/>
+              <a:t>to</a:t>
+            </a:r>
+            <a:r>
+              <a:rPr lang="de-DE" dirty="0"/>
+              <a:t> </a:t>
+            </a:r>
+            <a:r>
+              <a:rPr lang="de-DE" dirty="0" err="1"/>
+              <a:t>render</a:t>
+            </a:r>
+            <a:endParaRPr lang="de-DE" dirty="0"/>
+          </a:p>
+        </p:txBody>
+      </p:sp>
+      <p:cxnSp>
+        <p:nvCxnSpPr>
+          <p:cNvPr id="7" name="Gerade Verbindung mit Pfeil 6">
+            <a:extLst>
+              <a:ext uri="{FF2B5EF4-FFF2-40B4-BE49-F238E27FC236}">
+                <a16:creationId xmlns:a16="http://schemas.microsoft.com/office/drawing/2014/main" id="{8BF6DB16-D878-E593-3A92-67C03E62BE83}"/>
+              </a:ext>
+            </a:extLst>
+          </p:cNvPr>
+          <p:cNvCxnSpPr>
+            <a:cxnSpLocks/>
+          </p:cNvCxnSpPr>
+          <p:nvPr/>
+        </p:nvCxnSpPr>
+        <p:spPr>
+          <a:xfrm flipH="1">
+            <a:off x="5368705" y="1312752"/>
+            <a:ext cx="543208" cy="477524"/>
+          </a:xfrm>
+          <a:prstGeom prst="straightConnector1">
+            <a:avLst/>
+          </a:prstGeom>
+          <a:ln w="57150">
+            <a:solidFill>
+              <a:srgbClr val="FF0000"/>
+            </a:solidFill>
+            <a:tailEnd type="triangle"/>
+          </a:ln>
+        </p:spPr>
+        <p:style>
+          <a:lnRef idx="2">
+            <a:schemeClr val="accent1"/>
+          </a:lnRef>
+          <a:fillRef idx="0">
+            <a:schemeClr val="accent1"/>
+          </a:fillRef>
+          <a:effectRef idx="1">
+            <a:schemeClr val="accent1"/>
+          </a:effectRef>
+          <a:fontRef idx="minor">
+            <a:schemeClr val="tx1"/>
+          </a:fontRef>
+        </p:style>
+      </p:cxnSp>
+      <p:sp>
+        <p:nvSpPr>
+          <p:cNvPr id="10" name="Textfeld 9">
+            <a:extLst>
+              <a:ext uri="{FF2B5EF4-FFF2-40B4-BE49-F238E27FC236}">
+                <a16:creationId xmlns:a16="http://schemas.microsoft.com/office/drawing/2014/main" id="{4411C896-3989-0166-88DB-54D38CD6C476}"/>
+              </a:ext>
+            </a:extLst>
+          </p:cNvPr>
+          <p:cNvSpPr txBox="1"/>
+          <p:nvPr/>
+        </p:nvSpPr>
+        <p:spPr>
+          <a:xfrm>
+            <a:off x="6095999" y="265537"/>
+            <a:ext cx="5187636" cy="1200329"/>
+          </a:xfrm>
+          <a:prstGeom prst="rect">
+            <a:avLst/>
+          </a:prstGeom>
+          <a:noFill/>
+        </p:spPr>
+        <p:txBody>
+          <a:bodyPr wrap="square" rtlCol="0">
+            <a:spAutoFit/>
+          </a:bodyPr>
+          <a:lstStyle/>
+          <a:p>
+            <a:r>
+              <a:rPr lang="de-DE" dirty="0"/>
+              <a:t>This </a:t>
+            </a:r>
+            <a:r>
+              <a:rPr lang="de-DE" dirty="0" err="1"/>
+              <a:t>button</a:t>
+            </a:r>
+            <a:r>
+              <a:rPr lang="de-DE" dirty="0"/>
+              <a:t> </a:t>
+            </a:r>
+            <a:r>
+              <a:rPr lang="de-DE" dirty="0" err="1"/>
+              <a:t>renders</a:t>
+            </a:r>
+            <a:r>
+              <a:rPr lang="de-DE" dirty="0"/>
+              <a:t> </a:t>
+            </a:r>
+            <a:r>
+              <a:rPr lang="de-DE" dirty="0" err="1"/>
+              <a:t>the</a:t>
+            </a:r>
+            <a:r>
+              <a:rPr lang="de-DE" dirty="0"/>
+              <a:t> PDF and </a:t>
+            </a:r>
+            <a:r>
+              <a:rPr lang="de-DE" dirty="0" err="1"/>
+              <a:t>opens</a:t>
+            </a:r>
+            <a:r>
+              <a:rPr lang="de-DE" dirty="0"/>
+              <a:t> </a:t>
+            </a:r>
+            <a:r>
+              <a:rPr lang="de-DE" dirty="0" err="1"/>
+              <a:t>the</a:t>
+            </a:r>
+            <a:r>
+              <a:rPr lang="de-DE" dirty="0"/>
+              <a:t> </a:t>
+            </a:r>
+            <a:r>
+              <a:rPr lang="de-DE" dirty="0" err="1"/>
+              <a:t>preview</a:t>
+            </a:r>
+            <a:r>
+              <a:rPr lang="de-DE" dirty="0"/>
+              <a:t> </a:t>
+            </a:r>
+            <a:r>
+              <a:rPr lang="de-DE" dirty="0" err="1"/>
+              <a:t>window</a:t>
+            </a:r>
+            <a:r>
+              <a:rPr lang="de-DE" dirty="0"/>
+              <a:t>. </a:t>
+            </a:r>
+            <a:r>
+              <a:rPr lang="de-DE" dirty="0" err="1"/>
+              <a:t>If</a:t>
+            </a:r>
+            <a:r>
+              <a:rPr lang="de-DE" dirty="0"/>
+              <a:t> </a:t>
+            </a:r>
+            <a:r>
+              <a:rPr lang="de-DE" dirty="0" err="1"/>
+              <a:t>button</a:t>
+            </a:r>
+            <a:r>
+              <a:rPr lang="de-DE" dirty="0"/>
+              <a:t> </a:t>
+            </a:r>
+            <a:r>
+              <a:rPr lang="de-DE" dirty="0" err="1"/>
+              <a:t>is</a:t>
+            </a:r>
+            <a:r>
+              <a:rPr lang="de-DE" dirty="0"/>
+              <a:t> not </a:t>
+            </a:r>
+            <a:r>
+              <a:rPr lang="de-DE" dirty="0" err="1"/>
+              <a:t>there</a:t>
+            </a:r>
+            <a:r>
+              <a:rPr lang="de-DE" dirty="0"/>
+              <a:t>, press on </a:t>
+            </a:r>
+            <a:r>
+              <a:rPr lang="de-DE" dirty="0" err="1"/>
+              <a:t>the</a:t>
+            </a:r>
+            <a:r>
+              <a:rPr lang="de-DE" dirty="0"/>
+              <a:t> „</a:t>
+            </a:r>
+            <a:r>
+              <a:rPr lang="de-DE" dirty="0" err="1"/>
+              <a:t>execute</a:t>
+            </a:r>
+            <a:r>
+              <a:rPr lang="de-DE" dirty="0"/>
+              <a:t>“ </a:t>
+            </a:r>
+            <a:r>
+              <a:rPr lang="de-DE" dirty="0" err="1"/>
+              <a:t>button</a:t>
+            </a:r>
+            <a:r>
+              <a:rPr lang="de-DE" dirty="0"/>
+              <a:t> (in </a:t>
+            </a:r>
+            <a:r>
+              <a:rPr lang="de-DE" dirty="0" err="1"/>
+              <a:t>the</a:t>
+            </a:r>
+            <a:r>
+              <a:rPr lang="de-DE" dirty="0"/>
+              <a:t> </a:t>
+            </a:r>
+            <a:r>
+              <a:rPr lang="de-DE" dirty="0" err="1"/>
+              <a:t>image</a:t>
+            </a:r>
+            <a:r>
+              <a:rPr lang="de-DE" dirty="0"/>
+              <a:t> </a:t>
+            </a:r>
+            <a:r>
+              <a:rPr lang="de-DE" dirty="0" err="1"/>
+              <a:t>left</a:t>
+            </a:r>
+            <a:r>
+              <a:rPr lang="de-DE" dirty="0"/>
+              <a:t> </a:t>
+            </a:r>
+            <a:r>
+              <a:rPr lang="de-DE" dirty="0" err="1"/>
+              <a:t>to</a:t>
+            </a:r>
+            <a:r>
+              <a:rPr lang="de-DE" dirty="0"/>
+              <a:t> </a:t>
+            </a:r>
+            <a:r>
+              <a:rPr lang="de-DE" dirty="0" err="1"/>
+              <a:t>the</a:t>
+            </a:r>
+            <a:r>
+              <a:rPr lang="de-DE" dirty="0"/>
+              <a:t> </a:t>
+            </a:r>
+            <a:r>
+              <a:rPr lang="de-DE" dirty="0" err="1"/>
+              <a:t>render</a:t>
+            </a:r>
+            <a:r>
+              <a:rPr lang="de-DE" dirty="0"/>
+              <a:t> </a:t>
+            </a:r>
+            <a:r>
+              <a:rPr lang="de-DE" dirty="0" err="1"/>
+              <a:t>button</a:t>
+            </a:r>
+            <a:r>
+              <a:rPr lang="de-DE" dirty="0"/>
+              <a:t>)</a:t>
+            </a:r>
+          </a:p>
+        </p:txBody>
+      </p:sp>
+      <p:pic>
+        <p:nvPicPr>
+          <p:cNvPr id="8" name="Grafik 7">
+            <a:extLst>
+              <a:ext uri="{FF2B5EF4-FFF2-40B4-BE49-F238E27FC236}">
+                <a16:creationId xmlns:a16="http://schemas.microsoft.com/office/drawing/2014/main" id="{3C014855-A8BF-8BAC-4F2D-16E04ECF3B4E}"/>
+              </a:ext>
+            </a:extLst>
+          </p:cNvPr>
+          <p:cNvPicPr>
+            <a:picLocks noChangeAspect="1"/>
+          </p:cNvPicPr>
+          <p:nvPr/>
+        </p:nvPicPr>
+        <p:blipFill>
+          <a:blip r:embed="rId2"/>
+          <a:stretch>
+            <a:fillRect/>
+          </a:stretch>
+        </p:blipFill>
+        <p:spPr>
+          <a:xfrm>
+            <a:off x="5029169" y="1981190"/>
+            <a:ext cx="1899150" cy="539759"/>
+          </a:xfrm>
+          <a:prstGeom prst="rect">
+            <a:avLst/>
+          </a:prstGeom>
+        </p:spPr>
+      </p:pic>
+    </p:spTree>
+    <p:extLst>
+      <p:ext uri="{BB962C8B-B14F-4D97-AF65-F5344CB8AC3E}">
+        <p14:creationId xmlns:p14="http://schemas.microsoft.com/office/powerpoint/2010/main" val="2350023243"/>
+      </p:ext>
+    </p:extLst>
+  </p:cSld>
+  <p:clrMapOvr>
+    <a:masterClrMapping/>
+  </p:clrMapOvr>
+</p:sld>
+</file>
+
+<file path=ppt/slides/slide14.xml><?xml version="1.0" encoding="utf-8"?>
+<p:sld xmlns:a="http://schemas.openxmlformats.org/drawingml/2006/main" xmlns:r="http://schemas.openxmlformats.org/officeDocument/2006/relationships" xmlns:p="http://schemas.openxmlformats.org/presentationml/2006/main">
+  <p:cSld>
+    <p:spTree>
+      <p:nvGrpSpPr>
+        <p:cNvPr id="1" name=""/>
+        <p:cNvGrpSpPr/>
+        <p:nvPr/>
+      </p:nvGrpSpPr>
+      <p:grpSpPr>
+        <a:xfrm>
+          <a:off x="0" y="0"/>
+          <a:ext cx="0" cy="0"/>
+          <a:chOff x="0" y="0"/>
+          <a:chExt cx="0" cy="0"/>
+        </a:xfrm>
+      </p:grpSpPr>
+      <p:sp>
+        <p:nvSpPr>
+          <p:cNvPr id="2" name="Titel 1">
+            <a:extLst>
+              <a:ext uri="{FF2B5EF4-FFF2-40B4-BE49-F238E27FC236}">
+                <a16:creationId xmlns:a16="http://schemas.microsoft.com/office/drawing/2014/main" id="{CACE081E-AB00-ECBC-BEFA-4FC376C9D862}"/>
+              </a:ext>
+            </a:extLst>
+          </p:cNvPr>
+          <p:cNvSpPr>
+            <a:spLocks noGrp="1"/>
+          </p:cNvSpPr>
+          <p:nvPr>
+            <p:ph type="title"/>
+          </p:nvPr>
+        </p:nvSpPr>
+        <p:spPr/>
+        <p:txBody>
+          <a:bodyPr/>
+          <a:lstStyle/>
+          <a:p>
+            <a:r>
+              <a:rPr lang="de-DE" dirty="0"/>
+              <a:t>Typst </a:t>
+            </a:r>
+            <a:r>
+              <a:rPr lang="de-DE" dirty="0" err="1"/>
+              <a:t>tipps</a:t>
+            </a:r>
+            <a:endParaRPr lang="de-DE" dirty="0"/>
+          </a:p>
+        </p:txBody>
+      </p:sp>
+      <p:sp>
+        <p:nvSpPr>
+          <p:cNvPr id="3" name="Inhaltsplatzhalter 2">
+            <a:extLst>
+              <a:ext uri="{FF2B5EF4-FFF2-40B4-BE49-F238E27FC236}">
+                <a16:creationId xmlns:a16="http://schemas.microsoft.com/office/drawing/2014/main" id="{8079D132-64C8-5209-EBC1-BC46DEC5C26B}"/>
+              </a:ext>
+            </a:extLst>
+          </p:cNvPr>
+          <p:cNvSpPr>
+            <a:spLocks noGrp="1"/>
+          </p:cNvSpPr>
+          <p:nvPr>
+            <p:ph idx="1"/>
+          </p:nvPr>
+        </p:nvSpPr>
+        <p:spPr/>
+        <p:txBody>
+          <a:bodyPr/>
+          <a:lstStyle/>
+          <a:p>
+            <a:pPr marL="0" indent="0">
+              <a:buNone/>
+            </a:pPr>
+            <a:r>
+              <a:rPr lang="de-DE" sz="1600" dirty="0"/>
+              <a:t>#linebreak() : </a:t>
+            </a:r>
+            <a:r>
+              <a:rPr lang="de-DE" sz="1600" dirty="0" err="1"/>
+              <a:t>starts</a:t>
+            </a:r>
+            <a:r>
+              <a:rPr lang="de-DE" sz="1600" dirty="0"/>
+              <a:t> </a:t>
+            </a:r>
+            <a:r>
+              <a:rPr lang="de-DE" sz="1600" dirty="0" err="1"/>
+              <a:t>new</a:t>
+            </a:r>
+            <a:r>
+              <a:rPr lang="de-DE" sz="1600" dirty="0"/>
+              <a:t> </a:t>
+            </a:r>
+            <a:r>
+              <a:rPr lang="de-DE" sz="1600" dirty="0" err="1"/>
+              <a:t>line</a:t>
+            </a:r>
+            <a:endParaRPr lang="de-DE" sz="1600" dirty="0"/>
+          </a:p>
+          <a:p>
+            <a:pPr marL="0" indent="0">
+              <a:buNone/>
+            </a:pPr>
+            <a:endParaRPr lang="de-DE" sz="1600" dirty="0"/>
+          </a:p>
+          <a:p>
+            <a:pPr marL="0" indent="0">
+              <a:buNone/>
+            </a:pPr>
+            <a:endParaRPr lang="de-DE" sz="1600" dirty="0"/>
+          </a:p>
+          <a:p>
+            <a:pPr marL="0" indent="0">
+              <a:buNone/>
+            </a:pPr>
+            <a:r>
+              <a:rPr lang="de-DE" sz="1600" dirty="0"/>
+              <a:t>Units:</a:t>
+            </a:r>
+          </a:p>
+          <a:p>
+            <a:r>
+              <a:rPr lang="de-DE" sz="1600" dirty="0"/>
+              <a:t>% -&gt; </a:t>
+            </a:r>
+            <a:r>
+              <a:rPr lang="de-DE" sz="1600" dirty="0" err="1"/>
+              <a:t>how</a:t>
+            </a:r>
+            <a:r>
+              <a:rPr lang="de-DE" sz="1600" dirty="0"/>
+              <a:t> </a:t>
+            </a:r>
+            <a:r>
+              <a:rPr lang="de-DE" sz="1600" dirty="0" err="1"/>
+              <a:t>many</a:t>
+            </a:r>
+            <a:r>
+              <a:rPr lang="de-DE" sz="1600" dirty="0"/>
+              <a:t> </a:t>
+            </a:r>
+            <a:r>
+              <a:rPr lang="de-DE" sz="1600" dirty="0" err="1"/>
+              <a:t>percent</a:t>
+            </a:r>
+            <a:r>
+              <a:rPr lang="de-DE" sz="1600" dirty="0"/>
+              <a:t> </a:t>
+            </a:r>
+            <a:r>
+              <a:rPr lang="de-DE" sz="1600" dirty="0" err="1"/>
+              <a:t>of</a:t>
+            </a:r>
+            <a:r>
+              <a:rPr lang="de-DE" sz="1600" dirty="0"/>
+              <a:t> </a:t>
+            </a:r>
+            <a:r>
+              <a:rPr lang="de-DE" sz="1600" dirty="0" err="1"/>
+              <a:t>the</a:t>
+            </a:r>
+            <a:r>
+              <a:rPr lang="de-DE" sz="1600" dirty="0"/>
+              <a:t> </a:t>
+            </a:r>
+            <a:r>
+              <a:rPr lang="de-DE" sz="1600" dirty="0" err="1"/>
+              <a:t>current</a:t>
+            </a:r>
+            <a:r>
+              <a:rPr lang="de-DE" sz="1600" dirty="0"/>
+              <a:t> box</a:t>
+            </a:r>
+          </a:p>
+          <a:p>
+            <a:r>
+              <a:rPr lang="de-DE" sz="1600" dirty="0"/>
+              <a:t>Pt -&gt; absolut </a:t>
+            </a:r>
+            <a:r>
+              <a:rPr lang="de-DE" sz="1600" dirty="0" err="1"/>
+              <a:t>unit</a:t>
+            </a:r>
+            <a:r>
+              <a:rPr lang="de-DE" sz="1600" dirty="0"/>
+              <a:t> </a:t>
+            </a:r>
+            <a:r>
+              <a:rPr lang="de-DE" sz="1600" dirty="0" err="1"/>
+              <a:t>of</a:t>
+            </a:r>
+            <a:r>
+              <a:rPr lang="de-DE" sz="1600" dirty="0"/>
+              <a:t> </a:t>
+            </a:r>
+            <a:r>
+              <a:rPr lang="de-DE" sz="1600" dirty="0" err="1"/>
+              <a:t>measure</a:t>
+            </a:r>
+            <a:r>
+              <a:rPr lang="de-DE" sz="1600" dirty="0"/>
+              <a:t> (1pt=1/72 </a:t>
+            </a:r>
+            <a:r>
+              <a:rPr lang="de-DE" sz="1600" dirty="0" err="1"/>
+              <a:t>inch</a:t>
+            </a:r>
+            <a:r>
+              <a:rPr lang="de-DE" sz="1600" dirty="0"/>
+              <a:t>)</a:t>
+            </a:r>
+          </a:p>
+          <a:p>
+            <a:endParaRPr lang="de-DE" sz="1600" dirty="0"/>
+          </a:p>
+          <a:p>
+            <a:pPr marL="0" indent="0">
+              <a:buNone/>
+            </a:pPr>
+            <a:r>
+              <a:rPr lang="de-DE" sz="1600" dirty="0"/>
+              <a:t>Terminal </a:t>
+            </a:r>
+            <a:r>
+              <a:rPr lang="de-DE" sz="1600" dirty="0" err="1"/>
+              <a:t>commands</a:t>
+            </a:r>
+            <a:r>
+              <a:rPr lang="de-DE" sz="1600" dirty="0"/>
+              <a:t>:</a:t>
+            </a:r>
+          </a:p>
+          <a:p>
+            <a:r>
+              <a:rPr lang="de-DE" sz="1600" dirty="0"/>
+              <a:t>See </a:t>
+            </a:r>
+            <a:r>
+              <a:rPr lang="de-DE" sz="1600" dirty="0" err="1"/>
+              <a:t>available</a:t>
+            </a:r>
+            <a:r>
+              <a:rPr lang="de-DE" sz="1600" dirty="0"/>
+              <a:t> </a:t>
+            </a:r>
+            <a:r>
+              <a:rPr lang="de-DE" sz="1600" dirty="0" err="1"/>
+              <a:t>fonts</a:t>
+            </a:r>
+            <a:r>
+              <a:rPr lang="de-DE" sz="1600" dirty="0"/>
+              <a:t> on </a:t>
+            </a:r>
+            <a:r>
+              <a:rPr lang="de-DE" sz="1600" dirty="0" err="1"/>
+              <a:t>system</a:t>
+            </a:r>
+            <a:r>
+              <a:rPr lang="de-DE" sz="1600" dirty="0"/>
+              <a:t>: &gt;&gt; typst </a:t>
+            </a:r>
+            <a:r>
+              <a:rPr lang="de-DE" sz="1600" dirty="0" err="1"/>
+              <a:t>fonts</a:t>
+            </a:r>
+            <a:endParaRPr lang="de-DE" sz="1600" dirty="0"/>
+          </a:p>
+          <a:p>
+            <a:endParaRPr lang="de-DE" dirty="0"/>
+          </a:p>
+        </p:txBody>
+      </p:sp>
+      <p:pic>
+        <p:nvPicPr>
+          <p:cNvPr id="4" name="Grafik 3" descr="https://mbd.pages.rwth-aachen.de/shire/_images/result1.png">
+            <a:extLst>
+              <a:ext uri="{FF2B5EF4-FFF2-40B4-BE49-F238E27FC236}">
+                <a16:creationId xmlns:a16="http://schemas.microsoft.com/office/drawing/2014/main" id="{B7D8F575-1824-D363-F24D-1D92FBFBD624}"/>
+              </a:ext>
+            </a:extLst>
+          </p:cNvPr>
+          <p:cNvPicPr>
+            <a:picLocks noChangeAspect="1"/>
+          </p:cNvPicPr>
+          <p:nvPr/>
+        </p:nvPicPr>
+        <p:blipFill>
+          <a:blip r:embed="rId2"/>
+          <a:srcRect l="52591"/>
+          <a:stretch>
+            <a:fillRect/>
+          </a:stretch>
+        </p:blipFill>
+        <p:spPr>
+          <a:xfrm>
+            <a:off x="6366680" y="1304719"/>
+            <a:ext cx="4953159" cy="4248561"/>
+          </a:xfrm>
+          <a:prstGeom prst="rect">
+            <a:avLst/>
+          </a:prstGeom>
+        </p:spPr>
+      </p:pic>
+    </p:spTree>
+    <p:extLst>
+      <p:ext uri="{BB962C8B-B14F-4D97-AF65-F5344CB8AC3E}">
+        <p14:creationId xmlns:p14="http://schemas.microsoft.com/office/powerpoint/2010/main" val="639737774"/>
+      </p:ext>
+    </p:extLst>
+  </p:cSld>
+  <p:clrMapOvr>
+    <a:masterClrMapping/>
+  </p:clrMapOvr>
+</p:sld>
+</file>
+
+<file path=ppt/slides/slide15.xml><?xml version="1.0" encoding="utf-8"?>
+<p:sld xmlns:a="http://schemas.openxmlformats.org/drawingml/2006/main" xmlns:r="http://schemas.openxmlformats.org/officeDocument/2006/relationships" xmlns:p="http://schemas.openxmlformats.org/presentationml/2006/main">
+  <p:cSld>
+    <p:spTree>
+      <p:nvGrpSpPr>
+        <p:cNvPr id="1" name=""/>
+        <p:cNvGrpSpPr/>
+        <p:nvPr/>
+      </p:nvGrpSpPr>
+      <p:grpSpPr>
+        <a:xfrm>
+          <a:off x="0" y="0"/>
+          <a:ext cx="0" cy="0"/>
+          <a:chOff x="0" y="0"/>
+          <a:chExt cx="0" cy="0"/>
+        </a:xfrm>
+      </p:grpSpPr>
+      <p:sp>
+        <p:nvSpPr>
+          <p:cNvPr id="2" name="Titel 1">
+            <a:extLst>
+              <a:ext uri="{FF2B5EF4-FFF2-40B4-BE49-F238E27FC236}">
+                <a16:creationId xmlns:a16="http://schemas.microsoft.com/office/drawing/2014/main" id="{F84CA255-8835-0C99-E92B-D4393CB13DE1}"/>
+              </a:ext>
+            </a:extLst>
+          </p:cNvPr>
+          <p:cNvSpPr>
+            <a:spLocks noGrp="1"/>
+          </p:cNvSpPr>
+          <p:nvPr>
+            <p:ph type="title"/>
+          </p:nvPr>
+        </p:nvSpPr>
+        <p:spPr/>
+        <p:txBody>
+          <a:bodyPr/>
+          <a:lstStyle/>
+          <a:p>
+            <a:r>
+              <a:rPr lang="de-DE" dirty="0"/>
+              <a:t>How </a:t>
+            </a:r>
+            <a:r>
+              <a:rPr lang="de-DE" dirty="0" err="1"/>
+              <a:t>to</a:t>
+            </a:r>
+            <a:r>
+              <a:rPr lang="de-DE" dirty="0"/>
+              <a:t> </a:t>
+            </a:r>
+            <a:r>
+              <a:rPr lang="de-DE" dirty="0" err="1"/>
+              <a:t>create</a:t>
+            </a:r>
+            <a:r>
+              <a:rPr lang="de-DE" dirty="0"/>
+              <a:t> </a:t>
+            </a:r>
+            <a:r>
+              <a:rPr lang="de-DE" dirty="0" err="1"/>
+              <a:t>your</a:t>
+            </a:r>
+            <a:r>
+              <a:rPr lang="de-DE" dirty="0"/>
+              <a:t> own </a:t>
+            </a:r>
+            <a:r>
+              <a:rPr lang="de-DE" dirty="0" err="1"/>
+              <a:t>poster</a:t>
+            </a:r>
+            <a:endParaRPr lang="de-DE" dirty="0"/>
+          </a:p>
+        </p:txBody>
+      </p:sp>
+      <p:sp>
+        <p:nvSpPr>
+          <p:cNvPr id="3" name="Inhaltsplatzhalter 2">
+            <a:extLst>
+              <a:ext uri="{FF2B5EF4-FFF2-40B4-BE49-F238E27FC236}">
+                <a16:creationId xmlns:a16="http://schemas.microsoft.com/office/drawing/2014/main" id="{7C0600CD-F0AA-CA09-3FB6-8E20CE9DCF74}"/>
+              </a:ext>
+            </a:extLst>
+          </p:cNvPr>
+          <p:cNvSpPr>
+            <a:spLocks noGrp="1"/>
+          </p:cNvSpPr>
+          <p:nvPr>
+            <p:ph idx="1"/>
+          </p:nvPr>
+        </p:nvSpPr>
+        <p:spPr/>
+        <p:txBody>
+          <a:bodyPr/>
+          <a:lstStyle/>
+          <a:p>
+            <a:r>
+              <a:rPr lang="de-DE" dirty="0"/>
+              <a:t>Title: </a:t>
+            </a:r>
+            <a:r>
+              <a:rPr lang="de-DE" dirty="0" err="1"/>
+              <a:t>enter</a:t>
+            </a:r>
+            <a:r>
+              <a:rPr lang="de-DE" dirty="0"/>
+              <a:t> </a:t>
+            </a:r>
+            <a:r>
+              <a:rPr lang="de-DE" dirty="0" err="1"/>
+              <a:t>max</a:t>
+            </a:r>
+            <a:r>
+              <a:rPr lang="de-DE" dirty="0"/>
+              <a:t> 19 </a:t>
+            </a:r>
+            <a:r>
+              <a:rPr lang="de-DE" dirty="0" err="1"/>
+              <a:t>characters</a:t>
+            </a:r>
+            <a:r>
+              <a:rPr lang="de-DE" dirty="0"/>
+              <a:t>, </a:t>
+            </a:r>
+            <a:r>
+              <a:rPr lang="de-DE" dirty="0" err="1"/>
+              <a:t>otherwise</a:t>
+            </a:r>
+            <a:r>
+              <a:rPr lang="de-DE" dirty="0"/>
+              <a:t> </a:t>
+            </a:r>
+            <a:r>
+              <a:rPr lang="de-DE" dirty="0" err="1"/>
+              <a:t>the</a:t>
+            </a:r>
+            <a:r>
+              <a:rPr lang="de-DE" dirty="0"/>
+              <a:t> </a:t>
+            </a:r>
+            <a:r>
+              <a:rPr lang="de-DE" dirty="0" err="1"/>
+              <a:t>font</a:t>
+            </a:r>
+            <a:r>
+              <a:rPr lang="de-DE" dirty="0"/>
+              <a:t>-size </a:t>
+            </a:r>
+            <a:r>
+              <a:rPr lang="de-DE" dirty="0" err="1"/>
+              <a:t>of</a:t>
+            </a:r>
+            <a:r>
+              <a:rPr lang="de-DE" dirty="0"/>
+              <a:t> </a:t>
+            </a:r>
+            <a:r>
+              <a:rPr lang="de-DE" dirty="0" err="1"/>
+              <a:t>the</a:t>
+            </a:r>
+            <a:r>
+              <a:rPr lang="de-DE"/>
+              <a:t> title </a:t>
+            </a:r>
+            <a:r>
+              <a:rPr lang="de-DE" dirty="0"/>
+              <a:t>will </a:t>
+            </a:r>
+            <a:r>
+              <a:rPr lang="de-DE" dirty="0" err="1"/>
+              <a:t>shrink</a:t>
+            </a:r>
+            <a:endParaRPr lang="de-DE" dirty="0"/>
+          </a:p>
+        </p:txBody>
+      </p:sp>
+    </p:spTree>
+    <p:extLst>
+      <p:ext uri="{BB962C8B-B14F-4D97-AF65-F5344CB8AC3E}">
+        <p14:creationId xmlns:p14="http://schemas.microsoft.com/office/powerpoint/2010/main" val="644172504"/>
+      </p:ext>
+    </p:extLst>
+  </p:cSld>
+  <p:clrMapOvr>
+    <a:masterClrMapping/>
+  </p:clrMapOvr>
+</p:sld>
+</file>
+
+<file path=ppt/slides/slide16.xml><?xml version="1.0" encoding="utf-8"?>
+<p:sld xmlns:a="http://schemas.openxmlformats.org/drawingml/2006/main" xmlns:r="http://schemas.openxmlformats.org/officeDocument/2006/relationships" xmlns:p="http://schemas.openxmlformats.org/presentationml/2006/main">
+  <p:cSld>
+    <p:spTree>
+      <p:nvGrpSpPr>
+        <p:cNvPr id="1" name=""/>
+        <p:cNvGrpSpPr/>
+        <p:nvPr/>
+      </p:nvGrpSpPr>
+      <p:grpSpPr>
+        <a:xfrm>
+          <a:off x="0" y="0"/>
+          <a:ext cx="0" cy="0"/>
+          <a:chOff x="0" y="0"/>
+          <a:chExt cx="0" cy="0"/>
+        </a:xfrm>
+      </p:grpSpPr>
+      <p:pic>
+        <p:nvPicPr>
+          <p:cNvPr id="4" name="Picture 1">
+            <a:extLst>
+              <a:ext uri="{FF2B5EF4-FFF2-40B4-BE49-F238E27FC236}">
+                <a16:creationId xmlns:a16="http://schemas.microsoft.com/office/drawing/2014/main" id="{288AFC0B-CFA9-67B4-FE4B-4A9329375755}"/>
+              </a:ext>
+            </a:extLst>
+          </p:cNvPr>
+          <p:cNvPicPr>
+            <a:picLocks noChangeAspect="1"/>
+          </p:cNvPicPr>
+          <p:nvPr/>
+        </p:nvPicPr>
+        <p:blipFill>
+          <a:blip r:embed="rId2">
+            <a:extLst>
+              <a:ext uri="{28A0092B-C50C-407E-A947-70E740481C1C}">
+                <a14:useLocalDpi xmlns:a14="http://schemas.microsoft.com/office/drawing/2010/main" val="0"/>
+              </a:ext>
+            </a:extLst>
+          </a:blip>
+          <a:srcRect l="2361" t="2952" r="3194" b="3645"/>
+          <a:stretch>
+            <a:fillRect/>
+          </a:stretch>
+        </p:blipFill>
+        <p:spPr bwMode="auto">
+          <a:xfrm>
+            <a:off x="3917950" y="1708150"/>
+            <a:ext cx="4318000" cy="3416300"/>
+          </a:xfrm>
+          <a:prstGeom prst="rect">
+            <a:avLst/>
+          </a:prstGeom>
+          <a:noFill/>
+          <a:ln>
+            <a:noFill/>
+          </a:ln>
+        </p:spPr>
+      </p:pic>
+    </p:spTree>
+    <p:extLst>
+      <p:ext uri="{BB962C8B-B14F-4D97-AF65-F5344CB8AC3E}">
+        <p14:creationId xmlns:p14="http://schemas.microsoft.com/office/powerpoint/2010/main" val="2495751301"/>
+      </p:ext>
+    </p:extLst>
+  </p:cSld>
+  <p:clrMapOvr>
+    <a:masterClrMapping/>
+  </p:clrMapOvr>
+</p:sld>
+</file>
+
+<file path=ppt/slides/slide17.xml><?xml version="1.0" encoding="utf-8"?>
+<p:sld xmlns:a="http://schemas.openxmlformats.org/drawingml/2006/main" xmlns:r="http://schemas.openxmlformats.org/officeDocument/2006/relationships" xmlns:p="http://schemas.openxmlformats.org/presentationml/2006/main">
+  <p:cSld>
+    <p:spTree>
+      <p:nvGrpSpPr>
+        <p:cNvPr id="1" name=""/>
+        <p:cNvGrpSpPr/>
+        <p:nvPr/>
+      </p:nvGrpSpPr>
+      <p:grpSpPr>
+        <a:xfrm>
+          <a:off x="0" y="0"/>
+          <a:ext cx="0" cy="0"/>
+          <a:chOff x="0" y="0"/>
+          <a:chExt cx="0" cy="0"/>
+        </a:xfrm>
+      </p:grpSpPr>
+      <p:grpSp>
+        <p:nvGrpSpPr>
+          <p:cNvPr id="22" name="Gruppieren 21">
+            <a:extLst>
+              <a:ext uri="{FF2B5EF4-FFF2-40B4-BE49-F238E27FC236}">
+                <a16:creationId xmlns:a16="http://schemas.microsoft.com/office/drawing/2014/main" id="{0EFB4E82-720C-831A-FE24-F57C35DEB70B}"/>
+              </a:ext>
+            </a:extLst>
+          </p:cNvPr>
+          <p:cNvGrpSpPr/>
+          <p:nvPr/>
+        </p:nvGrpSpPr>
+        <p:grpSpPr>
+          <a:xfrm>
+            <a:off x="1179871" y="1054751"/>
+            <a:ext cx="8141110" cy="5851618"/>
+            <a:chOff x="1179871" y="1054751"/>
+            <a:chExt cx="8141110" cy="5851618"/>
+          </a:xfrm>
+        </p:grpSpPr>
+        <p:sp>
+          <p:nvSpPr>
+            <p:cNvPr id="21" name="Rechteck 20">
+              <a:extLst>
+                <a:ext uri="{FF2B5EF4-FFF2-40B4-BE49-F238E27FC236}">
+                  <a16:creationId xmlns:a16="http://schemas.microsoft.com/office/drawing/2014/main" id="{2F5E4747-6F84-1B82-0CC7-2902A73BF233}"/>
+                </a:ext>
+              </a:extLst>
+            </p:cNvPr>
+            <p:cNvSpPr/>
+            <p:nvPr/>
+          </p:nvSpPr>
+          <p:spPr>
+            <a:xfrm>
+              <a:off x="1179871" y="1054751"/>
+              <a:ext cx="8141110" cy="5803249"/>
+            </a:xfrm>
+            <a:prstGeom prst="rect">
+              <a:avLst/>
+            </a:prstGeom>
+            <a:solidFill>
+              <a:schemeClr val="bg1"/>
+            </a:solidFill>
+            <a:ln>
+              <a:noFill/>
+            </a:ln>
+          </p:spPr>
+          <p:style>
+            <a:lnRef idx="2">
+              <a:schemeClr val="accent1">
+                <a:shade val="15000"/>
+              </a:schemeClr>
+            </a:lnRef>
+            <a:fillRef idx="1">
+              <a:schemeClr val="accent1"/>
+            </a:fillRef>
+            <a:effectRef idx="0">
+              <a:schemeClr val="accent1"/>
+            </a:effectRef>
+            <a:fontRef idx="minor">
+              <a:schemeClr val="lt1"/>
+            </a:fontRef>
+          </p:style>
+          <p:txBody>
+            <a:bodyPr rtlCol="0" anchor="ctr"/>
+            <a:lstStyle/>
+            <a:p>
+              <a:pPr algn="ctr"/>
+              <a:endParaRPr lang="de-DE"/>
+            </a:p>
+          </p:txBody>
+        </p:sp>
+        <p:pic>
+          <p:nvPicPr>
+            <p:cNvPr id="5" name="Grafik 4" descr="Ein Bild, das Text, Schrift, Grafiken, Logo enthält.&#10;&#10;KI-generierte Inhalte können fehlerhaft sein.">
+              <a:extLst>
+                <a:ext uri="{FF2B5EF4-FFF2-40B4-BE49-F238E27FC236}">
+                  <a16:creationId xmlns:a16="http://schemas.microsoft.com/office/drawing/2014/main" id="{D5DCAC7B-D1AA-DF59-D742-4631F2F28886}"/>
+                </a:ext>
+              </a:extLst>
+            </p:cNvPr>
+            <p:cNvPicPr>
+              <a:picLocks noChangeAspect="1"/>
+            </p:cNvPicPr>
+            <p:nvPr/>
+          </p:nvPicPr>
+          <p:blipFill>
+            <a:blip r:embed="rId2">
+              <a:extLst>
+                <a:ext uri="{28A0092B-C50C-407E-A947-70E740481C1C}">
+                  <a14:useLocalDpi xmlns:a14="http://schemas.microsoft.com/office/drawing/2010/main" val="0"/>
+                </a:ext>
+              </a:extLst>
+            </a:blip>
+            <a:srcRect l="1863" t="9499" r="81746" b="14266"/>
+            <a:stretch>
+              <a:fillRect/>
+            </a:stretch>
+          </p:blipFill>
+          <p:spPr>
+            <a:xfrm>
+              <a:off x="4050890" y="1054751"/>
+              <a:ext cx="4343659" cy="4913430"/>
+            </a:xfrm>
+            <a:prstGeom prst="rect">
+              <a:avLst/>
+            </a:prstGeom>
+          </p:spPr>
+        </p:pic>
+        <p:sp>
+          <p:nvSpPr>
+            <p:cNvPr id="6" name="Textfeld 5">
+              <a:extLst>
+                <a:ext uri="{FF2B5EF4-FFF2-40B4-BE49-F238E27FC236}">
+                  <a16:creationId xmlns:a16="http://schemas.microsoft.com/office/drawing/2014/main" id="{E768FA1E-EF5F-C59A-81F0-A7EBD82DE470}"/>
+                </a:ext>
+              </a:extLst>
+            </p:cNvPr>
+            <p:cNvSpPr txBox="1"/>
+            <p:nvPr/>
+          </p:nvSpPr>
+          <p:spPr>
+            <a:xfrm>
+              <a:off x="1440716" y="2904531"/>
+              <a:ext cx="2439257" cy="2585323"/>
+            </a:xfrm>
+            <a:prstGeom prst="rect">
+              <a:avLst/>
+            </a:prstGeom>
+            <a:noFill/>
+          </p:spPr>
+          <p:txBody>
+            <a:bodyPr wrap="none" rtlCol="0">
+              <a:spAutoFit/>
+            </a:bodyPr>
+            <a:lstStyle/>
+            <a:p>
+              <a:pPr marL="342900" indent="-342900">
+                <a:buFont typeface="+mj-lt"/>
+                <a:buAutoNum type="arabicPeriod"/>
+              </a:pPr>
+              <a:r>
+                <a:rPr lang="de-DE" dirty="0" err="1"/>
+                <a:t>rgba</a:t>
+              </a:r>
+              <a:r>
+                <a:rPr lang="de-DE" dirty="0"/>
+                <a:t>(191, 208, 209)</a:t>
+              </a:r>
+            </a:p>
+            <a:p>
+              <a:pPr marL="342900" indent="-342900">
+                <a:buFont typeface="+mj-lt"/>
+                <a:buAutoNum type="arabicPeriod"/>
+              </a:pPr>
+              <a:r>
+                <a:rPr lang="de-DE" dirty="0" err="1"/>
+                <a:t>rgba</a:t>
+              </a:r>
+              <a:r>
+                <a:rPr lang="de-DE" dirty="0"/>
+                <a:t>(199, 221, 242)</a:t>
+              </a:r>
+            </a:p>
+            <a:p>
+              <a:pPr marL="342900" indent="-342900">
+                <a:buFont typeface="+mj-lt"/>
+                <a:buAutoNum type="arabicPeriod"/>
+              </a:pPr>
+              <a:r>
+                <a:rPr lang="de-DE" dirty="0" err="1"/>
+                <a:t>rgba</a:t>
+              </a:r>
+              <a:r>
+                <a:rPr lang="de-DE" dirty="0"/>
+                <a:t>(64, 127, 183)</a:t>
+              </a:r>
+            </a:p>
+            <a:p>
+              <a:pPr marL="342900" indent="-342900">
+                <a:buFont typeface="+mj-lt"/>
+                <a:buAutoNum type="arabicPeriod"/>
+              </a:pPr>
+              <a:r>
+                <a:rPr lang="de-DE" dirty="0" err="1"/>
+                <a:t>rgba</a:t>
+              </a:r>
+              <a:r>
+                <a:rPr lang="de-DE" dirty="0"/>
+                <a:t>(142, 186, 229)</a:t>
+              </a:r>
+            </a:p>
+            <a:p>
+              <a:pPr marL="342900" indent="-342900">
+                <a:buFont typeface="+mj-lt"/>
+                <a:buAutoNum type="arabicPeriod"/>
+              </a:pPr>
+              <a:r>
+                <a:rPr lang="de-DE" dirty="0" err="1"/>
+                <a:t>rgba</a:t>
+              </a:r>
+              <a:r>
+                <a:rPr lang="de-DE" dirty="0"/>
+                <a:t>(184, 214, 152)</a:t>
+              </a:r>
+            </a:p>
+            <a:p>
+              <a:pPr marL="342900" indent="-342900">
+                <a:buFont typeface="+mj-lt"/>
+                <a:buAutoNum type="arabicPeriod"/>
+              </a:pPr>
+              <a:r>
+                <a:rPr lang="de-DE" dirty="0" err="1"/>
+                <a:t>rgba</a:t>
+              </a:r>
+              <a:r>
+                <a:rPr lang="de-DE" dirty="0"/>
+                <a:t>(0, 84, 159)</a:t>
+              </a:r>
+            </a:p>
+            <a:p>
+              <a:pPr marL="342900" indent="-342900">
+                <a:buFont typeface="+mj-lt"/>
+                <a:buAutoNum type="arabicPeriod"/>
+              </a:pPr>
+              <a:r>
+                <a:rPr lang="de-DE" dirty="0" err="1"/>
+                <a:t>rgba</a:t>
+              </a:r>
+              <a:r>
+                <a:rPr lang="de-DE" dirty="0"/>
+                <a:t>(87, 171, 39)</a:t>
+              </a:r>
+            </a:p>
+            <a:p>
+              <a:pPr marL="342900" indent="-342900">
+                <a:buFont typeface="+mj-lt"/>
+                <a:buAutoNum type="arabicPeriod"/>
+              </a:pPr>
+              <a:r>
+                <a:rPr lang="de-DE" dirty="0" err="1"/>
+                <a:t>rgba</a:t>
+              </a:r>
+              <a:r>
+                <a:rPr lang="de-DE" dirty="0"/>
+                <a:t>(99, 101, 102)</a:t>
+              </a:r>
+            </a:p>
+            <a:p>
+              <a:pPr marL="342900" indent="-342900">
+                <a:buFont typeface="+mj-lt"/>
+                <a:buAutoNum type="arabicPeriod"/>
+              </a:pPr>
+              <a:endParaRPr lang="de-DE" dirty="0"/>
+            </a:p>
+          </p:txBody>
+        </p:sp>
+        <p:sp>
+          <p:nvSpPr>
+            <p:cNvPr id="8" name="Textfeld 7">
+              <a:extLst>
+                <a:ext uri="{FF2B5EF4-FFF2-40B4-BE49-F238E27FC236}">
+                  <a16:creationId xmlns:a16="http://schemas.microsoft.com/office/drawing/2014/main" id="{6DBBF69A-229E-3243-CF35-611ACE6543B0}"/>
+                </a:ext>
+              </a:extLst>
+            </p:cNvPr>
+            <p:cNvSpPr txBox="1"/>
+            <p:nvPr/>
+          </p:nvSpPr>
+          <p:spPr>
+            <a:xfrm>
+              <a:off x="6910639" y="2007026"/>
+              <a:ext cx="308098" cy="369332"/>
+            </a:xfrm>
+            <a:prstGeom prst="rect">
+              <a:avLst/>
+            </a:prstGeom>
+            <a:noFill/>
+          </p:spPr>
+          <p:txBody>
+            <a:bodyPr wrap="none" rtlCol="0">
+              <a:spAutoFit/>
+            </a:bodyPr>
+            <a:lstStyle/>
+            <a:p>
+              <a:r>
+                <a:rPr lang="de-DE" b="1" dirty="0">
+                  <a:solidFill>
+                    <a:schemeClr val="bg1"/>
+                  </a:solidFill>
+                </a:rPr>
+                <a:t>1</a:t>
+              </a:r>
+            </a:p>
+          </p:txBody>
+        </p:sp>
+        <p:sp>
+          <p:nvSpPr>
+            <p:cNvPr id="9" name="Textfeld 8">
+              <a:extLst>
+                <a:ext uri="{FF2B5EF4-FFF2-40B4-BE49-F238E27FC236}">
+                  <a16:creationId xmlns:a16="http://schemas.microsoft.com/office/drawing/2014/main" id="{E1CB2716-F7D8-3DDF-5D70-B6C75AFD9614}"/>
+                </a:ext>
+              </a:extLst>
+            </p:cNvPr>
+            <p:cNvSpPr txBox="1"/>
+            <p:nvPr/>
+          </p:nvSpPr>
+          <p:spPr>
+            <a:xfrm>
+              <a:off x="6831981" y="2728452"/>
+              <a:ext cx="308098" cy="369332"/>
+            </a:xfrm>
+            <a:prstGeom prst="rect">
+              <a:avLst/>
+            </a:prstGeom>
+            <a:noFill/>
+          </p:spPr>
+          <p:txBody>
+            <a:bodyPr wrap="none" rtlCol="0">
+              <a:spAutoFit/>
+            </a:bodyPr>
+            <a:lstStyle/>
+            <a:p>
+              <a:r>
+                <a:rPr lang="de-DE" b="1" dirty="0">
+                  <a:solidFill>
+                    <a:schemeClr val="bg1"/>
+                  </a:solidFill>
+                </a:rPr>
+                <a:t>2</a:t>
+              </a:r>
+            </a:p>
+          </p:txBody>
+        </p:sp>
+        <p:sp>
+          <p:nvSpPr>
+            <p:cNvPr id="10" name="Textfeld 9">
+              <a:extLst>
+                <a:ext uri="{FF2B5EF4-FFF2-40B4-BE49-F238E27FC236}">
+                  <a16:creationId xmlns:a16="http://schemas.microsoft.com/office/drawing/2014/main" id="{2340166D-EA95-6152-D9FB-F5A73E065745}"/>
+                </a:ext>
+              </a:extLst>
+            </p:cNvPr>
+            <p:cNvSpPr txBox="1"/>
+            <p:nvPr/>
+          </p:nvSpPr>
+          <p:spPr>
+            <a:xfrm>
+              <a:off x="5607073" y="2913118"/>
+              <a:ext cx="308098" cy="369332"/>
+            </a:xfrm>
+            <a:prstGeom prst="rect">
+              <a:avLst/>
+            </a:prstGeom>
+            <a:noFill/>
+          </p:spPr>
+          <p:txBody>
+            <a:bodyPr wrap="none" rtlCol="0">
+              <a:spAutoFit/>
+            </a:bodyPr>
+            <a:lstStyle/>
+            <a:p>
+              <a:r>
+                <a:rPr lang="de-DE" b="1" dirty="0">
+                  <a:solidFill>
+                    <a:schemeClr val="bg1"/>
+                  </a:solidFill>
+                </a:rPr>
+                <a:t>3</a:t>
+              </a:r>
+            </a:p>
+          </p:txBody>
+        </p:sp>
+        <p:sp>
+          <p:nvSpPr>
+            <p:cNvPr id="11" name="Textfeld 10">
+              <a:extLst>
+                <a:ext uri="{FF2B5EF4-FFF2-40B4-BE49-F238E27FC236}">
+                  <a16:creationId xmlns:a16="http://schemas.microsoft.com/office/drawing/2014/main" id="{B485BCFD-7059-CEAF-2A19-047582A41E98}"/>
+                </a:ext>
+              </a:extLst>
+            </p:cNvPr>
+            <p:cNvSpPr txBox="1"/>
+            <p:nvPr/>
+          </p:nvSpPr>
+          <p:spPr>
+            <a:xfrm>
+              <a:off x="5453024" y="1822360"/>
+              <a:ext cx="308098" cy="369332"/>
+            </a:xfrm>
+            <a:prstGeom prst="rect">
+              <a:avLst/>
+            </a:prstGeom>
+            <a:noFill/>
+          </p:spPr>
+          <p:txBody>
+            <a:bodyPr wrap="none" rtlCol="0">
+              <a:spAutoFit/>
+            </a:bodyPr>
+            <a:lstStyle/>
+            <a:p>
+              <a:r>
+                <a:rPr lang="de-DE" b="1" dirty="0">
+                  <a:solidFill>
+                    <a:schemeClr val="bg1"/>
+                  </a:solidFill>
+                </a:rPr>
+                <a:t>4</a:t>
+              </a:r>
+            </a:p>
+          </p:txBody>
+        </p:sp>
+        <p:sp>
+          <p:nvSpPr>
+            <p:cNvPr id="12" name="Textfeld 11">
+              <a:extLst>
+                <a:ext uri="{FF2B5EF4-FFF2-40B4-BE49-F238E27FC236}">
+                  <a16:creationId xmlns:a16="http://schemas.microsoft.com/office/drawing/2014/main" id="{142D90D3-2224-0643-4A34-7705B98D2ABB}"/>
+                </a:ext>
+              </a:extLst>
+            </p:cNvPr>
+            <p:cNvSpPr txBox="1"/>
+            <p:nvPr/>
+          </p:nvSpPr>
+          <p:spPr>
+            <a:xfrm>
+              <a:off x="6040930" y="1767660"/>
+              <a:ext cx="308098" cy="369332"/>
+            </a:xfrm>
+            <a:prstGeom prst="rect">
+              <a:avLst/>
+            </a:prstGeom>
+            <a:noFill/>
+          </p:spPr>
+          <p:txBody>
+            <a:bodyPr wrap="none" rtlCol="0">
+              <a:spAutoFit/>
+            </a:bodyPr>
+            <a:lstStyle/>
+            <a:p>
+              <a:r>
+                <a:rPr lang="de-DE" b="1" dirty="0">
+                  <a:solidFill>
+                    <a:schemeClr val="bg1"/>
+                  </a:solidFill>
+                </a:rPr>
+                <a:t>3</a:t>
+              </a:r>
+            </a:p>
+          </p:txBody>
+        </p:sp>
+        <p:sp>
+          <p:nvSpPr>
+            <p:cNvPr id="13" name="Textfeld 12">
+              <a:extLst>
+                <a:ext uri="{FF2B5EF4-FFF2-40B4-BE49-F238E27FC236}">
+                  <a16:creationId xmlns:a16="http://schemas.microsoft.com/office/drawing/2014/main" id="{7B6D3DA3-6779-1192-FAAE-B62B29AED317}"/>
+                </a:ext>
+              </a:extLst>
+            </p:cNvPr>
+            <p:cNvSpPr txBox="1"/>
+            <p:nvPr/>
+          </p:nvSpPr>
+          <p:spPr>
+            <a:xfrm>
+              <a:off x="6407562" y="2007026"/>
+              <a:ext cx="308098" cy="369332"/>
+            </a:xfrm>
+            <a:prstGeom prst="rect">
+              <a:avLst/>
+            </a:prstGeom>
+            <a:noFill/>
+          </p:spPr>
+          <p:txBody>
+            <a:bodyPr wrap="none" rtlCol="0">
+              <a:spAutoFit/>
+            </a:bodyPr>
+            <a:lstStyle/>
+            <a:p>
+              <a:r>
+                <a:rPr lang="de-DE" b="1" dirty="0">
+                  <a:solidFill>
+                    <a:schemeClr val="bg1"/>
+                  </a:solidFill>
+                </a:rPr>
+                <a:t>5</a:t>
+              </a:r>
+            </a:p>
+          </p:txBody>
+        </p:sp>
+        <p:sp>
+          <p:nvSpPr>
+            <p:cNvPr id="14" name="Textfeld 13">
+              <a:extLst>
+                <a:ext uri="{FF2B5EF4-FFF2-40B4-BE49-F238E27FC236}">
+                  <a16:creationId xmlns:a16="http://schemas.microsoft.com/office/drawing/2014/main" id="{C65B4EB3-0B67-3BE5-7DB7-12C27FB6ECC3}"/>
+                </a:ext>
+              </a:extLst>
+            </p:cNvPr>
+            <p:cNvSpPr txBox="1"/>
+            <p:nvPr/>
+          </p:nvSpPr>
+          <p:spPr>
+            <a:xfrm>
+              <a:off x="6343119" y="2785921"/>
+              <a:ext cx="308098" cy="369332"/>
+            </a:xfrm>
+            <a:prstGeom prst="rect">
+              <a:avLst/>
+            </a:prstGeom>
+            <a:noFill/>
+          </p:spPr>
+          <p:txBody>
+            <a:bodyPr wrap="none" rtlCol="0">
+              <a:spAutoFit/>
+            </a:bodyPr>
+            <a:lstStyle/>
+            <a:p>
+              <a:r>
+                <a:rPr lang="de-DE" b="1" dirty="0">
+                  <a:solidFill>
+                    <a:schemeClr val="bg1"/>
+                  </a:solidFill>
+                </a:rPr>
+                <a:t>6</a:t>
+              </a:r>
+            </a:p>
+          </p:txBody>
+        </p:sp>
+        <p:sp>
+          <p:nvSpPr>
+            <p:cNvPr id="15" name="Textfeld 14">
+              <a:extLst>
+                <a:ext uri="{FF2B5EF4-FFF2-40B4-BE49-F238E27FC236}">
+                  <a16:creationId xmlns:a16="http://schemas.microsoft.com/office/drawing/2014/main" id="{0D3521ED-F188-FE19-F1EB-061E48A8A8B8}"/>
+                </a:ext>
+              </a:extLst>
+            </p:cNvPr>
+            <p:cNvSpPr txBox="1"/>
+            <p:nvPr/>
+          </p:nvSpPr>
+          <p:spPr>
+            <a:xfrm>
+              <a:off x="5904485" y="2285098"/>
+              <a:ext cx="308098" cy="369332"/>
+            </a:xfrm>
+            <a:prstGeom prst="rect">
+              <a:avLst/>
+            </a:prstGeom>
+            <a:noFill/>
+          </p:spPr>
+          <p:txBody>
+            <a:bodyPr wrap="none" rtlCol="0">
+              <a:spAutoFit/>
+            </a:bodyPr>
+            <a:lstStyle/>
+            <a:p>
+              <a:r>
+                <a:rPr lang="de-DE" b="1" dirty="0">
+                  <a:solidFill>
+                    <a:schemeClr val="bg1"/>
+                  </a:solidFill>
+                </a:rPr>
+                <a:t>7</a:t>
+              </a:r>
+            </a:p>
+          </p:txBody>
+        </p:sp>
+        <p:sp>
+          <p:nvSpPr>
+            <p:cNvPr id="16" name="Textfeld 15">
+              <a:extLst>
+                <a:ext uri="{FF2B5EF4-FFF2-40B4-BE49-F238E27FC236}">
+                  <a16:creationId xmlns:a16="http://schemas.microsoft.com/office/drawing/2014/main" id="{508B48E8-BD2C-76AD-97E6-E17A1F9B5783}"/>
+                </a:ext>
+              </a:extLst>
+            </p:cNvPr>
+            <p:cNvSpPr txBox="1"/>
+            <p:nvPr/>
+          </p:nvSpPr>
+          <p:spPr>
+            <a:xfrm>
+              <a:off x="5588418" y="3710604"/>
+              <a:ext cx="308098" cy="369332"/>
+            </a:xfrm>
+            <a:prstGeom prst="rect">
+              <a:avLst/>
+            </a:prstGeom>
+            <a:noFill/>
+          </p:spPr>
+          <p:txBody>
+            <a:bodyPr wrap="none" rtlCol="0">
+              <a:spAutoFit/>
+            </a:bodyPr>
+            <a:lstStyle/>
+            <a:p>
+              <a:r>
+                <a:rPr lang="de-DE" b="1" dirty="0">
+                  <a:solidFill>
+                    <a:schemeClr val="bg1"/>
+                  </a:solidFill>
+                </a:rPr>
+                <a:t>8</a:t>
+              </a:r>
+            </a:p>
+          </p:txBody>
+        </p:sp>
+        <p:pic>
+          <p:nvPicPr>
+            <p:cNvPr id="18" name="Grafik 17" descr="Ein Bild, das Text, Schrift, Grafiken, Logo enthält.&#10;&#10;KI-generierte Inhalte können fehlerhaft sein.">
+              <a:extLst>
+                <a:ext uri="{FF2B5EF4-FFF2-40B4-BE49-F238E27FC236}">
+                  <a16:creationId xmlns:a16="http://schemas.microsoft.com/office/drawing/2014/main" id="{32018161-EBEF-126A-7C3C-602B96019E91}"/>
+                </a:ext>
+              </a:extLst>
+            </p:cNvPr>
+            <p:cNvPicPr>
+              <a:picLocks noChangeAspect="1"/>
+            </p:cNvPicPr>
+            <p:nvPr/>
+          </p:nvPicPr>
+          <p:blipFill>
+            <a:blip r:embed="rId2">
+              <a:extLst>
+                <a:ext uri="{28A0092B-C50C-407E-A947-70E740481C1C}">
+                  <a14:useLocalDpi xmlns:a14="http://schemas.microsoft.com/office/drawing/2010/main" val="0"/>
+                </a:ext>
+              </a:extLst>
+            </a:blip>
+            <a:srcRect l="49419" t="19608" b="16397"/>
+            <a:stretch>
+              <a:fillRect/>
+            </a:stretch>
+          </p:blipFill>
+          <p:spPr>
+            <a:xfrm>
+              <a:off x="4164732" y="5431250"/>
+              <a:ext cx="4793757" cy="1475119"/>
+            </a:xfrm>
+            <a:prstGeom prst="rect">
+              <a:avLst/>
+            </a:prstGeom>
+          </p:spPr>
+        </p:pic>
+        <p:sp>
+          <p:nvSpPr>
+            <p:cNvPr id="19" name="Textfeld 18">
+              <a:extLst>
+                <a:ext uri="{FF2B5EF4-FFF2-40B4-BE49-F238E27FC236}">
+                  <a16:creationId xmlns:a16="http://schemas.microsoft.com/office/drawing/2014/main" id="{C4EA02C8-3D43-03C2-9919-1981DA0B6CEC}"/>
+                </a:ext>
+              </a:extLst>
+            </p:cNvPr>
+            <p:cNvSpPr txBox="1"/>
+            <p:nvPr/>
+          </p:nvSpPr>
+          <p:spPr>
+            <a:xfrm>
+              <a:off x="4202623" y="5558618"/>
+              <a:ext cx="308098" cy="369332"/>
+            </a:xfrm>
+            <a:prstGeom prst="rect">
+              <a:avLst/>
+            </a:prstGeom>
+            <a:noFill/>
+          </p:spPr>
+          <p:txBody>
+            <a:bodyPr wrap="none" rtlCol="0">
+              <a:spAutoFit/>
+            </a:bodyPr>
+            <a:lstStyle/>
+            <a:p>
+              <a:r>
+                <a:rPr lang="de-DE" b="1" dirty="0">
+                  <a:solidFill>
+                    <a:schemeClr val="bg1"/>
+                  </a:solidFill>
+                </a:rPr>
+                <a:t>6</a:t>
+              </a:r>
+            </a:p>
+          </p:txBody>
+        </p:sp>
+        <p:sp>
+          <p:nvSpPr>
+            <p:cNvPr id="20" name="Textfeld 19">
+              <a:extLst>
+                <a:ext uri="{FF2B5EF4-FFF2-40B4-BE49-F238E27FC236}">
+                  <a16:creationId xmlns:a16="http://schemas.microsoft.com/office/drawing/2014/main" id="{4A10C569-A83C-78E9-463C-2DDB745973B0}"/>
+                </a:ext>
+              </a:extLst>
+            </p:cNvPr>
+            <p:cNvSpPr txBox="1"/>
+            <p:nvPr/>
+          </p:nvSpPr>
+          <p:spPr>
+            <a:xfrm>
+              <a:off x="6318679" y="5743284"/>
+              <a:ext cx="308098" cy="369332"/>
+            </a:xfrm>
+            <a:prstGeom prst="rect">
+              <a:avLst/>
+            </a:prstGeom>
+            <a:noFill/>
+          </p:spPr>
+          <p:txBody>
+            <a:bodyPr wrap="none" rtlCol="0">
+              <a:spAutoFit/>
+            </a:bodyPr>
+            <a:lstStyle/>
+            <a:p>
+              <a:r>
+                <a:rPr lang="de-DE" b="1" dirty="0">
+                  <a:solidFill>
+                    <a:schemeClr val="bg1"/>
+                  </a:solidFill>
+                </a:rPr>
+                <a:t>4</a:t>
+              </a:r>
+            </a:p>
+          </p:txBody>
+        </p:sp>
+      </p:grpSp>
+    </p:spTree>
+    <p:extLst>
+      <p:ext uri="{BB962C8B-B14F-4D97-AF65-F5344CB8AC3E}">
+        <p14:creationId xmlns:p14="http://schemas.microsoft.com/office/powerpoint/2010/main" val="2192745407"/>
       </p:ext>
     </p:extLst>
   </p:cSld>
@@ -3410,34 +7661,6 @@
       </p:grpSpPr>
       <p:sp>
         <p:nvSpPr>
-          <p:cNvPr id="2" name="Titel 1">
-            <a:extLst>
-              <a:ext uri="{FF2B5EF4-FFF2-40B4-BE49-F238E27FC236}">
-                <a16:creationId xmlns:a16="http://schemas.microsoft.com/office/drawing/2014/main" id="{D1795242-F10C-9B4B-0449-6985D916BEB7}"/>
-              </a:ext>
-            </a:extLst>
-          </p:cNvPr>
-          <p:cNvSpPr>
-            <a:spLocks noGrp="1"/>
-          </p:cNvSpPr>
-          <p:nvPr>
-            <p:ph type="title"/>
-          </p:nvPr>
-        </p:nvSpPr>
-        <p:spPr/>
-        <p:txBody>
-          <a:bodyPr/>
-          <a:lstStyle/>
-          <a:p>
-            <a:r>
-              <a:rPr lang="de-DE" dirty="0"/>
-              <a:t>Erste Schritte</a:t>
-            </a:r>
-          </a:p>
-        </p:txBody>
-      </p:sp>
-      <p:sp>
-        <p:nvSpPr>
           <p:cNvPr id="3" name="Inhaltsplatzhalter 2">
             <a:extLst>
               <a:ext uri="{FF2B5EF4-FFF2-40B4-BE49-F238E27FC236}">
@@ -3457,25 +7680,249 @@
           <a:bodyPr/>
           <a:lstStyle/>
           <a:p>
-            <a:r>
-              <a:rPr lang="de-DE" dirty="0"/>
-              <a:t>Typst in VS code installieren</a:t>
-            </a:r>
-          </a:p>
-          <a:p>
-            <a:r>
-              <a:rPr lang="de-DE" dirty="0" err="1"/>
-              <a:t>Git</a:t>
-            </a:r>
-            <a:r>
-              <a:rPr lang="de-DE" dirty="0"/>
-              <a:t> lokal </a:t>
-            </a:r>
-            <a:r>
-              <a:rPr lang="de-DE" dirty="0" err="1"/>
-              <a:t>clonen</a:t>
+            <a:pPr marL="0" indent="0">
+              <a:buNone/>
+            </a:pPr>
+            <a:r>
+              <a:rPr lang="de-DE" dirty="0"/>
+              <a:t>It </a:t>
+            </a:r>
+            <a:r>
+              <a:rPr lang="de-DE" dirty="0" err="1"/>
+              <a:t>is</a:t>
+            </a:r>
+            <a:r>
+              <a:rPr lang="de-DE" dirty="0"/>
+              <a:t> </a:t>
+            </a:r>
+            <a:r>
+              <a:rPr lang="de-DE" dirty="0" err="1"/>
+              <a:t>recommended</a:t>
+            </a:r>
+            <a:r>
+              <a:rPr lang="de-DE" dirty="0"/>
+              <a:t> to </a:t>
+            </a:r>
+            <a:r>
+              <a:rPr lang="de-DE" dirty="0" err="1"/>
+              <a:t>use</a:t>
+            </a:r>
+            <a:r>
+              <a:rPr lang="de-DE" dirty="0"/>
+              <a:t> </a:t>
+            </a:r>
+            <a:r>
+              <a:rPr lang="de-DE" dirty="0">
+                <a:hlinkClick r:id="rId2"/>
+              </a:rPr>
+              <a:t>Visual Studio Code  </a:t>
             </a:r>
             <a:endParaRPr lang="de-DE" dirty="0"/>
+          </a:p>
+          <a:p>
+            <a:r>
+              <a:rPr lang="de-DE" dirty="0" err="1"/>
+              <a:t>Install</a:t>
+            </a:r>
+            <a:r>
+              <a:rPr lang="de-DE" dirty="0"/>
+              <a:t> </a:t>
+            </a:r>
+            <a:r>
+              <a:rPr lang="de-DE" dirty="0">
+                <a:hlinkClick r:id="rId3"/>
+              </a:rPr>
+              <a:t>typst</a:t>
+            </a:r>
+            <a:r>
+              <a:rPr lang="de-DE" dirty="0"/>
+              <a:t> (not </a:t>
+            </a:r>
+            <a:r>
+              <a:rPr lang="de-DE" dirty="0" err="1"/>
+              <a:t>mandatory</a:t>
+            </a:r>
+            <a:r>
+              <a:rPr lang="de-DE" dirty="0"/>
+              <a:t>, but </a:t>
+            </a:r>
+            <a:r>
+              <a:rPr lang="de-DE" dirty="0" err="1"/>
+              <a:t>enables</a:t>
+            </a:r>
+            <a:r>
+              <a:rPr lang="de-DE" dirty="0"/>
+              <a:t> terminal </a:t>
+            </a:r>
+            <a:r>
+              <a:rPr lang="de-DE" dirty="0" err="1"/>
+              <a:t>commands</a:t>
+            </a:r>
+            <a:r>
+              <a:rPr lang="de-DE" dirty="0"/>
+              <a:t>)</a:t>
+            </a:r>
+          </a:p>
+          <a:p>
+            <a:r>
+              <a:rPr lang="de-DE" dirty="0" err="1"/>
+              <a:t>Install</a:t>
+            </a:r>
+            <a:r>
+              <a:rPr lang="de-DE" dirty="0"/>
+              <a:t> typst </a:t>
+            </a:r>
+            <a:r>
+              <a:rPr lang="de-DE" dirty="0" err="1"/>
+              <a:t>packages</a:t>
+            </a:r>
+            <a:r>
+              <a:rPr lang="de-DE" dirty="0"/>
+              <a:t> in VS code (</a:t>
+            </a:r>
+            <a:r>
+              <a:rPr lang="de-DE" dirty="0" err="1"/>
+              <a:t>Tinymist</a:t>
+            </a:r>
+            <a:r>
+              <a:rPr lang="de-DE" dirty="0"/>
+              <a:t> Typst)</a:t>
+            </a:r>
+          </a:p>
+          <a:p>
+            <a:r>
+              <a:rPr lang="de-DE" dirty="0"/>
+              <a:t>Clone </a:t>
+            </a:r>
+            <a:r>
+              <a:rPr lang="de-DE" dirty="0" err="1"/>
+              <a:t>the</a:t>
+            </a:r>
+            <a:r>
+              <a:rPr lang="de-DE" dirty="0"/>
+              <a:t> </a:t>
+            </a:r>
+            <a:r>
+              <a:rPr lang="de-DE" dirty="0" err="1"/>
+              <a:t>git</a:t>
+            </a:r>
+            <a:r>
+              <a:rPr lang="de-DE" dirty="0"/>
+              <a:t> </a:t>
+            </a:r>
+            <a:r>
+              <a:rPr lang="de-DE" dirty="0" err="1"/>
+              <a:t>folder</a:t>
+            </a:r>
+            <a:endParaRPr lang="de-DE" dirty="0"/>
+          </a:p>
+        </p:txBody>
+      </p:sp>
+      <p:pic>
+        <p:nvPicPr>
+          <p:cNvPr id="7" name="Grafik 6" descr="Logo des Profilbereichs Modeling &amp; Simulation Sciences">
+            <a:extLst>
+              <a:ext uri="{FF2B5EF4-FFF2-40B4-BE49-F238E27FC236}">
+                <a16:creationId xmlns:a16="http://schemas.microsoft.com/office/drawing/2014/main" id="{54A8B178-2810-D1F8-7B25-34A8C9437A3A}"/>
+              </a:ext>
+            </a:extLst>
+          </p:cNvPr>
+          <p:cNvPicPr>
+            <a:picLocks noChangeAspect="1"/>
+          </p:cNvPicPr>
+          <p:nvPr/>
+        </p:nvPicPr>
+        <p:blipFill>
+          <a:blip>
+            <a:extLst>
+              <a:ext uri="{96DAC541-7B7A-43D3-8B79-37D633B846F1}">
+                <asvg:svgBlip xmlns:asvg="http://schemas.microsoft.com/office/drawing/2016/SVG/main" r:embed="rId4"/>
+              </a:ext>
+            </a:extLst>
+          </a:blip>
+          <a:stretch>
+            <a:fillRect/>
+          </a:stretch>
+        </p:blipFill>
+        <p:spPr>
+          <a:xfrm>
+            <a:off x="9769467" y="6243899"/>
+            <a:ext cx="2298073" cy="559491"/>
+          </a:xfrm>
+          <a:prstGeom prst="rect">
+            <a:avLst/>
+          </a:prstGeom>
+        </p:spPr>
+      </p:pic>
+      <p:sp>
+        <p:nvSpPr>
+          <p:cNvPr id="10" name="Titel 1">
+            <a:extLst>
+              <a:ext uri="{FF2B5EF4-FFF2-40B4-BE49-F238E27FC236}">
+                <a16:creationId xmlns:a16="http://schemas.microsoft.com/office/drawing/2014/main" id="{A9875773-24AD-207A-1C4B-2EFBB53D5C3C}"/>
+              </a:ext>
+            </a:extLst>
+          </p:cNvPr>
+          <p:cNvSpPr>
+            <a:spLocks noGrp="1"/>
+          </p:cNvSpPr>
+          <p:nvPr>
+            <p:ph type="title"/>
+          </p:nvPr>
+        </p:nvSpPr>
+        <p:spPr>
+          <a:xfrm>
+            <a:off x="4443629" y="74075"/>
+            <a:ext cx="2437045" cy="554575"/>
+          </a:xfrm>
+        </p:spPr>
+        <p:txBody>
+          <a:bodyPr>
+            <a:normAutofit/>
+          </a:bodyPr>
+          <a:lstStyle/>
+          <a:p>
+            <a:r>
+              <a:rPr lang="de-DE" sz="3200" b="1" dirty="0" err="1">
+                <a:solidFill>
+                  <a:schemeClr val="tx2">
+                    <a:lumMod val="90000"/>
+                    <a:lumOff val="10000"/>
+                  </a:schemeClr>
+                </a:solidFill>
+              </a:rPr>
+              <a:t>Get</a:t>
+            </a:r>
+            <a:r>
+              <a:rPr lang="de-DE" sz="3200" b="1" dirty="0">
+                <a:solidFill>
+                  <a:schemeClr val="tx2">
+                    <a:lumMod val="90000"/>
+                    <a:lumOff val="10000"/>
+                  </a:schemeClr>
+                </a:solidFill>
+              </a:rPr>
+              <a:t> </a:t>
+            </a:r>
+            <a:r>
+              <a:rPr lang="de-DE" sz="3200" b="1" dirty="0" err="1">
+                <a:solidFill>
+                  <a:schemeClr val="tx2">
+                    <a:lumMod val="90000"/>
+                    <a:lumOff val="10000"/>
+                  </a:schemeClr>
+                </a:solidFill>
+              </a:rPr>
+              <a:t>Started</a:t>
+            </a:r>
+            <a:endParaRPr lang="de-DE" sz="3200" b="1" dirty="0">
+              <a:solidFill>
+                <a:schemeClr val="tx2">
+                  <a:lumMod val="90000"/>
+                  <a:lumOff val="10000"/>
+                </a:schemeClr>
+              </a:solidFill>
+            </a:endParaRPr>
           </a:p>
         </p:txBody>
       </p:sp>
@@ -3531,8 +7978,20 @@
           <a:lstStyle/>
           <a:p>
             <a:r>
-              <a:rPr lang="de-DE" dirty="0"/>
-              <a:t>In „</a:t>
+              <a:rPr lang="de-DE" dirty="0" err="1"/>
+              <a:t>Navigate</a:t>
+            </a:r>
+            <a:r>
+              <a:rPr lang="de-DE" dirty="0"/>
+              <a:t> </a:t>
+            </a:r>
+            <a:r>
+              <a:rPr lang="de-DE" dirty="0" err="1"/>
+              <a:t>to</a:t>
+            </a:r>
+            <a:r>
+              <a:rPr lang="de-DE" dirty="0"/>
+              <a:t> „</a:t>
             </a:r>
             <a:r>
               <a:rPr lang="de-DE" dirty="0" err="1"/>
@@ -3548,8 +8007,13 @@
             </a:r>
             <a:r>
               <a:rPr lang="de-DE" dirty="0"/>
-              <a:t>-typst“ navigieren</a:t>
-            </a:r>
+              <a:t>-typst“ </a:t>
+            </a:r>
+            <a:r>
+              <a:rPr lang="de-DE" dirty="0" err="1"/>
+              <a:t>folder</a:t>
+            </a:r>
+            <a:endParaRPr lang="de-DE" dirty="0"/>
           </a:p>
         </p:txBody>
       </p:sp>
@@ -3625,6 +8089,42 @@
           </a:fontRef>
         </p:style>
       </p:cxnSp>
+      <p:pic>
+        <p:nvPicPr>
+          <p:cNvPr id="8" name="Grafik 7" descr="Logo des Profilbereichs Modeling &amp; Simulation Sciences">
+            <a:extLst>
+              <a:ext uri="{FF2B5EF4-FFF2-40B4-BE49-F238E27FC236}">
+                <a16:creationId xmlns:a16="http://schemas.microsoft.com/office/drawing/2014/main" id="{D2734050-099F-FF87-3B86-2A1043882C91}"/>
+              </a:ext>
+            </a:extLst>
+          </p:cNvPr>
+          <p:cNvPicPr>
+            <a:picLocks noChangeAspect="1"/>
+          </p:cNvPicPr>
+          <p:nvPr/>
+        </p:nvPicPr>
+        <p:blipFill>
+          <a:blip>
+            <a:extLst>
+              <a:ext uri="{96DAC541-7B7A-43D3-8B79-37D633B846F1}">
+                <asvg:svgBlip xmlns:asvg="http://schemas.microsoft.com/office/drawing/2016/SVG/main" r:embed="rId3"/>
+              </a:ext>
+            </a:extLst>
+          </a:blip>
+          <a:stretch>
+            <a:fillRect/>
+          </a:stretch>
+        </p:blipFill>
+        <p:spPr>
+          <a:xfrm>
+            <a:off x="9769467" y="6243899"/>
+            <a:ext cx="2298073" cy="559491"/>
+          </a:xfrm>
+          <a:prstGeom prst="rect">
+            <a:avLst/>
+          </a:prstGeom>
+        </p:spPr>
+      </p:pic>
     </p:spTree>
     <p:extLst>
       <p:ext uri="{BB962C8B-B14F-4D97-AF65-F5344CB8AC3E}">
@@ -3655,44 +8155,6 @@
           <a:chExt cx="0" cy="0"/>
         </a:xfrm>
       </p:grpSpPr>
-      <p:sp>
-        <p:nvSpPr>
-          <p:cNvPr id="6" name="Titel 1">
-            <a:extLst>
-              <a:ext uri="{FF2B5EF4-FFF2-40B4-BE49-F238E27FC236}">
-                <a16:creationId xmlns:a16="http://schemas.microsoft.com/office/drawing/2014/main" id="{28C9C218-B47B-F7B1-CAF8-45E20D793E77}"/>
-              </a:ext>
-            </a:extLst>
-          </p:cNvPr>
-          <p:cNvSpPr>
-            <a:spLocks noGrp="1"/>
-          </p:cNvSpPr>
-          <p:nvPr>
-            <p:ph type="title"/>
-          </p:nvPr>
-        </p:nvSpPr>
-        <p:spPr>
-          <a:xfrm>
-            <a:off x="7691673" y="-137239"/>
-            <a:ext cx="4718041" cy="1325563"/>
-          </a:xfrm>
-        </p:spPr>
-        <p:txBody>
-          <a:bodyPr/>
-          <a:lstStyle/>
-          <a:p>
-            <a:r>
-              <a:rPr lang="de-DE" dirty="0"/>
-              <a:t>Übersicht der </a:t>
-            </a:r>
-            <a:r>
-              <a:rPr lang="de-DE" dirty="0" err="1"/>
-              <a:t>files</a:t>
-            </a:r>
-            <a:endParaRPr lang="de-DE" dirty="0"/>
-          </a:p>
-        </p:txBody>
-      </p:sp>
       <p:sp>
         <p:nvSpPr>
           <p:cNvPr id="7" name="Geschweifte Klammer rechts 6">
@@ -3757,7 +8219,7 @@
         <p:spPr>
           <a:xfrm>
             <a:off x="3078178" y="651849"/>
-            <a:ext cx="5728556" cy="369332"/>
+            <a:ext cx="3276282" cy="369332"/>
           </a:xfrm>
           <a:prstGeom prst="rect">
             <a:avLst/>
@@ -3772,8 +8234,29 @@
           <a:p>
             <a:r>
               <a:rPr lang="de-DE" dirty="0"/>
-              <a:t>Ordner in denen die Bilder für das jeweilige Poster liegen</a:t>
-            </a:r>
+              <a:t>Content </a:t>
+            </a:r>
+            <a:r>
+              <a:rPr lang="de-DE" dirty="0" err="1"/>
+              <a:t>folders</a:t>
+            </a:r>
+            <a:r>
+              <a:rPr lang="de-DE" dirty="0"/>
+              <a:t> for </a:t>
+            </a:r>
+            <a:r>
+              <a:rPr lang="de-DE" dirty="0" err="1"/>
+              <a:t>each</a:t>
+            </a:r>
+            <a:r>
+              <a:rPr lang="de-DE" dirty="0"/>
+              <a:t> </a:t>
+            </a:r>
+            <a:r>
+              <a:rPr lang="de-DE" dirty="0" err="1"/>
+              <a:t>poster</a:t>
+            </a:r>
+            <a:endParaRPr lang="de-DE" dirty="0"/>
           </a:p>
         </p:txBody>
       </p:sp>
@@ -3836,7 +8319,7 @@
         <p:spPr>
           <a:xfrm>
             <a:off x="3268301" y="1363476"/>
-            <a:ext cx="7976799" cy="369332"/>
+            <a:ext cx="5644750" cy="369332"/>
           </a:xfrm>
           <a:prstGeom prst="rect">
             <a:avLst/>
@@ -3851,7 +8334,47 @@
           <a:p>
             <a:r>
               <a:rPr lang="de-DE" dirty="0"/>
-              <a:t>Ordner mit Bildern die von mehreren Postern gebraucht werden (MBD logo, etc.)</a:t>
+              <a:t>Folder </a:t>
+            </a:r>
+            <a:r>
+              <a:rPr lang="de-DE" dirty="0" err="1"/>
+              <a:t>with</a:t>
+            </a:r>
+            <a:r>
+              <a:rPr lang="de-DE" dirty="0"/>
+              <a:t> </a:t>
+            </a:r>
+            <a:r>
+              <a:rPr lang="de-DE" dirty="0" err="1"/>
+              <a:t>content</a:t>
+            </a:r>
+            <a:r>
+              <a:rPr lang="de-DE" dirty="0"/>
+              <a:t> </a:t>
+            </a:r>
+            <a:r>
+              <a:rPr lang="de-DE" dirty="0" err="1"/>
+              <a:t>several</a:t>
+            </a:r>
+            <a:r>
+              <a:rPr lang="de-DE" dirty="0"/>
+              <a:t> </a:t>
+            </a:r>
+            <a:r>
+              <a:rPr lang="de-DE" dirty="0" err="1"/>
+              <a:t>posters</a:t>
+            </a:r>
+            <a:r>
+              <a:rPr lang="de-DE" dirty="0"/>
+              <a:t> </a:t>
+            </a:r>
+            <a:r>
+              <a:rPr lang="de-DE" dirty="0" err="1"/>
+              <a:t>use</a:t>
+            </a:r>
+            <a:r>
+              <a:rPr lang="de-DE" dirty="0"/>
+              <a:t> (MSS logo, etc.)</a:t>
             </a:r>
           </a:p>
         </p:txBody>
@@ -4280,6 +8803,178 @@
           </a:p>
         </p:txBody>
       </p:sp>
+      <p:pic>
+        <p:nvPicPr>
+          <p:cNvPr id="5" name="Grafik 4" descr="Logo des Profilbereichs Modeling &amp; Simulation Sciences">
+            <a:extLst>
+              <a:ext uri="{FF2B5EF4-FFF2-40B4-BE49-F238E27FC236}">
+                <a16:creationId xmlns:a16="http://schemas.microsoft.com/office/drawing/2014/main" id="{D6D4280B-1022-05F4-FB32-284AA90549C4}"/>
+              </a:ext>
+            </a:extLst>
+          </p:cNvPr>
+          <p:cNvPicPr>
+            <a:picLocks noChangeAspect="1"/>
+          </p:cNvPicPr>
+          <p:nvPr/>
+        </p:nvPicPr>
+        <p:blipFill>
+          <a:blip>
+            <a:extLst>
+              <a:ext uri="{96DAC541-7B7A-43D3-8B79-37D633B846F1}">
+                <asvg:svgBlip xmlns:asvg="http://schemas.microsoft.com/office/drawing/2016/SVG/main" r:embed="rId3"/>
+              </a:ext>
+            </a:extLst>
+          </a:blip>
+          <a:stretch>
+            <a:fillRect/>
+          </a:stretch>
+        </p:blipFill>
+        <p:spPr>
+          <a:xfrm>
+            <a:off x="9769467" y="6243899"/>
+            <a:ext cx="2298073" cy="559491"/>
+          </a:xfrm>
+          <a:prstGeom prst="rect">
+            <a:avLst/>
+          </a:prstGeom>
+        </p:spPr>
+      </p:pic>
+      <p:sp>
+        <p:nvSpPr>
+          <p:cNvPr id="10" name="Titel 1">
+            <a:extLst>
+              <a:ext uri="{FF2B5EF4-FFF2-40B4-BE49-F238E27FC236}">
+                <a16:creationId xmlns:a16="http://schemas.microsoft.com/office/drawing/2014/main" id="{770BC7CC-A8FE-2576-275B-3EEE1B50098B}"/>
+              </a:ext>
+            </a:extLst>
+          </p:cNvPr>
+          <p:cNvSpPr txBox="1">
+            <a:spLocks/>
+          </p:cNvSpPr>
+          <p:nvPr/>
+        </p:nvSpPr>
+        <p:spPr>
+          <a:xfrm>
+            <a:off x="4443629" y="74075"/>
+            <a:ext cx="2437045" cy="554575"/>
+          </a:xfrm>
+          <a:prstGeom prst="rect">
+            <a:avLst/>
+          </a:prstGeom>
+        </p:spPr>
+        <p:txBody>
+          <a:bodyPr vert="horz" lIns="91440" tIns="45720" rIns="91440" bIns="45720" rtlCol="0" anchor="ctr">
+            <a:normAutofit fontScale="90000"/>
+          </a:bodyPr>
+          <a:lstStyle>
+            <a:lvl1pPr algn="l" defTabSz="914400" rtl="0" eaLnBrk="1" latinLnBrk="0" hangingPunct="1">
+              <a:lnSpc>
+                <a:spcPct val="90000"/>
+              </a:lnSpc>
+              <a:spcBef>
+                <a:spcPct val="0"/>
+              </a:spcBef>
+              <a:buNone/>
+              <a:defRPr sz="4400" kern="1200">
+                <a:solidFill>
+                  <a:schemeClr val="tx1"/>
+                </a:solidFill>
+                <a:latin typeface="+mj-lt"/>
+                <a:ea typeface="+mj-ea"/>
+                <a:cs typeface="+mj-cs"/>
+              </a:defRPr>
+            </a:lvl1pPr>
+          </a:lstStyle>
+          <a:p>
+            <a:r>
+              <a:rPr lang="de-DE" sz="3200" b="1">
+                <a:solidFill>
+                  <a:schemeClr val="tx2">
+                    <a:lumMod val="90000"/>
+                    <a:lumOff val="10000"/>
+                  </a:schemeClr>
+                </a:solidFill>
+              </a:rPr>
+              <a:t>File Overview</a:t>
+            </a:r>
+            <a:endParaRPr lang="de-DE" sz="3200" b="1" dirty="0">
+              <a:solidFill>
+                <a:schemeClr val="tx2">
+                  <a:lumMod val="90000"/>
+                  <a:lumOff val="10000"/>
+                </a:schemeClr>
+              </a:solidFill>
+            </a:endParaRPr>
+          </a:p>
+        </p:txBody>
+      </p:sp>
+      <p:sp>
+        <p:nvSpPr>
+          <p:cNvPr id="2" name="Textfeld 1">
+            <a:extLst>
+              <a:ext uri="{FF2B5EF4-FFF2-40B4-BE49-F238E27FC236}">
+                <a16:creationId xmlns:a16="http://schemas.microsoft.com/office/drawing/2014/main" id="{0235E926-2175-F712-CA12-70A92A48A472}"/>
+              </a:ext>
+            </a:extLst>
+          </p:cNvPr>
+          <p:cNvSpPr txBox="1"/>
+          <p:nvPr/>
+        </p:nvSpPr>
+        <p:spPr>
+          <a:xfrm>
+            <a:off x="7794304" y="2722076"/>
+            <a:ext cx="4273236" cy="1384995"/>
+          </a:xfrm>
+          <a:prstGeom prst="rect">
+            <a:avLst/>
+          </a:prstGeom>
+          <a:noFill/>
+        </p:spPr>
+        <p:txBody>
+          <a:bodyPr wrap="square" rtlCol="0">
+            <a:spAutoFit/>
+          </a:bodyPr>
+          <a:lstStyle/>
+          <a:p>
+            <a:pPr algn="ctr"/>
+            <a:r>
+              <a:rPr lang="de-DE" sz="2800" b="1" dirty="0">
+                <a:solidFill>
+                  <a:srgbClr val="FF0000"/>
+                </a:solidFill>
+              </a:rPr>
+              <a:t>IN PROGRESS</a:t>
+            </a:r>
+          </a:p>
+          <a:p>
+            <a:pPr algn="ctr"/>
+            <a:r>
+              <a:rPr lang="de-DE" sz="2800" b="1" dirty="0">
+                <a:solidFill>
+                  <a:srgbClr val="FF0000"/>
+                </a:solidFill>
+              </a:rPr>
+              <a:t>-&gt; New </a:t>
+            </a:r>
+            <a:r>
+              <a:rPr lang="de-DE" sz="2800" b="1" dirty="0" err="1">
+                <a:solidFill>
+                  <a:srgbClr val="FF0000"/>
+                </a:solidFill>
+              </a:rPr>
+              <a:t>screenshot</a:t>
+            </a:r>
+            <a:r>
+              <a:rPr lang="de-DE" sz="2800" b="1" dirty="0">
+                <a:solidFill>
+                  <a:srgbClr val="FF0000"/>
+                </a:solidFill>
+              </a:rPr>
+              <a:t> einfügen</a:t>
+            </a:r>
+          </a:p>
+        </p:txBody>
+      </p:sp>
     </p:spTree>
     <p:extLst>
       <p:ext uri="{BB962C8B-B14F-4D97-AF65-F5344CB8AC3E}">
@@ -4310,53 +9005,12 @@
           <a:chExt cx="0" cy="0"/>
         </a:xfrm>
       </p:grpSpPr>
-      <p:sp>
-        <p:nvSpPr>
-          <p:cNvPr id="2" name="Titel 1">
-            <a:extLst>
-              <a:ext uri="{FF2B5EF4-FFF2-40B4-BE49-F238E27FC236}">
-                <a16:creationId xmlns:a16="http://schemas.microsoft.com/office/drawing/2014/main" id="{4DDCD6B6-DABA-FB83-E98B-7F1538D4061C}"/>
-              </a:ext>
-            </a:extLst>
-          </p:cNvPr>
-          <p:cNvSpPr>
-            <a:spLocks noGrp="1"/>
-          </p:cNvSpPr>
-          <p:nvPr>
-            <p:ph type="title"/>
-          </p:nvPr>
-        </p:nvSpPr>
-        <p:spPr/>
-        <p:txBody>
-          <a:bodyPr/>
-          <a:lstStyle/>
-          <a:p>
-            <a:r>
-              <a:rPr lang="de-DE" dirty="0"/>
-              <a:t>How </a:t>
-            </a:r>
-            <a:r>
-              <a:rPr lang="de-DE" dirty="0" err="1"/>
-              <a:t>to</a:t>
-            </a:r>
-            <a:r>
-              <a:rPr lang="de-DE" dirty="0"/>
-              <a:t> </a:t>
-            </a:r>
-            <a:r>
-              <a:rPr lang="de-DE" dirty="0" err="1"/>
-              <a:t>render</a:t>
-            </a:r>
-            <a:endParaRPr lang="de-DE" dirty="0"/>
-          </a:p>
-        </p:txBody>
-      </p:sp>
       <p:pic>
         <p:nvPicPr>
-          <p:cNvPr id="5" name="Grafik 4" descr="Ein Bild, das Text, Screenshot, Software, Webseite enthält.&#10;&#10;KI-generierte Inhalte können fehlerhaft sein.">
-            <a:extLst>
-              <a:ext uri="{FF2B5EF4-FFF2-40B4-BE49-F238E27FC236}">
-                <a16:creationId xmlns:a16="http://schemas.microsoft.com/office/drawing/2014/main" id="{35DD67B3-7472-37C9-932C-CF326C4799EA}"/>
+          <p:cNvPr id="5" name="Grafik 4">
+            <a:extLst>
+              <a:ext uri="{FF2B5EF4-FFF2-40B4-BE49-F238E27FC236}">
+                <a16:creationId xmlns:a16="http://schemas.microsoft.com/office/drawing/2014/main" id="{CA8A903D-FB82-34B4-90AC-59FB0CD284EA}"/>
               </a:ext>
             </a:extLst>
           </p:cNvPr>
@@ -4373,20 +9027,317 @@
         </p:blipFill>
         <p:spPr>
           <a:xfrm>
-            <a:off x="384972" y="1690688"/>
-            <a:ext cx="11422055" cy="4650086"/>
+            <a:off x="3894428" y="876300"/>
+            <a:ext cx="3915695" cy="5511544"/>
           </a:xfrm>
           <a:prstGeom prst="rect">
             <a:avLst/>
           </a:prstGeom>
         </p:spPr>
       </p:pic>
+      <p:sp>
+        <p:nvSpPr>
+          <p:cNvPr id="6" name="Titel 1">
+            <a:extLst>
+              <a:ext uri="{FF2B5EF4-FFF2-40B4-BE49-F238E27FC236}">
+                <a16:creationId xmlns:a16="http://schemas.microsoft.com/office/drawing/2014/main" id="{D2A4DE08-20B2-CA3B-B51C-3FC96AB694C0}"/>
+              </a:ext>
+            </a:extLst>
+          </p:cNvPr>
+          <p:cNvSpPr>
+            <a:spLocks noGrp="1"/>
+          </p:cNvSpPr>
+          <p:nvPr>
+            <p:ph type="title"/>
+          </p:nvPr>
+        </p:nvSpPr>
+        <p:spPr>
+          <a:xfrm>
+            <a:off x="3705792" y="126978"/>
+            <a:ext cx="4292965" cy="554575"/>
+          </a:xfrm>
+        </p:spPr>
+        <p:txBody>
+          <a:bodyPr>
+            <a:normAutofit fontScale="90000"/>
+          </a:bodyPr>
+          <a:lstStyle/>
+          <a:p>
+            <a:r>
+              <a:rPr lang="de-DE" sz="3200" b="1" dirty="0">
+                <a:solidFill>
+                  <a:schemeClr val="tx2">
+                    <a:lumMod val="90000"/>
+                    <a:lumOff val="10000"/>
+                  </a:schemeClr>
+                </a:solidFill>
+              </a:rPr>
+              <a:t>Sample Poster - </a:t>
+            </a:r>
+            <a:r>
+              <a:rPr lang="de-DE" sz="3200" b="1" dirty="0" err="1">
+                <a:solidFill>
+                  <a:schemeClr val="tx2">
+                    <a:lumMod val="90000"/>
+                    <a:lumOff val="10000"/>
+                  </a:schemeClr>
+                </a:solidFill>
+              </a:rPr>
+              <a:t>Overview</a:t>
+            </a:r>
+            <a:endParaRPr lang="de-DE" sz="3200" b="1" dirty="0">
+              <a:solidFill>
+                <a:schemeClr val="tx2">
+                  <a:lumMod val="90000"/>
+                  <a:lumOff val="10000"/>
+                </a:schemeClr>
+              </a:solidFill>
+            </a:endParaRPr>
+          </a:p>
+        </p:txBody>
+      </p:sp>
+      <p:pic>
+        <p:nvPicPr>
+          <p:cNvPr id="8" name="Grafik 7" descr="Logo des Profilbereichs Modeling &amp; Simulation Sciences">
+            <a:extLst>
+              <a:ext uri="{FF2B5EF4-FFF2-40B4-BE49-F238E27FC236}">
+                <a16:creationId xmlns:a16="http://schemas.microsoft.com/office/drawing/2014/main" id="{4602EFF3-50BC-3A82-6927-5B9E6204034F}"/>
+              </a:ext>
+            </a:extLst>
+          </p:cNvPr>
+          <p:cNvPicPr>
+            <a:picLocks noChangeAspect="1"/>
+          </p:cNvPicPr>
+          <p:nvPr/>
+        </p:nvPicPr>
+        <p:blipFill>
+          <a:blip>
+            <a:extLst>
+              <a:ext uri="{96DAC541-7B7A-43D3-8B79-37D633B846F1}">
+                <asvg:svgBlip xmlns:asvg="http://schemas.microsoft.com/office/drawing/2016/SVG/main" r:embed="rId3"/>
+              </a:ext>
+            </a:extLst>
+          </a:blip>
+          <a:stretch>
+            <a:fillRect/>
+          </a:stretch>
+        </p:blipFill>
+        <p:spPr>
+          <a:xfrm>
+            <a:off x="9769467" y="6243899"/>
+            <a:ext cx="2298073" cy="559491"/>
+          </a:xfrm>
+          <a:prstGeom prst="rect">
+            <a:avLst/>
+          </a:prstGeom>
+        </p:spPr>
+      </p:pic>
+      <p:grpSp>
+        <p:nvGrpSpPr>
+          <p:cNvPr id="13" name="Gruppieren 12">
+            <a:extLst>
+              <a:ext uri="{FF2B5EF4-FFF2-40B4-BE49-F238E27FC236}">
+                <a16:creationId xmlns:a16="http://schemas.microsoft.com/office/drawing/2014/main" id="{1A03192A-82CC-05B0-D67C-FCC3C1F5C3BF}"/>
+              </a:ext>
+            </a:extLst>
+          </p:cNvPr>
+          <p:cNvGrpSpPr/>
+          <p:nvPr/>
+        </p:nvGrpSpPr>
+        <p:grpSpPr>
+          <a:xfrm>
+            <a:off x="7670423" y="1237734"/>
+            <a:ext cx="2244133" cy="369332"/>
+            <a:chOff x="7480300" y="1440934"/>
+            <a:chExt cx="2244133" cy="369332"/>
+          </a:xfrm>
+        </p:grpSpPr>
+        <p:cxnSp>
+          <p:nvCxnSpPr>
+            <p:cNvPr id="10" name="Gerade Verbindung mit Pfeil 9">
+              <a:extLst>
+                <a:ext uri="{FF2B5EF4-FFF2-40B4-BE49-F238E27FC236}">
+                  <a16:creationId xmlns:a16="http://schemas.microsoft.com/office/drawing/2014/main" id="{0C0AF76F-940D-B55D-A808-0E5B68D35830}"/>
+                </a:ext>
+              </a:extLst>
+            </p:cNvPr>
+            <p:cNvCxnSpPr>
+              <a:cxnSpLocks/>
+            </p:cNvCxnSpPr>
+            <p:nvPr/>
+          </p:nvCxnSpPr>
+          <p:spPr>
+            <a:xfrm flipH="1" flipV="1">
+              <a:off x="7480300" y="1555750"/>
+              <a:ext cx="749300" cy="69850"/>
+            </a:xfrm>
+            <a:prstGeom prst="straightConnector1">
+              <a:avLst/>
+            </a:prstGeom>
+            <a:ln w="38100">
+              <a:solidFill>
+                <a:srgbClr val="FF0000"/>
+              </a:solidFill>
+              <a:tailEnd type="triangle"/>
+            </a:ln>
+          </p:spPr>
+          <p:style>
+            <a:lnRef idx="2">
+              <a:schemeClr val="accent1"/>
+            </a:lnRef>
+            <a:fillRef idx="0">
+              <a:schemeClr val="accent1"/>
+            </a:fillRef>
+            <a:effectRef idx="1">
+              <a:schemeClr val="accent1"/>
+            </a:effectRef>
+            <a:fontRef idx="minor">
+              <a:schemeClr val="tx1"/>
+            </a:fontRef>
+          </p:style>
+        </p:cxnSp>
+        <p:sp>
+          <p:nvSpPr>
+            <p:cNvPr id="12" name="Textfeld 11">
+              <a:extLst>
+                <a:ext uri="{FF2B5EF4-FFF2-40B4-BE49-F238E27FC236}">
+                  <a16:creationId xmlns:a16="http://schemas.microsoft.com/office/drawing/2014/main" id="{A04AE34E-B810-6033-C462-E33785FA88C6}"/>
+                </a:ext>
+              </a:extLst>
+            </p:cNvPr>
+            <p:cNvSpPr txBox="1"/>
+            <p:nvPr/>
+          </p:nvSpPr>
+          <p:spPr>
+            <a:xfrm>
+              <a:off x="8229600" y="1440934"/>
+              <a:ext cx="1494833" cy="369332"/>
+            </a:xfrm>
+            <a:prstGeom prst="rect">
+              <a:avLst/>
+            </a:prstGeom>
+            <a:noFill/>
+          </p:spPr>
+          <p:txBody>
+            <a:bodyPr wrap="none" rtlCol="0">
+              <a:spAutoFit/>
+            </a:bodyPr>
+            <a:lstStyle/>
+            <a:p>
+              <a:r>
+                <a:rPr lang="de-DE" dirty="0"/>
+                <a:t>Logo of Chair</a:t>
+              </a:r>
+            </a:p>
+          </p:txBody>
+        </p:sp>
+      </p:grpSp>
+      <p:grpSp>
+        <p:nvGrpSpPr>
+          <p:cNvPr id="14" name="Gruppieren 13">
+            <a:extLst>
+              <a:ext uri="{FF2B5EF4-FFF2-40B4-BE49-F238E27FC236}">
+                <a16:creationId xmlns:a16="http://schemas.microsoft.com/office/drawing/2014/main" id="{68E70CAF-BF95-AFBB-F3D9-2F0F51AE7578}"/>
+              </a:ext>
+            </a:extLst>
+          </p:cNvPr>
+          <p:cNvGrpSpPr/>
+          <p:nvPr/>
+        </p:nvGrpSpPr>
+        <p:grpSpPr>
+          <a:xfrm>
+            <a:off x="840079" y="628650"/>
+            <a:ext cx="3115594" cy="369332"/>
+            <a:chOff x="7895306" y="1460500"/>
+            <a:chExt cx="3115594" cy="369332"/>
+          </a:xfrm>
+        </p:grpSpPr>
+        <p:cxnSp>
+          <p:nvCxnSpPr>
+            <p:cNvPr id="15" name="Gerade Verbindung mit Pfeil 14">
+              <a:extLst>
+                <a:ext uri="{FF2B5EF4-FFF2-40B4-BE49-F238E27FC236}">
+                  <a16:creationId xmlns:a16="http://schemas.microsoft.com/office/drawing/2014/main" id="{BECAC74D-0155-CC0A-9309-9E4A9F17B35F}"/>
+                </a:ext>
+              </a:extLst>
+            </p:cNvPr>
+            <p:cNvCxnSpPr>
+              <a:cxnSpLocks/>
+            </p:cNvCxnSpPr>
+            <p:nvPr/>
+          </p:nvCxnSpPr>
+          <p:spPr>
+            <a:xfrm>
+              <a:off x="9861550" y="1708150"/>
+              <a:ext cx="1149350" cy="102116"/>
+            </a:xfrm>
+            <a:prstGeom prst="straightConnector1">
+              <a:avLst/>
+            </a:prstGeom>
+            <a:ln w="38100">
+              <a:solidFill>
+                <a:srgbClr val="FF0000"/>
+              </a:solidFill>
+              <a:tailEnd type="triangle"/>
+            </a:ln>
+          </p:spPr>
+          <p:style>
+            <a:lnRef idx="2">
+              <a:schemeClr val="accent1"/>
+            </a:lnRef>
+            <a:fillRef idx="0">
+              <a:schemeClr val="accent1"/>
+            </a:fillRef>
+            <a:effectRef idx="1">
+              <a:schemeClr val="accent1"/>
+            </a:effectRef>
+            <a:fontRef idx="minor">
+              <a:schemeClr val="tx1"/>
+            </a:fontRef>
+          </p:style>
+        </p:cxnSp>
+        <p:sp>
+          <p:nvSpPr>
+            <p:cNvPr id="16" name="Textfeld 15">
+              <a:extLst>
+                <a:ext uri="{FF2B5EF4-FFF2-40B4-BE49-F238E27FC236}">
+                  <a16:creationId xmlns:a16="http://schemas.microsoft.com/office/drawing/2014/main" id="{19A38EE8-7ACC-075D-762F-1A5F6A5AF74C}"/>
+                </a:ext>
+              </a:extLst>
+            </p:cNvPr>
+            <p:cNvSpPr txBox="1"/>
+            <p:nvPr/>
+          </p:nvSpPr>
+          <p:spPr>
+            <a:xfrm>
+              <a:off x="7895306" y="1460500"/>
+              <a:ext cx="1966244" cy="369332"/>
+            </a:xfrm>
+            <a:prstGeom prst="rect">
+              <a:avLst/>
+            </a:prstGeom>
+            <a:noFill/>
+          </p:spPr>
+          <p:txBody>
+            <a:bodyPr wrap="none" rtlCol="0">
+              <a:spAutoFit/>
+            </a:bodyPr>
+            <a:lstStyle/>
+            <a:p>
+              <a:r>
+                <a:rPr lang="de-DE" dirty="0"/>
+                <a:t>Name of Software</a:t>
+              </a:r>
+            </a:p>
+          </p:txBody>
+        </p:sp>
+      </p:grpSp>
       <p:cxnSp>
         <p:nvCxnSpPr>
-          <p:cNvPr id="7" name="Gerade Verbindung mit Pfeil 6">
-            <a:extLst>
-              <a:ext uri="{FF2B5EF4-FFF2-40B4-BE49-F238E27FC236}">
-                <a16:creationId xmlns:a16="http://schemas.microsoft.com/office/drawing/2014/main" id="{8BF6DB16-D878-E593-3A92-67C03E62BE83}"/>
+          <p:cNvPr id="19" name="Gerade Verbindung mit Pfeil 18">
+            <a:extLst>
+              <a:ext uri="{FF2B5EF4-FFF2-40B4-BE49-F238E27FC236}">
+                <a16:creationId xmlns:a16="http://schemas.microsoft.com/office/drawing/2014/main" id="{47876D07-4AA1-D160-A4E5-BC656E224AA6}"/>
               </a:ext>
             </a:extLst>
           </p:cNvPr>
@@ -4396,14 +9347,14 @@
           <p:nvPr/>
         </p:nvCxnSpPr>
         <p:spPr>
-          <a:xfrm flipH="1">
-            <a:off x="5368705" y="1312752"/>
-            <a:ext cx="543208" cy="477524"/>
+          <a:xfrm>
+            <a:off x="2710153" y="1387475"/>
+            <a:ext cx="1149350" cy="102116"/>
           </a:xfrm>
           <a:prstGeom prst="straightConnector1">
             <a:avLst/>
           </a:prstGeom>
-          <a:ln w="57150">
+          <a:ln w="38100">
             <a:solidFill>
               <a:srgbClr val="FF0000"/>
             </a:solidFill>
@@ -4427,10 +9378,10 @@
       </p:cxnSp>
       <p:sp>
         <p:nvSpPr>
-          <p:cNvPr id="10" name="Textfeld 9">
-            <a:extLst>
-              <a:ext uri="{FF2B5EF4-FFF2-40B4-BE49-F238E27FC236}">
-                <a16:creationId xmlns:a16="http://schemas.microsoft.com/office/drawing/2014/main" id="{4411C896-3989-0166-88DB-54D38CD6C476}"/>
+          <p:cNvPr id="21" name="Textfeld 20">
+            <a:extLst>
+              <a:ext uri="{FF2B5EF4-FFF2-40B4-BE49-F238E27FC236}">
+                <a16:creationId xmlns:a16="http://schemas.microsoft.com/office/drawing/2014/main" id="{EE50BE0F-2BF4-B9CD-FBEB-EB257D6DFE8C}"/>
               </a:ext>
             </a:extLst>
           </p:cNvPr>
@@ -4439,8 +9390,8 @@
         </p:nvSpPr>
         <p:spPr>
           <a:xfrm>
-            <a:off x="6039038" y="855389"/>
-            <a:ext cx="5187636" cy="646331"/>
+            <a:off x="761840" y="1167884"/>
+            <a:ext cx="1847634" cy="646331"/>
           </a:xfrm>
           <a:prstGeom prst="rect">
             <a:avLst/>
@@ -4454,29 +9405,3577 @@
           <a:lstStyle/>
           <a:p>
             <a:r>
-              <a:rPr lang="de-DE" dirty="0"/>
-              <a:t>Dieser </a:t>
-            </a:r>
-            <a:r>
-              <a:rPr lang="de-DE" dirty="0" err="1"/>
-              <a:t>button</a:t>
-            </a:r>
-            <a:r>
-              <a:rPr lang="de-DE" dirty="0"/>
-              <a:t> erstellt ein PDF und öffnet ein Preview-Fenster in </a:t>
-            </a:r>
-            <a:r>
-              <a:rPr lang="de-DE" dirty="0" err="1"/>
-              <a:t>VSCode</a:t>
+              <a:rPr lang="de-DE" dirty="0" err="1"/>
+              <a:t>Authors</a:t>
+            </a:r>
+            <a:r>
+              <a:rPr lang="de-DE" dirty="0"/>
+              <a:t>, </a:t>
+            </a:r>
+            <a:r>
+              <a:rPr lang="de-DE" dirty="0" err="1"/>
+              <a:t>name</a:t>
+            </a:r>
+            <a:r>
+              <a:rPr lang="de-DE" dirty="0"/>
+              <a:t> of </a:t>
+            </a:r>
+            <a:r>
+              <a:rPr lang="de-DE" dirty="0" err="1"/>
+              <a:t>chair</a:t>
+            </a:r>
+            <a:r>
+              <a:rPr lang="de-DE" dirty="0"/>
+              <a:t>, </a:t>
+            </a:r>
+            <a:r>
+              <a:rPr lang="de-DE" dirty="0" err="1"/>
+              <a:t>etc</a:t>
+            </a:r>
+            <a:r>
+              <a:rPr lang="de-DE" dirty="0"/>
+              <a:t> …</a:t>
+            </a:r>
+          </a:p>
+        </p:txBody>
+      </p:sp>
+      <p:grpSp>
+        <p:nvGrpSpPr>
+          <p:cNvPr id="22" name="Gruppieren 21">
+            <a:extLst>
+              <a:ext uri="{FF2B5EF4-FFF2-40B4-BE49-F238E27FC236}">
+                <a16:creationId xmlns:a16="http://schemas.microsoft.com/office/drawing/2014/main" id="{CD096A2B-F924-9ED9-C705-7F494384881B}"/>
+              </a:ext>
+            </a:extLst>
+          </p:cNvPr>
+          <p:cNvGrpSpPr/>
+          <p:nvPr/>
+        </p:nvGrpSpPr>
+        <p:grpSpPr>
+          <a:xfrm>
+            <a:off x="7460873" y="2057916"/>
+            <a:ext cx="4302773" cy="369332"/>
+            <a:chOff x="7480300" y="1440934"/>
+            <a:chExt cx="4302773" cy="369332"/>
+          </a:xfrm>
+        </p:grpSpPr>
+        <p:cxnSp>
+          <p:nvCxnSpPr>
+            <p:cNvPr id="23" name="Gerade Verbindung mit Pfeil 22">
+              <a:extLst>
+                <a:ext uri="{FF2B5EF4-FFF2-40B4-BE49-F238E27FC236}">
+                  <a16:creationId xmlns:a16="http://schemas.microsoft.com/office/drawing/2014/main" id="{60F1611E-5188-A224-4CB4-F32DE34DB76F}"/>
+                </a:ext>
+              </a:extLst>
+            </p:cNvPr>
+            <p:cNvCxnSpPr>
+              <a:cxnSpLocks/>
+            </p:cNvCxnSpPr>
+            <p:nvPr/>
+          </p:nvCxnSpPr>
+          <p:spPr>
+            <a:xfrm flipH="1" flipV="1">
+              <a:off x="7480300" y="1555750"/>
+              <a:ext cx="749300" cy="69850"/>
+            </a:xfrm>
+            <a:prstGeom prst="straightConnector1">
+              <a:avLst/>
+            </a:prstGeom>
+            <a:ln w="38100">
+              <a:solidFill>
+                <a:srgbClr val="FF0000"/>
+              </a:solidFill>
+              <a:tailEnd type="triangle"/>
+            </a:ln>
+          </p:spPr>
+          <p:style>
+            <a:lnRef idx="2">
+              <a:schemeClr val="accent1"/>
+            </a:lnRef>
+            <a:fillRef idx="0">
+              <a:schemeClr val="accent1"/>
+            </a:fillRef>
+            <a:effectRef idx="1">
+              <a:schemeClr val="accent1"/>
+            </a:effectRef>
+            <a:fontRef idx="minor">
+              <a:schemeClr val="tx1"/>
+            </a:fontRef>
+          </p:style>
+        </p:cxnSp>
+        <p:sp>
+          <p:nvSpPr>
+            <p:cNvPr id="24" name="Textfeld 23">
+              <a:extLst>
+                <a:ext uri="{FF2B5EF4-FFF2-40B4-BE49-F238E27FC236}">
+                  <a16:creationId xmlns:a16="http://schemas.microsoft.com/office/drawing/2014/main" id="{CB0C5CF5-CF75-5664-9288-6A9780AB8916}"/>
+                </a:ext>
+              </a:extLst>
+            </p:cNvPr>
+            <p:cNvSpPr txBox="1"/>
+            <p:nvPr/>
+          </p:nvSpPr>
+          <p:spPr>
+            <a:xfrm>
+              <a:off x="8229600" y="1440934"/>
+              <a:ext cx="3553473" cy="369332"/>
+            </a:xfrm>
+            <a:prstGeom prst="rect">
+              <a:avLst/>
+            </a:prstGeom>
+            <a:noFill/>
+          </p:spPr>
+          <p:txBody>
+            <a:bodyPr wrap="none" rtlCol="0">
+              <a:spAutoFit/>
+            </a:bodyPr>
+            <a:lstStyle/>
+            <a:p>
+              <a:r>
+                <a:rPr lang="de-DE" dirty="0" err="1"/>
+                <a:t>Catchphrase</a:t>
+              </a:r>
+              <a:r>
+                <a:rPr lang="de-DE" dirty="0"/>
+                <a:t> to </a:t>
+              </a:r>
+              <a:r>
+                <a:rPr lang="de-DE" dirty="0" err="1"/>
+                <a:t>get</a:t>
+              </a:r>
+              <a:r>
+                <a:rPr lang="de-DE" dirty="0"/>
+                <a:t> </a:t>
+              </a:r>
+              <a:r>
+                <a:rPr lang="de-DE" dirty="0" err="1"/>
+                <a:t>reader</a:t>
+              </a:r>
+              <a:r>
+                <a:rPr lang="de-DE" dirty="0"/>
+                <a:t> </a:t>
+              </a:r>
+              <a:r>
+                <a:rPr lang="de-DE" dirty="0" err="1"/>
+                <a:t>hooked</a:t>
+              </a:r>
+              <a:endParaRPr lang="de-DE" dirty="0"/>
+            </a:p>
+          </p:txBody>
+        </p:sp>
+      </p:grpSp>
+      <p:grpSp>
+        <p:nvGrpSpPr>
+          <p:cNvPr id="25" name="Gruppieren 24">
+            <a:extLst>
+              <a:ext uri="{FF2B5EF4-FFF2-40B4-BE49-F238E27FC236}">
+                <a16:creationId xmlns:a16="http://schemas.microsoft.com/office/drawing/2014/main" id="{A5B90B8A-B646-6CE1-E63E-2E3D17745A3C}"/>
+              </a:ext>
+            </a:extLst>
+          </p:cNvPr>
+          <p:cNvGrpSpPr/>
+          <p:nvPr/>
+        </p:nvGrpSpPr>
+        <p:grpSpPr>
+          <a:xfrm>
+            <a:off x="7460873" y="2675127"/>
+            <a:ext cx="2290684" cy="369332"/>
+            <a:chOff x="7480300" y="1440934"/>
+            <a:chExt cx="2290684" cy="369332"/>
+          </a:xfrm>
+        </p:grpSpPr>
+        <p:cxnSp>
+          <p:nvCxnSpPr>
+            <p:cNvPr id="26" name="Gerade Verbindung mit Pfeil 25">
+              <a:extLst>
+                <a:ext uri="{FF2B5EF4-FFF2-40B4-BE49-F238E27FC236}">
+                  <a16:creationId xmlns:a16="http://schemas.microsoft.com/office/drawing/2014/main" id="{4ED93D60-2C76-01D8-A904-15D475AFB41E}"/>
+                </a:ext>
+              </a:extLst>
+            </p:cNvPr>
+            <p:cNvCxnSpPr>
+              <a:cxnSpLocks/>
+            </p:cNvCxnSpPr>
+            <p:nvPr/>
+          </p:nvCxnSpPr>
+          <p:spPr>
+            <a:xfrm flipH="1" flipV="1">
+              <a:off x="7480300" y="1555750"/>
+              <a:ext cx="749300" cy="69850"/>
+            </a:xfrm>
+            <a:prstGeom prst="straightConnector1">
+              <a:avLst/>
+            </a:prstGeom>
+            <a:ln w="38100">
+              <a:solidFill>
+                <a:srgbClr val="FF0000"/>
+              </a:solidFill>
+              <a:tailEnd type="triangle"/>
+            </a:ln>
+          </p:spPr>
+          <p:style>
+            <a:lnRef idx="2">
+              <a:schemeClr val="accent1"/>
+            </a:lnRef>
+            <a:fillRef idx="0">
+              <a:schemeClr val="accent1"/>
+            </a:fillRef>
+            <a:effectRef idx="1">
+              <a:schemeClr val="accent1"/>
+            </a:effectRef>
+            <a:fontRef idx="minor">
+              <a:schemeClr val="tx1"/>
+            </a:fontRef>
+          </p:style>
+        </p:cxnSp>
+        <p:sp>
+          <p:nvSpPr>
+            <p:cNvPr id="27" name="Textfeld 26">
+              <a:extLst>
+                <a:ext uri="{FF2B5EF4-FFF2-40B4-BE49-F238E27FC236}">
+                  <a16:creationId xmlns:a16="http://schemas.microsoft.com/office/drawing/2014/main" id="{B8616F5A-5888-47A9-2938-CCEBDC31C0CE}"/>
+                </a:ext>
+              </a:extLst>
+            </p:cNvPr>
+            <p:cNvSpPr txBox="1"/>
+            <p:nvPr/>
+          </p:nvSpPr>
+          <p:spPr>
+            <a:xfrm>
+              <a:off x="8229600" y="1440934"/>
+              <a:ext cx="1541384" cy="369332"/>
+            </a:xfrm>
+            <a:prstGeom prst="rect">
+              <a:avLst/>
+            </a:prstGeom>
+            <a:noFill/>
+          </p:spPr>
+          <p:txBody>
+            <a:bodyPr wrap="none" rtlCol="0">
+              <a:spAutoFit/>
+            </a:bodyPr>
+            <a:lstStyle/>
+            <a:p>
+              <a:r>
+                <a:rPr lang="de-DE" dirty="0"/>
+                <a:t>Software logo</a:t>
+              </a:r>
+            </a:p>
+          </p:txBody>
+        </p:sp>
+      </p:grpSp>
+      <p:grpSp>
+        <p:nvGrpSpPr>
+          <p:cNvPr id="28" name="Gruppieren 27">
+            <a:extLst>
+              <a:ext uri="{FF2B5EF4-FFF2-40B4-BE49-F238E27FC236}">
+                <a16:creationId xmlns:a16="http://schemas.microsoft.com/office/drawing/2014/main" id="{F16EBE8F-E812-A9D4-D83E-AF17F2C72EC1}"/>
+              </a:ext>
+            </a:extLst>
+          </p:cNvPr>
+          <p:cNvGrpSpPr/>
+          <p:nvPr/>
+        </p:nvGrpSpPr>
+        <p:grpSpPr>
+          <a:xfrm>
+            <a:off x="6241673" y="3354348"/>
+            <a:ext cx="4854458" cy="369332"/>
+            <a:chOff x="6337300" y="1440934"/>
+            <a:chExt cx="4854458" cy="369332"/>
+          </a:xfrm>
+        </p:grpSpPr>
+        <p:cxnSp>
+          <p:nvCxnSpPr>
+            <p:cNvPr id="29" name="Gerade Verbindung mit Pfeil 28">
+              <a:extLst>
+                <a:ext uri="{FF2B5EF4-FFF2-40B4-BE49-F238E27FC236}">
+                  <a16:creationId xmlns:a16="http://schemas.microsoft.com/office/drawing/2014/main" id="{2D7580B8-90B8-D477-0902-8D371D1CB12B}"/>
+                </a:ext>
+              </a:extLst>
+            </p:cNvPr>
+            <p:cNvCxnSpPr>
+              <a:cxnSpLocks/>
+            </p:cNvCxnSpPr>
+            <p:nvPr/>
+          </p:nvCxnSpPr>
+          <p:spPr>
+            <a:xfrm flipH="1" flipV="1">
+              <a:off x="6337300" y="1440934"/>
+              <a:ext cx="1892300" cy="184666"/>
+            </a:xfrm>
+            <a:prstGeom prst="straightConnector1">
+              <a:avLst/>
+            </a:prstGeom>
+            <a:ln w="38100">
+              <a:solidFill>
+                <a:srgbClr val="FF0000"/>
+              </a:solidFill>
+              <a:tailEnd type="triangle"/>
+            </a:ln>
+          </p:spPr>
+          <p:style>
+            <a:lnRef idx="2">
+              <a:schemeClr val="accent1"/>
+            </a:lnRef>
+            <a:fillRef idx="0">
+              <a:schemeClr val="accent1"/>
+            </a:fillRef>
+            <a:effectRef idx="1">
+              <a:schemeClr val="accent1"/>
+            </a:effectRef>
+            <a:fontRef idx="minor">
+              <a:schemeClr val="tx1"/>
+            </a:fontRef>
+          </p:style>
+        </p:cxnSp>
+        <p:sp>
+          <p:nvSpPr>
+            <p:cNvPr id="30" name="Textfeld 29">
+              <a:extLst>
+                <a:ext uri="{FF2B5EF4-FFF2-40B4-BE49-F238E27FC236}">
+                  <a16:creationId xmlns:a16="http://schemas.microsoft.com/office/drawing/2014/main" id="{3E7C82B2-E432-FA17-A9F9-47909D09548B}"/>
+                </a:ext>
+              </a:extLst>
+            </p:cNvPr>
+            <p:cNvSpPr txBox="1"/>
+            <p:nvPr/>
+          </p:nvSpPr>
+          <p:spPr>
+            <a:xfrm>
+              <a:off x="8229600" y="1440934"/>
+              <a:ext cx="2962158" cy="369332"/>
+            </a:xfrm>
+            <a:prstGeom prst="rect">
+              <a:avLst/>
+            </a:prstGeom>
+            <a:noFill/>
+          </p:spPr>
+          <p:txBody>
+            <a:bodyPr wrap="none" rtlCol="0">
+              <a:spAutoFit/>
+            </a:bodyPr>
+            <a:lstStyle/>
+            <a:p>
+              <a:r>
+                <a:rPr lang="de-DE" dirty="0"/>
+                <a:t>QR code to </a:t>
+              </a:r>
+              <a:r>
+                <a:rPr lang="de-DE" dirty="0" err="1"/>
+                <a:t>access</a:t>
+              </a:r>
+              <a:r>
+                <a:rPr lang="de-DE" dirty="0"/>
+                <a:t> </a:t>
+              </a:r>
+              <a:r>
+                <a:rPr lang="de-DE" dirty="0" err="1"/>
+                <a:t>software</a:t>
+              </a:r>
+              <a:endParaRPr lang="de-DE" dirty="0"/>
+            </a:p>
+          </p:txBody>
+        </p:sp>
+      </p:grpSp>
+      <p:grpSp>
+        <p:nvGrpSpPr>
+          <p:cNvPr id="32" name="Gruppieren 31">
+            <a:extLst>
+              <a:ext uri="{FF2B5EF4-FFF2-40B4-BE49-F238E27FC236}">
+                <a16:creationId xmlns:a16="http://schemas.microsoft.com/office/drawing/2014/main" id="{C6709645-8859-CAE5-1FED-4F042C111281}"/>
+              </a:ext>
+            </a:extLst>
+          </p:cNvPr>
+          <p:cNvGrpSpPr/>
+          <p:nvPr/>
+        </p:nvGrpSpPr>
+        <p:grpSpPr>
+          <a:xfrm>
+            <a:off x="7489448" y="4512857"/>
+            <a:ext cx="3565524" cy="646331"/>
+            <a:chOff x="6308725" y="1394190"/>
+            <a:chExt cx="3565524" cy="646331"/>
+          </a:xfrm>
+        </p:grpSpPr>
+        <p:cxnSp>
+          <p:nvCxnSpPr>
+            <p:cNvPr id="33" name="Gerade Verbindung mit Pfeil 32">
+              <a:extLst>
+                <a:ext uri="{FF2B5EF4-FFF2-40B4-BE49-F238E27FC236}">
+                  <a16:creationId xmlns:a16="http://schemas.microsoft.com/office/drawing/2014/main" id="{AE451C80-804C-B0D2-DF25-DA2DBA4C50AC}"/>
+                </a:ext>
+              </a:extLst>
+            </p:cNvPr>
+            <p:cNvCxnSpPr>
+              <a:cxnSpLocks/>
+            </p:cNvCxnSpPr>
+            <p:nvPr/>
+          </p:nvCxnSpPr>
+          <p:spPr>
+            <a:xfrm flipH="1" flipV="1">
+              <a:off x="6308725" y="1447284"/>
+              <a:ext cx="720725" cy="84829"/>
+            </a:xfrm>
+            <a:prstGeom prst="straightConnector1">
+              <a:avLst/>
+            </a:prstGeom>
+            <a:ln w="38100">
+              <a:solidFill>
+                <a:srgbClr val="FF0000"/>
+              </a:solidFill>
+              <a:tailEnd type="triangle"/>
+            </a:ln>
+          </p:spPr>
+          <p:style>
+            <a:lnRef idx="2">
+              <a:schemeClr val="accent1"/>
+            </a:lnRef>
+            <a:fillRef idx="0">
+              <a:schemeClr val="accent1"/>
+            </a:fillRef>
+            <a:effectRef idx="1">
+              <a:schemeClr val="accent1"/>
+            </a:effectRef>
+            <a:fontRef idx="minor">
+              <a:schemeClr val="tx1"/>
+            </a:fontRef>
+          </p:style>
+        </p:cxnSp>
+        <p:sp>
+          <p:nvSpPr>
+            <p:cNvPr id="34" name="Textfeld 33">
+              <a:extLst>
+                <a:ext uri="{FF2B5EF4-FFF2-40B4-BE49-F238E27FC236}">
+                  <a16:creationId xmlns:a16="http://schemas.microsoft.com/office/drawing/2014/main" id="{7396EA7C-09C5-639F-CFB7-960C3863E00A}"/>
+                </a:ext>
+              </a:extLst>
+            </p:cNvPr>
+            <p:cNvSpPr txBox="1"/>
+            <p:nvPr/>
+          </p:nvSpPr>
+          <p:spPr>
+            <a:xfrm>
+              <a:off x="7092950" y="1394190"/>
+              <a:ext cx="2781299" cy="646331"/>
+            </a:xfrm>
+            <a:prstGeom prst="rect">
+              <a:avLst/>
+            </a:prstGeom>
+            <a:noFill/>
+          </p:spPr>
+          <p:txBody>
+            <a:bodyPr wrap="square" rtlCol="0">
+              <a:spAutoFit/>
+            </a:bodyPr>
+            <a:lstStyle/>
+            <a:p>
+              <a:r>
+                <a:rPr lang="de-DE" dirty="0"/>
+                <a:t>Box to </a:t>
+              </a:r>
+              <a:r>
+                <a:rPr lang="de-DE" dirty="0" err="1"/>
+                <a:t>show</a:t>
+              </a:r>
+              <a:r>
+                <a:rPr lang="de-DE" dirty="0"/>
+                <a:t> </a:t>
+              </a:r>
+              <a:r>
+                <a:rPr lang="de-DE" dirty="0" err="1"/>
+                <a:t>example</a:t>
+              </a:r>
+              <a:r>
+                <a:rPr lang="de-DE" dirty="0"/>
+                <a:t> </a:t>
+              </a:r>
+              <a:r>
+                <a:rPr lang="de-DE" dirty="0" err="1"/>
+                <a:t>use</a:t>
+              </a:r>
+              <a:r>
+                <a:rPr lang="de-DE" dirty="0"/>
+                <a:t> </a:t>
+              </a:r>
+              <a:r>
+                <a:rPr lang="de-DE" dirty="0" err="1"/>
+                <a:t>case</a:t>
+              </a:r>
+              <a:r>
+                <a:rPr lang="de-DE" dirty="0"/>
+                <a:t> for </a:t>
+              </a:r>
+              <a:r>
+                <a:rPr lang="de-DE" dirty="0" err="1"/>
+                <a:t>software</a:t>
+              </a:r>
+              <a:endParaRPr lang="de-DE" dirty="0"/>
+            </a:p>
+          </p:txBody>
+        </p:sp>
+      </p:grpSp>
+      <p:grpSp>
+        <p:nvGrpSpPr>
+          <p:cNvPr id="37" name="Gruppieren 36">
+            <a:extLst>
+              <a:ext uri="{FF2B5EF4-FFF2-40B4-BE49-F238E27FC236}">
+                <a16:creationId xmlns:a16="http://schemas.microsoft.com/office/drawing/2014/main" id="{AB989011-C65A-54A4-6856-53B58E0B8F3A}"/>
+              </a:ext>
+            </a:extLst>
+          </p:cNvPr>
+          <p:cNvGrpSpPr/>
+          <p:nvPr/>
+        </p:nvGrpSpPr>
+        <p:grpSpPr>
+          <a:xfrm>
+            <a:off x="344111" y="3919620"/>
+            <a:ext cx="3702788" cy="646331"/>
+            <a:chOff x="7161212" y="1447284"/>
+            <a:chExt cx="3702788" cy="646331"/>
+          </a:xfrm>
+        </p:grpSpPr>
+        <p:cxnSp>
+          <p:nvCxnSpPr>
+            <p:cNvPr id="38" name="Gerade Verbindung mit Pfeil 37">
+              <a:extLst>
+                <a:ext uri="{FF2B5EF4-FFF2-40B4-BE49-F238E27FC236}">
+                  <a16:creationId xmlns:a16="http://schemas.microsoft.com/office/drawing/2014/main" id="{8CD96D1F-6E82-3F37-5398-84FFEA8101EC}"/>
+                </a:ext>
+              </a:extLst>
+            </p:cNvPr>
+            <p:cNvCxnSpPr>
+              <a:cxnSpLocks/>
+            </p:cNvCxnSpPr>
+            <p:nvPr/>
+          </p:nvCxnSpPr>
+          <p:spPr>
+            <a:xfrm>
+              <a:off x="10010774" y="1717355"/>
+              <a:ext cx="853226" cy="128812"/>
+            </a:xfrm>
+            <a:prstGeom prst="straightConnector1">
+              <a:avLst/>
+            </a:prstGeom>
+            <a:ln w="38100">
+              <a:solidFill>
+                <a:srgbClr val="FF0000"/>
+              </a:solidFill>
+              <a:tailEnd type="triangle"/>
+            </a:ln>
+          </p:spPr>
+          <p:style>
+            <a:lnRef idx="2">
+              <a:schemeClr val="accent1"/>
+            </a:lnRef>
+            <a:fillRef idx="0">
+              <a:schemeClr val="accent1"/>
+            </a:fillRef>
+            <a:effectRef idx="1">
+              <a:schemeClr val="accent1"/>
+            </a:effectRef>
+            <a:fontRef idx="minor">
+              <a:schemeClr val="tx1"/>
+            </a:fontRef>
+          </p:style>
+        </p:cxnSp>
+        <p:sp>
+          <p:nvSpPr>
+            <p:cNvPr id="39" name="Textfeld 38">
+              <a:extLst>
+                <a:ext uri="{FF2B5EF4-FFF2-40B4-BE49-F238E27FC236}">
+                  <a16:creationId xmlns:a16="http://schemas.microsoft.com/office/drawing/2014/main" id="{0BFC859E-B5A3-9913-6408-8C8669047BEB}"/>
+                </a:ext>
+              </a:extLst>
+            </p:cNvPr>
+            <p:cNvSpPr txBox="1"/>
+            <p:nvPr/>
+          </p:nvSpPr>
+          <p:spPr>
+            <a:xfrm>
+              <a:off x="7161212" y="1447284"/>
+              <a:ext cx="2781299" cy="646331"/>
+            </a:xfrm>
+            <a:prstGeom prst="rect">
+              <a:avLst/>
+            </a:prstGeom>
+            <a:noFill/>
+          </p:spPr>
+          <p:txBody>
+            <a:bodyPr wrap="square" rtlCol="0">
+              <a:spAutoFit/>
+            </a:bodyPr>
+            <a:lstStyle/>
+            <a:p>
+              <a:r>
+                <a:rPr lang="de-DE" dirty="0"/>
+                <a:t>Box to highlight </a:t>
+              </a:r>
+              <a:r>
+                <a:rPr lang="de-DE" dirty="0" err="1"/>
+                <a:t>purpose</a:t>
+              </a:r>
+              <a:r>
+                <a:rPr lang="de-DE" dirty="0"/>
+                <a:t> of </a:t>
+              </a:r>
+              <a:r>
+                <a:rPr lang="de-DE" dirty="0" err="1"/>
+                <a:t>software</a:t>
+              </a:r>
+              <a:endParaRPr lang="de-DE" dirty="0"/>
+            </a:p>
+          </p:txBody>
+        </p:sp>
+      </p:grpSp>
+      <p:grpSp>
+        <p:nvGrpSpPr>
+          <p:cNvPr id="42" name="Gruppieren 41">
+            <a:extLst>
+              <a:ext uri="{FF2B5EF4-FFF2-40B4-BE49-F238E27FC236}">
+                <a16:creationId xmlns:a16="http://schemas.microsoft.com/office/drawing/2014/main" id="{A9CE8140-3E51-E3B3-0C6D-93E40AB6F95E}"/>
+              </a:ext>
+            </a:extLst>
+          </p:cNvPr>
+          <p:cNvGrpSpPr/>
+          <p:nvPr/>
+        </p:nvGrpSpPr>
+        <p:grpSpPr>
+          <a:xfrm>
+            <a:off x="541882" y="5499784"/>
+            <a:ext cx="3413791" cy="646331"/>
+            <a:chOff x="7161212" y="1447284"/>
+            <a:chExt cx="3413791" cy="646331"/>
+          </a:xfrm>
+        </p:grpSpPr>
+        <p:cxnSp>
+          <p:nvCxnSpPr>
+            <p:cNvPr id="43" name="Gerade Verbindung mit Pfeil 42">
+              <a:extLst>
+                <a:ext uri="{FF2B5EF4-FFF2-40B4-BE49-F238E27FC236}">
+                  <a16:creationId xmlns:a16="http://schemas.microsoft.com/office/drawing/2014/main" id="{C59055C5-1809-46C5-706D-E45D87C6044D}"/>
+                </a:ext>
+              </a:extLst>
+            </p:cNvPr>
+            <p:cNvCxnSpPr>
+              <a:cxnSpLocks/>
+            </p:cNvCxnSpPr>
+            <p:nvPr/>
+          </p:nvCxnSpPr>
+          <p:spPr>
+            <a:xfrm>
+              <a:off x="10010774" y="1717355"/>
+              <a:ext cx="564229" cy="0"/>
+            </a:xfrm>
+            <a:prstGeom prst="straightConnector1">
+              <a:avLst/>
+            </a:prstGeom>
+            <a:ln w="38100">
+              <a:solidFill>
+                <a:srgbClr val="FF0000"/>
+              </a:solidFill>
+              <a:tailEnd type="triangle"/>
+            </a:ln>
+          </p:spPr>
+          <p:style>
+            <a:lnRef idx="2">
+              <a:schemeClr val="accent1"/>
+            </a:lnRef>
+            <a:fillRef idx="0">
+              <a:schemeClr val="accent1"/>
+            </a:fillRef>
+            <a:effectRef idx="1">
+              <a:schemeClr val="accent1"/>
+            </a:effectRef>
+            <a:fontRef idx="minor">
+              <a:schemeClr val="tx1"/>
+            </a:fontRef>
+          </p:style>
+        </p:cxnSp>
+        <p:sp>
+          <p:nvSpPr>
+            <p:cNvPr id="44" name="Textfeld 43">
+              <a:extLst>
+                <a:ext uri="{FF2B5EF4-FFF2-40B4-BE49-F238E27FC236}">
+                  <a16:creationId xmlns:a16="http://schemas.microsoft.com/office/drawing/2014/main" id="{8BFA4FE7-8EC0-F4B4-9EA3-2000C6D06F6D}"/>
+                </a:ext>
+              </a:extLst>
+            </p:cNvPr>
+            <p:cNvSpPr txBox="1"/>
+            <p:nvPr/>
+          </p:nvSpPr>
+          <p:spPr>
+            <a:xfrm>
+              <a:off x="7161212" y="1447284"/>
+              <a:ext cx="2781299" cy="646331"/>
+            </a:xfrm>
+            <a:prstGeom prst="rect">
+              <a:avLst/>
+            </a:prstGeom>
+            <a:noFill/>
+          </p:spPr>
+          <p:txBody>
+            <a:bodyPr wrap="square" rtlCol="0">
+              <a:spAutoFit/>
+            </a:bodyPr>
+            <a:lstStyle/>
+            <a:p>
+              <a:r>
+                <a:rPr lang="de-DE" dirty="0" err="1"/>
+                <a:t>Citation</a:t>
+              </a:r>
+              <a:r>
+                <a:rPr lang="de-DE" dirty="0"/>
+                <a:t> of </a:t>
+              </a:r>
+              <a:r>
+                <a:rPr lang="de-DE" dirty="0" err="1"/>
+                <a:t>software</a:t>
+              </a:r>
+              <a:r>
+                <a:rPr lang="de-DE" dirty="0"/>
+                <a:t> </a:t>
+              </a:r>
+              <a:r>
+                <a:rPr lang="de-DE" dirty="0" err="1"/>
+                <a:t>publication</a:t>
+              </a:r>
+              <a:endParaRPr lang="de-DE" dirty="0"/>
+            </a:p>
+          </p:txBody>
+        </p:sp>
+      </p:grpSp>
+    </p:spTree>
+    <p:extLst>
+      <p:ext uri="{BB962C8B-B14F-4D97-AF65-F5344CB8AC3E}">
+        <p14:creationId xmlns:p14="http://schemas.microsoft.com/office/powerpoint/2010/main" val="2000672445"/>
+      </p:ext>
+    </p:extLst>
+  </p:cSld>
+  <p:clrMapOvr>
+    <a:masterClrMapping/>
+  </p:clrMapOvr>
+</p:sld>
+</file>
+
+<file path=ppt/slides/slide6.xml><?xml version="1.0" encoding="utf-8"?>
+<p:sld xmlns:a="http://schemas.openxmlformats.org/drawingml/2006/main" xmlns:r="http://schemas.openxmlformats.org/officeDocument/2006/relationships" xmlns:p="http://schemas.openxmlformats.org/presentationml/2006/main">
+  <p:cSld>
+    <p:spTree>
+      <p:nvGrpSpPr>
+        <p:cNvPr id="1" name="">
+          <a:extLst>
+            <a:ext uri="{FF2B5EF4-FFF2-40B4-BE49-F238E27FC236}">
+              <a16:creationId xmlns:a16="http://schemas.microsoft.com/office/drawing/2014/main" id="{13997737-BBE6-DFA0-CDE3-F8E738C76694}"/>
+            </a:ext>
+          </a:extLst>
+        </p:cNvPr>
+        <p:cNvGrpSpPr/>
+        <p:nvPr/>
+      </p:nvGrpSpPr>
+      <p:grpSpPr>
+        <a:xfrm>
+          <a:off x="0" y="0"/>
+          <a:ext cx="0" cy="0"/>
+          <a:chOff x="0" y="0"/>
+          <a:chExt cx="0" cy="0"/>
+        </a:xfrm>
+      </p:grpSpPr>
+      <p:pic>
+        <p:nvPicPr>
+          <p:cNvPr id="7" name="Grafik 6">
+            <a:extLst>
+              <a:ext uri="{FF2B5EF4-FFF2-40B4-BE49-F238E27FC236}">
+                <a16:creationId xmlns:a16="http://schemas.microsoft.com/office/drawing/2014/main" id="{B953571C-8C23-FE83-BD72-0666F882BBA4}"/>
+              </a:ext>
+            </a:extLst>
+          </p:cNvPr>
+          <p:cNvPicPr>
+            <a:picLocks noChangeAspect="1"/>
+          </p:cNvPicPr>
+          <p:nvPr/>
+        </p:nvPicPr>
+        <p:blipFill>
+          <a:blip r:embed="rId2"/>
+          <a:stretch>
+            <a:fillRect/>
+          </a:stretch>
+        </p:blipFill>
+        <p:spPr>
+          <a:xfrm>
+            <a:off x="3704305" y="1079500"/>
+            <a:ext cx="3915695" cy="5511544"/>
+          </a:xfrm>
+          <a:prstGeom prst="rect">
+            <a:avLst/>
+          </a:prstGeom>
+        </p:spPr>
+      </p:pic>
+      <p:sp>
+        <p:nvSpPr>
+          <p:cNvPr id="9" name="Titel 1">
+            <a:extLst>
+              <a:ext uri="{FF2B5EF4-FFF2-40B4-BE49-F238E27FC236}">
+                <a16:creationId xmlns:a16="http://schemas.microsoft.com/office/drawing/2014/main" id="{BDAD4982-3478-658B-C3A9-A0662CC01D18}"/>
+              </a:ext>
+            </a:extLst>
+          </p:cNvPr>
+          <p:cNvSpPr>
+            <a:spLocks noGrp="1"/>
+          </p:cNvSpPr>
+          <p:nvPr>
+            <p:ph type="title"/>
+          </p:nvPr>
+        </p:nvSpPr>
+        <p:spPr>
+          <a:xfrm>
+            <a:off x="3397974" y="-10332"/>
+            <a:ext cx="4528355" cy="554575"/>
+          </a:xfrm>
+        </p:spPr>
+        <p:txBody>
+          <a:bodyPr>
+            <a:normAutofit/>
+          </a:bodyPr>
+          <a:lstStyle/>
+          <a:p>
+            <a:r>
+              <a:rPr lang="de-DE" sz="3200" b="1" dirty="0">
+                <a:solidFill>
+                  <a:schemeClr val="tx2">
+                    <a:lumMod val="90000"/>
+                    <a:lumOff val="10000"/>
+                  </a:schemeClr>
+                </a:solidFill>
+              </a:rPr>
+              <a:t>Sample Poster – Division</a:t>
+            </a:r>
+          </a:p>
+        </p:txBody>
+      </p:sp>
+      <p:pic>
+        <p:nvPicPr>
+          <p:cNvPr id="17" name="Grafik 16" descr="Logo des Profilbereichs Modeling &amp; Simulation Sciences">
+            <a:extLst>
+              <a:ext uri="{FF2B5EF4-FFF2-40B4-BE49-F238E27FC236}">
+                <a16:creationId xmlns:a16="http://schemas.microsoft.com/office/drawing/2014/main" id="{DCF5CD59-48F9-9B76-B9CD-88A6924BCFB5}"/>
+              </a:ext>
+            </a:extLst>
+          </p:cNvPr>
+          <p:cNvPicPr>
+            <a:picLocks noChangeAspect="1"/>
+          </p:cNvPicPr>
+          <p:nvPr/>
+        </p:nvPicPr>
+        <p:blipFill>
+          <a:blip>
+            <a:extLst>
+              <a:ext uri="{96DAC541-7B7A-43D3-8B79-37D633B846F1}">
+                <asvg:svgBlip xmlns:asvg="http://schemas.microsoft.com/office/drawing/2016/SVG/main" r:embed="rId3"/>
+              </a:ext>
+            </a:extLst>
+          </a:blip>
+          <a:stretch>
+            <a:fillRect/>
+          </a:stretch>
+        </p:blipFill>
+        <p:spPr>
+          <a:xfrm>
+            <a:off x="9769467" y="6243899"/>
+            <a:ext cx="2298073" cy="559491"/>
+          </a:xfrm>
+          <a:prstGeom prst="rect">
+            <a:avLst/>
+          </a:prstGeom>
+        </p:spPr>
+      </p:pic>
+      <p:sp>
+        <p:nvSpPr>
+          <p:cNvPr id="18" name="Geschweifte Klammer links 17">
+            <a:extLst>
+              <a:ext uri="{FF2B5EF4-FFF2-40B4-BE49-F238E27FC236}">
+                <a16:creationId xmlns:a16="http://schemas.microsoft.com/office/drawing/2014/main" id="{A4226619-D339-1855-D8AB-0DB83B6071EB}"/>
+              </a:ext>
+            </a:extLst>
+          </p:cNvPr>
+          <p:cNvSpPr/>
+          <p:nvPr/>
+        </p:nvSpPr>
+        <p:spPr>
+          <a:xfrm>
+            <a:off x="3143250" y="1079500"/>
+            <a:ext cx="463550" cy="831850"/>
+          </a:xfrm>
+          <a:prstGeom prst="leftBrace">
+            <a:avLst/>
+          </a:prstGeom>
+        </p:spPr>
+        <p:style>
+          <a:lnRef idx="2">
+            <a:schemeClr val="accent1"/>
+          </a:lnRef>
+          <a:fillRef idx="0">
+            <a:schemeClr val="accent1"/>
+          </a:fillRef>
+          <a:effectRef idx="1">
+            <a:schemeClr val="accent1"/>
+          </a:effectRef>
+          <a:fontRef idx="minor">
+            <a:schemeClr val="tx1"/>
+          </a:fontRef>
+        </p:style>
+        <p:txBody>
+          <a:bodyPr rtlCol="0" anchor="ctr"/>
+          <a:lstStyle/>
+          <a:p>
+            <a:pPr algn="ctr"/>
+            <a:endParaRPr lang="de-DE"/>
+          </a:p>
+        </p:txBody>
+      </p:sp>
+      <p:sp>
+        <p:nvSpPr>
+          <p:cNvPr id="31" name="Textfeld 30">
+            <a:extLst>
+              <a:ext uri="{FF2B5EF4-FFF2-40B4-BE49-F238E27FC236}">
+                <a16:creationId xmlns:a16="http://schemas.microsoft.com/office/drawing/2014/main" id="{E4B50ECD-8FDE-597A-2092-1A3913C911D3}"/>
+              </a:ext>
+            </a:extLst>
+          </p:cNvPr>
+          <p:cNvSpPr txBox="1"/>
+          <p:nvPr/>
+        </p:nvSpPr>
+        <p:spPr>
+          <a:xfrm>
+            <a:off x="2013872" y="1265019"/>
+            <a:ext cx="1094454" cy="369332"/>
+          </a:xfrm>
+          <a:prstGeom prst="rect">
+            <a:avLst/>
+          </a:prstGeom>
+          <a:noFill/>
+        </p:spPr>
+        <p:txBody>
+          <a:bodyPr wrap="square" rtlCol="0">
+            <a:spAutoFit/>
+          </a:bodyPr>
+          <a:lstStyle/>
+          <a:p>
+            <a:r>
+              <a:rPr lang="de-DE" dirty="0"/>
+              <a:t>Title Box</a:t>
+            </a:r>
+          </a:p>
+        </p:txBody>
+      </p:sp>
+      <p:sp>
+        <p:nvSpPr>
+          <p:cNvPr id="35" name="Textfeld 34">
+            <a:extLst>
+              <a:ext uri="{FF2B5EF4-FFF2-40B4-BE49-F238E27FC236}">
+                <a16:creationId xmlns:a16="http://schemas.microsoft.com/office/drawing/2014/main" id="{F8D5DE31-ADD1-A11A-3043-81F95DFFD2DA}"/>
+              </a:ext>
+            </a:extLst>
+          </p:cNvPr>
+          <p:cNvSpPr txBox="1"/>
+          <p:nvPr/>
+        </p:nvSpPr>
+        <p:spPr>
+          <a:xfrm>
+            <a:off x="3794273" y="442539"/>
+            <a:ext cx="3825727" cy="369332"/>
+          </a:xfrm>
+          <a:prstGeom prst="rect">
+            <a:avLst/>
+          </a:prstGeom>
+          <a:noFill/>
+        </p:spPr>
+        <p:txBody>
+          <a:bodyPr wrap="none" rtlCol="0">
+            <a:spAutoFit/>
+          </a:bodyPr>
+          <a:lstStyle/>
+          <a:p>
+            <a:r>
+              <a:rPr lang="de-DE" dirty="0"/>
+              <a:t>Names as </a:t>
+            </a:r>
+            <a:r>
+              <a:rPr lang="de-DE" dirty="0" err="1"/>
+              <a:t>used</a:t>
+            </a:r>
+            <a:r>
+              <a:rPr lang="de-DE" dirty="0"/>
+              <a:t> in the typst </a:t>
+            </a:r>
+            <a:r>
+              <a:rPr lang="de-DE" dirty="0" err="1"/>
+              <a:t>template</a:t>
             </a:r>
             <a:endParaRPr lang="de-DE" dirty="0"/>
+          </a:p>
+        </p:txBody>
+      </p:sp>
+      <p:sp>
+        <p:nvSpPr>
+          <p:cNvPr id="40" name="Geschweifte Klammer links 39">
+            <a:extLst>
+              <a:ext uri="{FF2B5EF4-FFF2-40B4-BE49-F238E27FC236}">
+                <a16:creationId xmlns:a16="http://schemas.microsoft.com/office/drawing/2014/main" id="{FE6BD94F-256B-5C47-5554-5F71871C6E38}"/>
+              </a:ext>
+            </a:extLst>
+          </p:cNvPr>
+          <p:cNvSpPr/>
+          <p:nvPr/>
+        </p:nvSpPr>
+        <p:spPr>
+          <a:xfrm>
+            <a:off x="3108326" y="2019300"/>
+            <a:ext cx="463550" cy="1917700"/>
+          </a:xfrm>
+          <a:prstGeom prst="leftBrace">
+            <a:avLst/>
+          </a:prstGeom>
+        </p:spPr>
+        <p:style>
+          <a:lnRef idx="2">
+            <a:schemeClr val="accent1"/>
+          </a:lnRef>
+          <a:fillRef idx="0">
+            <a:schemeClr val="accent1"/>
+          </a:fillRef>
+          <a:effectRef idx="1">
+            <a:schemeClr val="accent1"/>
+          </a:effectRef>
+          <a:fontRef idx="minor">
+            <a:schemeClr val="tx1"/>
+          </a:fontRef>
+        </p:style>
+        <p:txBody>
+          <a:bodyPr rtlCol="0" anchor="ctr"/>
+          <a:lstStyle/>
+          <a:p>
+            <a:pPr algn="ctr"/>
+            <a:endParaRPr lang="de-DE"/>
+          </a:p>
+        </p:txBody>
+      </p:sp>
+      <p:sp>
+        <p:nvSpPr>
+          <p:cNvPr id="45" name="Textfeld 44">
+            <a:extLst>
+              <a:ext uri="{FF2B5EF4-FFF2-40B4-BE49-F238E27FC236}">
+                <a16:creationId xmlns:a16="http://schemas.microsoft.com/office/drawing/2014/main" id="{4EDB43ED-C398-3AD4-BE2D-0E247055FAF2}"/>
+              </a:ext>
+            </a:extLst>
+          </p:cNvPr>
+          <p:cNvSpPr txBox="1"/>
+          <p:nvPr/>
+        </p:nvSpPr>
+        <p:spPr>
+          <a:xfrm>
+            <a:off x="1085850" y="2793484"/>
+            <a:ext cx="2057400" cy="369332"/>
+          </a:xfrm>
+          <a:prstGeom prst="rect">
+            <a:avLst/>
+          </a:prstGeom>
+          <a:noFill/>
+        </p:spPr>
+        <p:txBody>
+          <a:bodyPr wrap="square" rtlCol="0">
+            <a:spAutoFit/>
+          </a:bodyPr>
+          <a:lstStyle/>
+          <a:p>
+            <a:r>
+              <a:rPr lang="de-DE" dirty="0"/>
+              <a:t>Software Logo Box</a:t>
+            </a:r>
+          </a:p>
+        </p:txBody>
+      </p:sp>
+      <p:sp>
+        <p:nvSpPr>
+          <p:cNvPr id="47" name="Geschweifte Klammer links 46">
+            <a:extLst>
+              <a:ext uri="{FF2B5EF4-FFF2-40B4-BE49-F238E27FC236}">
+                <a16:creationId xmlns:a16="http://schemas.microsoft.com/office/drawing/2014/main" id="{B38CDBA5-7644-1D7C-F513-546E6C900AD1}"/>
+              </a:ext>
+            </a:extLst>
+          </p:cNvPr>
+          <p:cNvSpPr/>
+          <p:nvPr/>
+        </p:nvSpPr>
+        <p:spPr>
+          <a:xfrm>
+            <a:off x="3115137" y="3835272"/>
+            <a:ext cx="463550" cy="1917700"/>
+          </a:xfrm>
+          <a:prstGeom prst="leftBrace">
+            <a:avLst/>
+          </a:prstGeom>
+          <a:ln>
+            <a:solidFill>
+              <a:schemeClr val="accent3"/>
+            </a:solidFill>
+          </a:ln>
+        </p:spPr>
+        <p:style>
+          <a:lnRef idx="2">
+            <a:schemeClr val="accent1"/>
+          </a:lnRef>
+          <a:fillRef idx="0">
+            <a:schemeClr val="accent1"/>
+          </a:fillRef>
+          <a:effectRef idx="1">
+            <a:schemeClr val="accent1"/>
+          </a:effectRef>
+          <a:fontRef idx="minor">
+            <a:schemeClr val="tx1"/>
+          </a:fontRef>
+        </p:style>
+        <p:txBody>
+          <a:bodyPr rtlCol="0" anchor="ctr"/>
+          <a:lstStyle/>
+          <a:p>
+            <a:pPr algn="ctr"/>
+            <a:endParaRPr lang="de-DE"/>
+          </a:p>
+        </p:txBody>
+      </p:sp>
+      <p:sp>
+        <p:nvSpPr>
+          <p:cNvPr id="51" name="Geschweifte Klammer links 50">
+            <a:extLst>
+              <a:ext uri="{FF2B5EF4-FFF2-40B4-BE49-F238E27FC236}">
+                <a16:creationId xmlns:a16="http://schemas.microsoft.com/office/drawing/2014/main" id="{4AED358C-F0F1-BF2F-CFA1-C9B8B0ABDEBB}"/>
+              </a:ext>
+            </a:extLst>
+          </p:cNvPr>
+          <p:cNvSpPr/>
+          <p:nvPr/>
+        </p:nvSpPr>
+        <p:spPr>
+          <a:xfrm>
+            <a:off x="3115137" y="5778501"/>
+            <a:ext cx="463550" cy="762000"/>
+          </a:xfrm>
+          <a:prstGeom prst="leftBrace">
+            <a:avLst/>
+          </a:prstGeom>
+        </p:spPr>
+        <p:style>
+          <a:lnRef idx="2">
+            <a:schemeClr val="accent1"/>
+          </a:lnRef>
+          <a:fillRef idx="0">
+            <a:schemeClr val="accent1"/>
+          </a:fillRef>
+          <a:effectRef idx="1">
+            <a:schemeClr val="accent1"/>
+          </a:effectRef>
+          <a:fontRef idx="minor">
+            <a:schemeClr val="tx1"/>
+          </a:fontRef>
+        </p:style>
+        <p:txBody>
+          <a:bodyPr rtlCol="0" anchor="ctr"/>
+          <a:lstStyle/>
+          <a:p>
+            <a:pPr algn="ctr"/>
+            <a:endParaRPr lang="de-DE"/>
+          </a:p>
+        </p:txBody>
+      </p:sp>
+      <p:sp>
+        <p:nvSpPr>
+          <p:cNvPr id="53" name="Textfeld 52">
+            <a:extLst>
+              <a:ext uri="{FF2B5EF4-FFF2-40B4-BE49-F238E27FC236}">
+                <a16:creationId xmlns:a16="http://schemas.microsoft.com/office/drawing/2014/main" id="{52D820C2-0A24-E833-13E1-691B3944DB76}"/>
+              </a:ext>
+            </a:extLst>
+          </p:cNvPr>
+          <p:cNvSpPr txBox="1"/>
+          <p:nvPr/>
+        </p:nvSpPr>
+        <p:spPr>
+          <a:xfrm>
+            <a:off x="1438966" y="4609456"/>
+            <a:ext cx="1759411" cy="369332"/>
+          </a:xfrm>
+          <a:prstGeom prst="rect">
+            <a:avLst/>
+          </a:prstGeom>
+          <a:noFill/>
+        </p:spPr>
+        <p:txBody>
+          <a:bodyPr wrap="square" rtlCol="0">
+            <a:spAutoFit/>
+          </a:bodyPr>
+          <a:lstStyle/>
+          <a:p>
+            <a:r>
+              <a:rPr lang="de-DE" dirty="0"/>
+              <a:t>Content Boxes</a:t>
+            </a:r>
+          </a:p>
+        </p:txBody>
+      </p:sp>
+      <p:sp>
+        <p:nvSpPr>
+          <p:cNvPr id="57" name="Textfeld 56">
+            <a:extLst>
+              <a:ext uri="{FF2B5EF4-FFF2-40B4-BE49-F238E27FC236}">
+                <a16:creationId xmlns:a16="http://schemas.microsoft.com/office/drawing/2014/main" id="{EAA85426-56DF-99AB-B66F-B5AF85D0EED5}"/>
+              </a:ext>
+            </a:extLst>
+          </p:cNvPr>
+          <p:cNvSpPr txBox="1"/>
+          <p:nvPr/>
+        </p:nvSpPr>
+        <p:spPr>
+          <a:xfrm>
+            <a:off x="1685926" y="5983914"/>
+            <a:ext cx="1759411" cy="369332"/>
+          </a:xfrm>
+          <a:prstGeom prst="rect">
+            <a:avLst/>
+          </a:prstGeom>
+          <a:noFill/>
+        </p:spPr>
+        <p:txBody>
+          <a:bodyPr wrap="square" rtlCol="0">
+            <a:spAutoFit/>
+          </a:bodyPr>
+          <a:lstStyle/>
+          <a:p>
+            <a:r>
+              <a:rPr lang="de-DE" dirty="0"/>
+              <a:t>Bottom Box</a:t>
+            </a:r>
           </a:p>
         </p:txBody>
       </p:sp>
     </p:spTree>
     <p:extLst>
       <p:ext uri="{BB962C8B-B14F-4D97-AF65-F5344CB8AC3E}">
-        <p14:creationId xmlns:p14="http://schemas.microsoft.com/office/powerpoint/2010/main" val="2350023243"/>
+        <p14:creationId xmlns:p14="http://schemas.microsoft.com/office/powerpoint/2010/main" val="4239604439"/>
+      </p:ext>
+    </p:extLst>
+  </p:cSld>
+  <p:clrMapOvr>
+    <a:masterClrMapping/>
+  </p:clrMapOvr>
+</p:sld>
+</file>
+
+<file path=ppt/slides/slide7.xml><?xml version="1.0" encoding="utf-8"?>
+<p:sld xmlns:a="http://schemas.openxmlformats.org/drawingml/2006/main" xmlns:r="http://schemas.openxmlformats.org/officeDocument/2006/relationships" xmlns:p="http://schemas.openxmlformats.org/presentationml/2006/main">
+  <p:cSld>
+    <p:spTree>
+      <p:nvGrpSpPr>
+        <p:cNvPr id="1" name=""/>
+        <p:cNvGrpSpPr/>
+        <p:nvPr/>
+      </p:nvGrpSpPr>
+      <p:grpSpPr>
+        <a:xfrm>
+          <a:off x="0" y="0"/>
+          <a:ext cx="0" cy="0"/>
+          <a:chOff x="0" y="0"/>
+          <a:chExt cx="0" cy="0"/>
+        </a:xfrm>
+      </p:grpSpPr>
+      <p:pic>
+        <p:nvPicPr>
+          <p:cNvPr id="3" name="Grafik 2">
+            <a:extLst>
+              <a:ext uri="{FF2B5EF4-FFF2-40B4-BE49-F238E27FC236}">
+                <a16:creationId xmlns:a16="http://schemas.microsoft.com/office/drawing/2014/main" id="{E067FC7B-B213-628F-A62C-07D52FE3FB12}"/>
+              </a:ext>
+            </a:extLst>
+          </p:cNvPr>
+          <p:cNvPicPr>
+            <a:picLocks noChangeAspect="1"/>
+          </p:cNvPicPr>
+          <p:nvPr/>
+        </p:nvPicPr>
+        <p:blipFill>
+          <a:blip r:embed="rId2"/>
+          <a:srcRect r="4578"/>
+          <a:stretch>
+            <a:fillRect/>
+          </a:stretch>
+        </p:blipFill>
+        <p:spPr>
+          <a:xfrm>
+            <a:off x="401598" y="318752"/>
+            <a:ext cx="5908667" cy="6449325"/>
+          </a:xfrm>
+          <a:prstGeom prst="rect">
+            <a:avLst/>
+          </a:prstGeom>
+        </p:spPr>
+      </p:pic>
+      <p:pic>
+        <p:nvPicPr>
+          <p:cNvPr id="6" name="Grafik 5">
+            <a:extLst>
+              <a:ext uri="{FF2B5EF4-FFF2-40B4-BE49-F238E27FC236}">
+                <a16:creationId xmlns:a16="http://schemas.microsoft.com/office/drawing/2014/main" id="{EADCDB57-BB0C-4DD8-D01D-EF98A0E8CB6D}"/>
+              </a:ext>
+            </a:extLst>
+          </p:cNvPr>
+          <p:cNvPicPr>
+            <a:picLocks noChangeAspect="1"/>
+          </p:cNvPicPr>
+          <p:nvPr/>
+        </p:nvPicPr>
+        <p:blipFill>
+          <a:blip r:embed="rId3"/>
+          <a:stretch>
+            <a:fillRect/>
+          </a:stretch>
+        </p:blipFill>
+        <p:spPr>
+          <a:xfrm>
+            <a:off x="7162729" y="787642"/>
+            <a:ext cx="3915695" cy="5511544"/>
+          </a:xfrm>
+          <a:prstGeom prst="rect">
+            <a:avLst/>
+          </a:prstGeom>
+        </p:spPr>
+      </p:pic>
+      <p:cxnSp>
+        <p:nvCxnSpPr>
+          <p:cNvPr id="7" name="Gerade Verbindung mit Pfeil 6">
+            <a:extLst>
+              <a:ext uri="{FF2B5EF4-FFF2-40B4-BE49-F238E27FC236}">
+                <a16:creationId xmlns:a16="http://schemas.microsoft.com/office/drawing/2014/main" id="{D53B8E5E-5A49-37F8-90E8-A66C67920ED1}"/>
+              </a:ext>
+            </a:extLst>
+          </p:cNvPr>
+          <p:cNvCxnSpPr>
+            <a:cxnSpLocks/>
+            <a:stCxn id="25" idx="1"/>
+          </p:cNvCxnSpPr>
+          <p:nvPr/>
+        </p:nvCxnSpPr>
+        <p:spPr>
+          <a:xfrm flipV="1">
+            <a:off x="5639590" y="1231261"/>
+            <a:ext cx="1594129" cy="431800"/>
+          </a:xfrm>
+          <a:prstGeom prst="straightConnector1">
+            <a:avLst/>
+          </a:prstGeom>
+          <a:ln w="38100">
+            <a:solidFill>
+              <a:srgbClr val="FF0000"/>
+            </a:solidFill>
+            <a:tailEnd type="triangle"/>
+          </a:ln>
+        </p:spPr>
+        <p:style>
+          <a:lnRef idx="2">
+            <a:schemeClr val="accent1"/>
+          </a:lnRef>
+          <a:fillRef idx="0">
+            <a:schemeClr val="accent1"/>
+          </a:fillRef>
+          <a:effectRef idx="1">
+            <a:schemeClr val="accent1"/>
+          </a:effectRef>
+          <a:fontRef idx="minor">
+            <a:schemeClr val="tx1"/>
+          </a:fontRef>
+        </p:style>
+      </p:cxnSp>
+      <p:cxnSp>
+        <p:nvCxnSpPr>
+          <p:cNvPr id="10" name="Gerade Verbindung mit Pfeil 9">
+            <a:extLst>
+              <a:ext uri="{FF2B5EF4-FFF2-40B4-BE49-F238E27FC236}">
+                <a16:creationId xmlns:a16="http://schemas.microsoft.com/office/drawing/2014/main" id="{DCB8E1E3-B796-98EB-77BD-6959B1AAB29D}"/>
+              </a:ext>
+            </a:extLst>
+          </p:cNvPr>
+          <p:cNvCxnSpPr>
+            <a:cxnSpLocks/>
+          </p:cNvCxnSpPr>
+          <p:nvPr/>
+        </p:nvCxnSpPr>
+        <p:spPr>
+          <a:xfrm>
+            <a:off x="6277069" y="2667995"/>
+            <a:ext cx="1020412" cy="20874"/>
+          </a:xfrm>
+          <a:prstGeom prst="straightConnector1">
+            <a:avLst/>
+          </a:prstGeom>
+          <a:ln w="38100">
+            <a:solidFill>
+              <a:srgbClr val="FF0000"/>
+            </a:solidFill>
+            <a:tailEnd type="triangle"/>
+          </a:ln>
+        </p:spPr>
+        <p:style>
+          <a:lnRef idx="2">
+            <a:schemeClr val="accent1"/>
+          </a:lnRef>
+          <a:fillRef idx="0">
+            <a:schemeClr val="accent1"/>
+          </a:fillRef>
+          <a:effectRef idx="1">
+            <a:schemeClr val="accent1"/>
+          </a:effectRef>
+          <a:fontRef idx="minor">
+            <a:schemeClr val="tx1"/>
+          </a:fontRef>
+        </p:style>
+      </p:cxnSp>
+      <p:cxnSp>
+        <p:nvCxnSpPr>
+          <p:cNvPr id="14" name="Gerade Verbindung mit Pfeil 13">
+            <a:extLst>
+              <a:ext uri="{FF2B5EF4-FFF2-40B4-BE49-F238E27FC236}">
+                <a16:creationId xmlns:a16="http://schemas.microsoft.com/office/drawing/2014/main" id="{DD0C0141-D86A-F8C5-7DFE-34D4028C9D74}"/>
+              </a:ext>
+            </a:extLst>
+          </p:cNvPr>
+          <p:cNvCxnSpPr>
+            <a:cxnSpLocks/>
+            <a:stCxn id="22" idx="1"/>
+          </p:cNvCxnSpPr>
+          <p:nvPr/>
+        </p:nvCxnSpPr>
+        <p:spPr>
+          <a:xfrm flipV="1">
+            <a:off x="6458139" y="4382746"/>
+            <a:ext cx="556716" cy="54322"/>
+          </a:xfrm>
+          <a:prstGeom prst="straightConnector1">
+            <a:avLst/>
+          </a:prstGeom>
+          <a:ln w="38100">
+            <a:solidFill>
+              <a:srgbClr val="FF0000"/>
+            </a:solidFill>
+            <a:tailEnd type="triangle"/>
+          </a:ln>
+        </p:spPr>
+        <p:style>
+          <a:lnRef idx="2">
+            <a:schemeClr val="accent1"/>
+          </a:lnRef>
+          <a:fillRef idx="0">
+            <a:schemeClr val="accent1"/>
+          </a:fillRef>
+          <a:effectRef idx="1">
+            <a:schemeClr val="accent1"/>
+          </a:effectRef>
+          <a:fontRef idx="minor">
+            <a:schemeClr val="tx1"/>
+          </a:fontRef>
+        </p:style>
+      </p:cxnSp>
+      <p:cxnSp>
+        <p:nvCxnSpPr>
+          <p:cNvPr id="16" name="Gerade Verbindung mit Pfeil 15">
+            <a:extLst>
+              <a:ext uri="{FF2B5EF4-FFF2-40B4-BE49-F238E27FC236}">
+                <a16:creationId xmlns:a16="http://schemas.microsoft.com/office/drawing/2014/main" id="{E451FD46-0122-3C36-2A18-7D1C736066E8}"/>
+              </a:ext>
+            </a:extLst>
+          </p:cNvPr>
+          <p:cNvCxnSpPr>
+            <a:cxnSpLocks/>
+          </p:cNvCxnSpPr>
+          <p:nvPr/>
+        </p:nvCxnSpPr>
+        <p:spPr>
+          <a:xfrm flipV="1">
+            <a:off x="3150606" y="5748940"/>
+            <a:ext cx="4012123" cy="298764"/>
+          </a:xfrm>
+          <a:prstGeom prst="straightConnector1">
+            <a:avLst/>
+          </a:prstGeom>
+          <a:ln w="38100">
+            <a:solidFill>
+              <a:srgbClr val="FF0000"/>
+            </a:solidFill>
+            <a:tailEnd type="triangle"/>
+          </a:ln>
+        </p:spPr>
+        <p:style>
+          <a:lnRef idx="2">
+            <a:schemeClr val="accent1"/>
+          </a:lnRef>
+          <a:fillRef idx="0">
+            <a:schemeClr val="accent1"/>
+          </a:fillRef>
+          <a:effectRef idx="1">
+            <a:schemeClr val="accent1"/>
+          </a:effectRef>
+          <a:fontRef idx="minor">
+            <a:schemeClr val="tx1"/>
+          </a:fontRef>
+        </p:style>
+      </p:cxnSp>
+      <p:cxnSp>
+        <p:nvCxnSpPr>
+          <p:cNvPr id="19" name="Gerade Verbindung mit Pfeil 18">
+            <a:extLst>
+              <a:ext uri="{FF2B5EF4-FFF2-40B4-BE49-F238E27FC236}">
+                <a16:creationId xmlns:a16="http://schemas.microsoft.com/office/drawing/2014/main" id="{1EB71193-0803-7CE0-E326-45744A1697EA}"/>
+              </a:ext>
+            </a:extLst>
+          </p:cNvPr>
+          <p:cNvCxnSpPr>
+            <a:cxnSpLocks/>
+          </p:cNvCxnSpPr>
+          <p:nvPr/>
+        </p:nvCxnSpPr>
+        <p:spPr>
+          <a:xfrm flipV="1">
+            <a:off x="3022348" y="6121892"/>
+            <a:ext cx="6366096" cy="469546"/>
+          </a:xfrm>
+          <a:prstGeom prst="straightConnector1">
+            <a:avLst/>
+          </a:prstGeom>
+          <a:ln w="38100">
+            <a:solidFill>
+              <a:srgbClr val="FF0000"/>
+            </a:solidFill>
+            <a:tailEnd type="triangle"/>
+          </a:ln>
+        </p:spPr>
+        <p:style>
+          <a:lnRef idx="2">
+            <a:schemeClr val="accent1"/>
+          </a:lnRef>
+          <a:fillRef idx="0">
+            <a:schemeClr val="accent1"/>
+          </a:fillRef>
+          <a:effectRef idx="1">
+            <a:schemeClr val="accent1"/>
+          </a:effectRef>
+          <a:fontRef idx="minor">
+            <a:schemeClr val="tx1"/>
+          </a:fontRef>
+        </p:style>
+      </p:cxnSp>
+      <p:sp>
+        <p:nvSpPr>
+          <p:cNvPr id="22" name="Geschweifte Klammer rechts 21">
+            <a:extLst>
+              <a:ext uri="{FF2B5EF4-FFF2-40B4-BE49-F238E27FC236}">
+                <a16:creationId xmlns:a16="http://schemas.microsoft.com/office/drawing/2014/main" id="{BC2C03A6-575D-0885-B9AF-A7275BAEF8F3}"/>
+              </a:ext>
+            </a:extLst>
+          </p:cNvPr>
+          <p:cNvSpPr/>
+          <p:nvPr/>
+        </p:nvSpPr>
+        <p:spPr>
+          <a:xfrm>
+            <a:off x="6096000" y="3377812"/>
+            <a:ext cx="362139" cy="2118511"/>
+          </a:xfrm>
+          <a:prstGeom prst="rightBrace">
+            <a:avLst/>
+          </a:prstGeom>
+          <a:ln w="28575">
+            <a:solidFill>
+              <a:srgbClr val="FF0000"/>
+            </a:solidFill>
+          </a:ln>
+        </p:spPr>
+        <p:style>
+          <a:lnRef idx="2">
+            <a:schemeClr val="accent1"/>
+          </a:lnRef>
+          <a:fillRef idx="0">
+            <a:schemeClr val="accent1"/>
+          </a:fillRef>
+          <a:effectRef idx="1">
+            <a:schemeClr val="accent1"/>
+          </a:effectRef>
+          <a:fontRef idx="minor">
+            <a:schemeClr val="tx1"/>
+          </a:fontRef>
+        </p:style>
+        <p:txBody>
+          <a:bodyPr rtlCol="0" anchor="ctr"/>
+          <a:lstStyle/>
+          <a:p>
+            <a:pPr algn="ctr"/>
+            <a:endParaRPr lang="de-DE"/>
+          </a:p>
+        </p:txBody>
+      </p:sp>
+      <p:sp>
+        <p:nvSpPr>
+          <p:cNvPr id="25" name="Geschweifte Klammer rechts 24">
+            <a:extLst>
+              <a:ext uri="{FF2B5EF4-FFF2-40B4-BE49-F238E27FC236}">
+                <a16:creationId xmlns:a16="http://schemas.microsoft.com/office/drawing/2014/main" id="{91256032-FB9E-8B86-FDFB-843515EF2D05}"/>
+              </a:ext>
+            </a:extLst>
+          </p:cNvPr>
+          <p:cNvSpPr/>
+          <p:nvPr/>
+        </p:nvSpPr>
+        <p:spPr>
+          <a:xfrm>
+            <a:off x="5277451" y="1424904"/>
+            <a:ext cx="362139" cy="476314"/>
+          </a:xfrm>
+          <a:prstGeom prst="rightBrace">
+            <a:avLst/>
+          </a:prstGeom>
+          <a:ln w="28575">
+            <a:solidFill>
+              <a:srgbClr val="FF0000"/>
+            </a:solidFill>
+          </a:ln>
+        </p:spPr>
+        <p:style>
+          <a:lnRef idx="2">
+            <a:schemeClr val="accent1"/>
+          </a:lnRef>
+          <a:fillRef idx="0">
+            <a:schemeClr val="accent1"/>
+          </a:fillRef>
+          <a:effectRef idx="1">
+            <a:schemeClr val="accent1"/>
+          </a:effectRef>
+          <a:fontRef idx="minor">
+            <a:schemeClr val="tx1"/>
+          </a:fontRef>
+        </p:style>
+        <p:txBody>
+          <a:bodyPr rtlCol="0" anchor="ctr"/>
+          <a:lstStyle/>
+          <a:p>
+            <a:pPr algn="ctr"/>
+            <a:endParaRPr lang="de-DE"/>
+          </a:p>
+        </p:txBody>
+      </p:sp>
+      <p:sp>
+        <p:nvSpPr>
+          <p:cNvPr id="28" name="Geschweifte Klammer rechts 27">
+            <a:extLst>
+              <a:ext uri="{FF2B5EF4-FFF2-40B4-BE49-F238E27FC236}">
+                <a16:creationId xmlns:a16="http://schemas.microsoft.com/office/drawing/2014/main" id="{4EB766A6-1C35-5FAE-B500-A9BAFA20C325}"/>
+              </a:ext>
+            </a:extLst>
+          </p:cNvPr>
+          <p:cNvSpPr/>
+          <p:nvPr/>
+        </p:nvSpPr>
+        <p:spPr>
+          <a:xfrm>
+            <a:off x="5914930" y="2190930"/>
+            <a:ext cx="362139" cy="995880"/>
+          </a:xfrm>
+          <a:prstGeom prst="rightBrace">
+            <a:avLst/>
+          </a:prstGeom>
+          <a:ln w="28575">
+            <a:solidFill>
+              <a:srgbClr val="FF0000"/>
+            </a:solidFill>
+          </a:ln>
+        </p:spPr>
+        <p:style>
+          <a:lnRef idx="2">
+            <a:schemeClr val="accent1"/>
+          </a:lnRef>
+          <a:fillRef idx="0">
+            <a:schemeClr val="accent1"/>
+          </a:fillRef>
+          <a:effectRef idx="1">
+            <a:schemeClr val="accent1"/>
+          </a:effectRef>
+          <a:fontRef idx="minor">
+            <a:schemeClr val="tx1"/>
+          </a:fontRef>
+        </p:style>
+        <p:txBody>
+          <a:bodyPr rtlCol="0" anchor="ctr"/>
+          <a:lstStyle/>
+          <a:p>
+            <a:pPr algn="ctr"/>
+            <a:endParaRPr lang="de-DE"/>
+          </a:p>
+        </p:txBody>
+      </p:sp>
+      <p:sp>
+        <p:nvSpPr>
+          <p:cNvPr id="31" name="Titel 1">
+            <a:extLst>
+              <a:ext uri="{FF2B5EF4-FFF2-40B4-BE49-F238E27FC236}">
+                <a16:creationId xmlns:a16="http://schemas.microsoft.com/office/drawing/2014/main" id="{AEB4A2AA-36E9-3226-C4F5-DB5B8CE9E0F4}"/>
+              </a:ext>
+            </a:extLst>
+          </p:cNvPr>
+          <p:cNvSpPr>
+            <a:spLocks noGrp="1"/>
+          </p:cNvSpPr>
+          <p:nvPr>
+            <p:ph type="title"/>
+          </p:nvPr>
+        </p:nvSpPr>
+        <p:spPr>
+          <a:xfrm>
+            <a:off x="6550069" y="107035"/>
+            <a:ext cx="4528355" cy="554575"/>
+          </a:xfrm>
+        </p:spPr>
+        <p:txBody>
+          <a:bodyPr>
+            <a:normAutofit/>
+          </a:bodyPr>
+          <a:lstStyle/>
+          <a:p>
+            <a:r>
+              <a:rPr lang="de-DE" sz="3200" b="1" dirty="0">
+                <a:solidFill>
+                  <a:schemeClr val="tx2">
+                    <a:lumMod val="90000"/>
+                    <a:lumOff val="10000"/>
+                  </a:schemeClr>
+                </a:solidFill>
+              </a:rPr>
+              <a:t>Global Variables</a:t>
+            </a:r>
+          </a:p>
+        </p:txBody>
+      </p:sp>
+      <p:sp>
+        <p:nvSpPr>
+          <p:cNvPr id="4" name="Textfeld 3">
+            <a:extLst>
+              <a:ext uri="{FF2B5EF4-FFF2-40B4-BE49-F238E27FC236}">
+                <a16:creationId xmlns:a16="http://schemas.microsoft.com/office/drawing/2014/main" id="{430DA3FF-48B0-3EFD-9EAF-6C2A5484D3C9}"/>
+              </a:ext>
+            </a:extLst>
+          </p:cNvPr>
+          <p:cNvSpPr txBox="1"/>
+          <p:nvPr/>
+        </p:nvSpPr>
+        <p:spPr>
+          <a:xfrm>
+            <a:off x="6458139" y="6429604"/>
+            <a:ext cx="3196376" cy="400110"/>
+          </a:xfrm>
+          <a:prstGeom prst="rect">
+            <a:avLst/>
+          </a:prstGeom>
+          <a:noFill/>
+        </p:spPr>
+        <p:txBody>
+          <a:bodyPr wrap="square" rtlCol="0">
+            <a:spAutoFit/>
+          </a:bodyPr>
+          <a:lstStyle/>
+          <a:p>
+            <a:r>
+              <a:rPr lang="de-DE" sz="1000" dirty="0">
+                <a:solidFill>
+                  <a:srgbClr val="FF0000"/>
+                </a:solidFill>
+              </a:rPr>
+              <a:t>It </a:t>
+            </a:r>
+            <a:r>
+              <a:rPr lang="de-DE" sz="1000" dirty="0" err="1">
+                <a:solidFill>
+                  <a:srgbClr val="FF0000"/>
+                </a:solidFill>
+              </a:rPr>
+              <a:t>is</a:t>
+            </a:r>
+            <a:r>
+              <a:rPr lang="de-DE" sz="1000" dirty="0">
+                <a:solidFill>
+                  <a:srgbClr val="FF0000"/>
+                </a:solidFill>
+              </a:rPr>
+              <a:t> </a:t>
+            </a:r>
+            <a:r>
+              <a:rPr lang="de-DE" sz="1000" dirty="0" err="1">
+                <a:solidFill>
+                  <a:srgbClr val="FF0000"/>
+                </a:solidFill>
+              </a:rPr>
+              <a:t>recommended</a:t>
+            </a:r>
+            <a:r>
+              <a:rPr lang="de-DE" sz="1000" dirty="0">
+                <a:solidFill>
+                  <a:srgbClr val="FF0000"/>
+                </a:solidFill>
+              </a:rPr>
+              <a:t> to </a:t>
+            </a:r>
+            <a:r>
+              <a:rPr lang="de-DE" sz="1000" dirty="0" err="1">
+                <a:solidFill>
+                  <a:srgbClr val="FF0000"/>
+                </a:solidFill>
+              </a:rPr>
+              <a:t>keep</a:t>
+            </a:r>
+            <a:r>
+              <a:rPr lang="de-DE" sz="1000" dirty="0">
+                <a:solidFill>
+                  <a:srgbClr val="FF0000"/>
+                </a:solidFill>
+              </a:rPr>
+              <a:t> the global variables for </a:t>
+            </a:r>
+            <a:r>
+              <a:rPr lang="de-DE" sz="1000" dirty="0" err="1">
+                <a:solidFill>
+                  <a:srgbClr val="FF0000"/>
+                </a:solidFill>
+              </a:rPr>
+              <a:t>colors</a:t>
+            </a:r>
+            <a:r>
+              <a:rPr lang="de-DE" sz="1000" dirty="0">
+                <a:solidFill>
+                  <a:srgbClr val="FF0000"/>
+                </a:solidFill>
+              </a:rPr>
+              <a:t> and </a:t>
+            </a:r>
+            <a:r>
+              <a:rPr lang="de-DE" sz="1000" dirty="0" err="1">
+                <a:solidFill>
+                  <a:srgbClr val="FF0000"/>
+                </a:solidFill>
+              </a:rPr>
+              <a:t>format</a:t>
+            </a:r>
+            <a:r>
+              <a:rPr lang="de-DE" sz="1000" dirty="0">
+                <a:solidFill>
+                  <a:srgbClr val="FF0000"/>
+                </a:solidFill>
+              </a:rPr>
+              <a:t> </a:t>
+            </a:r>
+            <a:r>
+              <a:rPr lang="de-DE" sz="1000" dirty="0" err="1">
+                <a:solidFill>
+                  <a:srgbClr val="FF0000"/>
+                </a:solidFill>
+              </a:rPr>
+              <a:t>unchanged</a:t>
+            </a:r>
+            <a:r>
+              <a:rPr lang="de-DE" sz="1000" dirty="0">
+                <a:solidFill>
+                  <a:srgbClr val="FF0000"/>
+                </a:solidFill>
+              </a:rPr>
+              <a:t>. </a:t>
+            </a:r>
+          </a:p>
+        </p:txBody>
+      </p:sp>
+    </p:spTree>
+    <p:extLst>
+      <p:ext uri="{BB962C8B-B14F-4D97-AF65-F5344CB8AC3E}">
+        <p14:creationId xmlns:p14="http://schemas.microsoft.com/office/powerpoint/2010/main" val="284897638"/>
+      </p:ext>
+    </p:extLst>
+  </p:cSld>
+  <p:clrMapOvr>
+    <a:masterClrMapping/>
+  </p:clrMapOvr>
+</p:sld>
+</file>
+
+<file path=ppt/slides/slide8.xml><?xml version="1.0" encoding="utf-8"?>
+<p:sld xmlns:a="http://schemas.openxmlformats.org/drawingml/2006/main" xmlns:r="http://schemas.openxmlformats.org/officeDocument/2006/relationships" xmlns:p="http://schemas.openxmlformats.org/presentationml/2006/main">
+  <p:cSld>
+    <p:spTree>
+      <p:nvGrpSpPr>
+        <p:cNvPr id="1" name="">
+          <a:extLst>
+            <a:ext uri="{FF2B5EF4-FFF2-40B4-BE49-F238E27FC236}">
+              <a16:creationId xmlns:a16="http://schemas.microsoft.com/office/drawing/2014/main" id="{C015BA44-D0E2-F705-5A0F-0D55252EAB7C}"/>
+            </a:ext>
+          </a:extLst>
+        </p:cNvPr>
+        <p:cNvGrpSpPr/>
+        <p:nvPr/>
+      </p:nvGrpSpPr>
+      <p:grpSpPr>
+        <a:xfrm>
+          <a:off x="0" y="0"/>
+          <a:ext cx="0" cy="0"/>
+          <a:chOff x="0" y="0"/>
+          <a:chExt cx="0" cy="0"/>
+        </a:xfrm>
+      </p:grpSpPr>
+      <p:pic>
+        <p:nvPicPr>
+          <p:cNvPr id="3" name="Grafik 2">
+            <a:extLst>
+              <a:ext uri="{FF2B5EF4-FFF2-40B4-BE49-F238E27FC236}">
+                <a16:creationId xmlns:a16="http://schemas.microsoft.com/office/drawing/2014/main" id="{D2A11528-4D8A-3551-2F40-6C326BD69432}"/>
+              </a:ext>
+            </a:extLst>
+          </p:cNvPr>
+          <p:cNvPicPr>
+            <a:picLocks noChangeAspect="1"/>
+          </p:cNvPicPr>
+          <p:nvPr/>
+        </p:nvPicPr>
+        <p:blipFill>
+          <a:blip r:embed="rId2"/>
+          <a:stretch>
+            <a:fillRect/>
+          </a:stretch>
+        </p:blipFill>
+        <p:spPr>
+          <a:xfrm>
+            <a:off x="230288" y="706288"/>
+            <a:ext cx="7226414" cy="3047283"/>
+          </a:xfrm>
+          <a:prstGeom prst="rect">
+            <a:avLst/>
+          </a:prstGeom>
+        </p:spPr>
+      </p:pic>
+      <p:sp>
+        <p:nvSpPr>
+          <p:cNvPr id="4" name="Titel 1">
+            <a:extLst>
+              <a:ext uri="{FF2B5EF4-FFF2-40B4-BE49-F238E27FC236}">
+                <a16:creationId xmlns:a16="http://schemas.microsoft.com/office/drawing/2014/main" id="{0E805E7F-B45D-DB25-DE8D-6974F4F7B8DA}"/>
+              </a:ext>
+            </a:extLst>
+          </p:cNvPr>
+          <p:cNvSpPr>
+            <a:spLocks noGrp="1"/>
+          </p:cNvSpPr>
+          <p:nvPr>
+            <p:ph type="title"/>
+          </p:nvPr>
+        </p:nvSpPr>
+        <p:spPr>
+          <a:xfrm>
+            <a:off x="6550069" y="107035"/>
+            <a:ext cx="4528355" cy="554575"/>
+          </a:xfrm>
+        </p:spPr>
+        <p:txBody>
+          <a:bodyPr>
+            <a:normAutofit/>
+          </a:bodyPr>
+          <a:lstStyle/>
+          <a:p>
+            <a:r>
+              <a:rPr lang="de-DE" sz="3200" b="1" dirty="0">
+                <a:solidFill>
+                  <a:schemeClr val="tx2">
+                    <a:lumMod val="90000"/>
+                    <a:lumOff val="10000"/>
+                  </a:schemeClr>
+                </a:solidFill>
+              </a:rPr>
+              <a:t>Title Box</a:t>
+            </a:r>
+          </a:p>
+        </p:txBody>
+      </p:sp>
+      <p:cxnSp>
+        <p:nvCxnSpPr>
+          <p:cNvPr id="5" name="Gerade Verbindung mit Pfeil 4">
+            <a:extLst>
+              <a:ext uri="{FF2B5EF4-FFF2-40B4-BE49-F238E27FC236}">
+                <a16:creationId xmlns:a16="http://schemas.microsoft.com/office/drawing/2014/main" id="{41E24C68-AAA0-23C8-0C78-05431CAF913A}"/>
+              </a:ext>
+            </a:extLst>
+          </p:cNvPr>
+          <p:cNvCxnSpPr>
+            <a:cxnSpLocks/>
+          </p:cNvCxnSpPr>
+          <p:nvPr/>
+        </p:nvCxnSpPr>
+        <p:spPr>
+          <a:xfrm flipH="1">
+            <a:off x="3369328" y="3125114"/>
+            <a:ext cx="5857222" cy="166720"/>
+          </a:xfrm>
+          <a:prstGeom prst="straightConnector1">
+            <a:avLst/>
+          </a:prstGeom>
+          <a:ln w="38100">
+            <a:solidFill>
+              <a:srgbClr val="FF0000"/>
+            </a:solidFill>
+            <a:tailEnd type="triangle"/>
+          </a:ln>
+        </p:spPr>
+        <p:style>
+          <a:lnRef idx="2">
+            <a:schemeClr val="accent1"/>
+          </a:lnRef>
+          <a:fillRef idx="0">
+            <a:schemeClr val="accent1"/>
+          </a:fillRef>
+          <a:effectRef idx="1">
+            <a:schemeClr val="accent1"/>
+          </a:effectRef>
+          <a:fontRef idx="minor">
+            <a:schemeClr val="tx1"/>
+          </a:fontRef>
+        </p:style>
+      </p:cxnSp>
+      <p:sp>
+        <p:nvSpPr>
+          <p:cNvPr id="8" name="Textfeld 7">
+            <a:extLst>
+              <a:ext uri="{FF2B5EF4-FFF2-40B4-BE49-F238E27FC236}">
+                <a16:creationId xmlns:a16="http://schemas.microsoft.com/office/drawing/2014/main" id="{7EAD2F98-1827-4E12-D815-272A8EC871F5}"/>
+              </a:ext>
+            </a:extLst>
+          </p:cNvPr>
+          <p:cNvSpPr txBox="1"/>
+          <p:nvPr/>
+        </p:nvSpPr>
+        <p:spPr>
+          <a:xfrm>
+            <a:off x="8162322" y="3257716"/>
+            <a:ext cx="4133729" cy="369332"/>
+          </a:xfrm>
+          <a:prstGeom prst="rect">
+            <a:avLst/>
+          </a:prstGeom>
+          <a:noFill/>
+        </p:spPr>
+        <p:txBody>
+          <a:bodyPr wrap="square" rtlCol="0">
+            <a:spAutoFit/>
+          </a:bodyPr>
+          <a:lstStyle/>
+          <a:p>
+            <a:r>
+              <a:rPr lang="de-DE" dirty="0"/>
+              <a:t>Insert </a:t>
+            </a:r>
+            <a:r>
+              <a:rPr lang="de-DE" dirty="0" err="1"/>
+              <a:t>path</a:t>
+            </a:r>
+            <a:r>
+              <a:rPr lang="de-DE" dirty="0"/>
+              <a:t> to </a:t>
+            </a:r>
+            <a:r>
+              <a:rPr lang="de-DE" dirty="0" err="1"/>
+              <a:t>your</a:t>
+            </a:r>
+            <a:r>
+              <a:rPr lang="de-DE" dirty="0"/>
+              <a:t> </a:t>
+            </a:r>
+            <a:r>
+              <a:rPr lang="de-DE" dirty="0" err="1"/>
+              <a:t>chair</a:t>
+            </a:r>
+            <a:r>
+              <a:rPr lang="de-DE" dirty="0"/>
+              <a:t>/</a:t>
+            </a:r>
+            <a:r>
+              <a:rPr lang="de-DE" dirty="0" err="1"/>
+              <a:t>institute</a:t>
+            </a:r>
+            <a:r>
+              <a:rPr lang="de-DE" dirty="0"/>
+              <a:t> logo</a:t>
+            </a:r>
+          </a:p>
+        </p:txBody>
+      </p:sp>
+      <p:pic>
+        <p:nvPicPr>
+          <p:cNvPr id="14" name="Grafik 13">
+            <a:extLst>
+              <a:ext uri="{FF2B5EF4-FFF2-40B4-BE49-F238E27FC236}">
+                <a16:creationId xmlns:a16="http://schemas.microsoft.com/office/drawing/2014/main" id="{DA7B5752-3FBD-083F-4938-42FA6107CFC3}"/>
+              </a:ext>
+            </a:extLst>
+          </p:cNvPr>
+          <p:cNvPicPr>
+            <a:picLocks noChangeAspect="1"/>
+          </p:cNvPicPr>
+          <p:nvPr/>
+        </p:nvPicPr>
+        <p:blipFill>
+          <a:blip r:embed="rId3"/>
+          <a:srcRect l="80289" t="2068" r="2235" b="85748"/>
+          <a:stretch>
+            <a:fillRect/>
+          </a:stretch>
+        </p:blipFill>
+        <p:spPr>
+          <a:xfrm>
+            <a:off x="9360089" y="1893689"/>
+            <a:ext cx="1354248" cy="1328938"/>
+          </a:xfrm>
+          <a:prstGeom prst="rect">
+            <a:avLst/>
+          </a:prstGeom>
+        </p:spPr>
+      </p:pic>
+      <p:sp>
+        <p:nvSpPr>
+          <p:cNvPr id="16" name="Textfeld 15">
+            <a:extLst>
+              <a:ext uri="{FF2B5EF4-FFF2-40B4-BE49-F238E27FC236}">
+                <a16:creationId xmlns:a16="http://schemas.microsoft.com/office/drawing/2014/main" id="{56631B93-FD8F-95E3-CDCD-E73DE01B7D43}"/>
+              </a:ext>
+            </a:extLst>
+          </p:cNvPr>
+          <p:cNvSpPr txBox="1"/>
+          <p:nvPr/>
+        </p:nvSpPr>
+        <p:spPr>
+          <a:xfrm>
+            <a:off x="613548" y="4799300"/>
+            <a:ext cx="11602591" cy="369332"/>
+          </a:xfrm>
+          <a:prstGeom prst="rect">
+            <a:avLst/>
+          </a:prstGeom>
+          <a:noFill/>
+        </p:spPr>
+        <p:txBody>
+          <a:bodyPr wrap="square" rtlCol="0">
+            <a:spAutoFit/>
+          </a:bodyPr>
+          <a:lstStyle/>
+          <a:p>
+            <a:r>
+              <a:rPr lang="de-DE" dirty="0"/>
+              <a:t>In the </a:t>
+            </a:r>
+            <a:r>
+              <a:rPr lang="de-DE" dirty="0" err="1"/>
+              <a:t>following</a:t>
+            </a:r>
+            <a:r>
+              <a:rPr lang="de-DE" dirty="0"/>
+              <a:t> </a:t>
+            </a:r>
+            <a:r>
+              <a:rPr lang="de-DE" dirty="0" err="1"/>
+              <a:t>example</a:t>
+            </a:r>
+            <a:r>
+              <a:rPr lang="de-DE" dirty="0"/>
+              <a:t> </a:t>
+            </a:r>
+            <a:r>
+              <a:rPr lang="de-DE" dirty="0" err="1"/>
+              <a:t>you</a:t>
+            </a:r>
+            <a:r>
+              <a:rPr lang="de-DE" dirty="0"/>
+              <a:t> </a:t>
+            </a:r>
+            <a:r>
+              <a:rPr lang="de-DE" dirty="0" err="1"/>
+              <a:t>can</a:t>
+            </a:r>
+            <a:r>
+              <a:rPr lang="de-DE" dirty="0"/>
+              <a:t> </a:t>
+            </a:r>
+            <a:r>
+              <a:rPr lang="de-DE" dirty="0" err="1"/>
+              <a:t>see</a:t>
+            </a:r>
+            <a:r>
+              <a:rPr lang="de-DE" dirty="0"/>
+              <a:t> </a:t>
+            </a:r>
+            <a:r>
+              <a:rPr lang="de-DE" dirty="0" err="1"/>
+              <a:t>how</a:t>
+            </a:r>
+            <a:r>
+              <a:rPr lang="de-DE" dirty="0"/>
+              <a:t> it </a:t>
+            </a:r>
+            <a:r>
+              <a:rPr lang="de-DE" dirty="0" err="1"/>
+              <a:t>would</a:t>
+            </a:r>
+            <a:r>
+              <a:rPr lang="de-DE" dirty="0"/>
+              <a:t> </a:t>
+            </a:r>
+            <a:r>
+              <a:rPr lang="de-DE" dirty="0" err="1"/>
+              <a:t>look</a:t>
+            </a:r>
+            <a:r>
+              <a:rPr lang="de-DE" dirty="0"/>
+              <a:t> like, </a:t>
+            </a:r>
+            <a:r>
+              <a:rPr lang="de-DE" dirty="0" err="1"/>
+              <a:t>if</a:t>
+            </a:r>
+            <a:r>
+              <a:rPr lang="de-DE" dirty="0"/>
+              <a:t> the logo </a:t>
+            </a:r>
+            <a:r>
+              <a:rPr lang="de-DE" dirty="0" err="1"/>
+              <a:t>had</a:t>
+            </a:r>
+            <a:r>
+              <a:rPr lang="de-DE" dirty="0"/>
+              <a:t> a different </a:t>
+            </a:r>
+            <a:r>
+              <a:rPr lang="de-DE" dirty="0" err="1"/>
+              <a:t>colored</a:t>
+            </a:r>
+            <a:r>
+              <a:rPr lang="de-DE" dirty="0"/>
+              <a:t> </a:t>
+            </a:r>
+            <a:r>
+              <a:rPr lang="de-DE" dirty="0" err="1"/>
+              <a:t>background</a:t>
+            </a:r>
+            <a:r>
+              <a:rPr lang="de-DE" dirty="0"/>
+              <a:t>:</a:t>
+            </a:r>
+          </a:p>
+        </p:txBody>
+      </p:sp>
+      <p:grpSp>
+        <p:nvGrpSpPr>
+          <p:cNvPr id="24" name="Gruppieren 23">
+            <a:extLst>
+              <a:ext uri="{FF2B5EF4-FFF2-40B4-BE49-F238E27FC236}">
+                <a16:creationId xmlns:a16="http://schemas.microsoft.com/office/drawing/2014/main" id="{2DBAEF5A-DAE2-CD30-F814-EE183431285C}"/>
+              </a:ext>
+            </a:extLst>
+          </p:cNvPr>
+          <p:cNvGrpSpPr/>
+          <p:nvPr/>
+        </p:nvGrpSpPr>
+        <p:grpSpPr>
+          <a:xfrm>
+            <a:off x="2037718" y="5213310"/>
+            <a:ext cx="3005071" cy="1526112"/>
+            <a:chOff x="1457608" y="5331888"/>
+            <a:chExt cx="3005071" cy="1526112"/>
+          </a:xfrm>
+        </p:grpSpPr>
+        <p:pic>
+          <p:nvPicPr>
+            <p:cNvPr id="10" name="Grafik 9">
+              <a:extLst>
+                <a:ext uri="{FF2B5EF4-FFF2-40B4-BE49-F238E27FC236}">
+                  <a16:creationId xmlns:a16="http://schemas.microsoft.com/office/drawing/2014/main" id="{DA79E76B-6EB7-136F-9207-D7EADD9767AE}"/>
+                </a:ext>
+              </a:extLst>
+            </p:cNvPr>
+            <p:cNvPicPr>
+              <a:picLocks noChangeAspect="1"/>
+            </p:cNvPicPr>
+            <p:nvPr/>
+          </p:nvPicPr>
+          <p:blipFill>
+            <a:blip r:embed="rId4"/>
+            <a:stretch>
+              <a:fillRect/>
+            </a:stretch>
+          </p:blipFill>
+          <p:spPr>
+            <a:xfrm>
+              <a:off x="3362724" y="5745898"/>
+              <a:ext cx="961542" cy="1001369"/>
+            </a:xfrm>
+            <a:prstGeom prst="rect">
+              <a:avLst/>
+            </a:prstGeom>
+          </p:spPr>
+        </p:pic>
+        <p:pic>
+          <p:nvPicPr>
+            <p:cNvPr id="12" name="Grafik 11">
+              <a:extLst>
+                <a:ext uri="{FF2B5EF4-FFF2-40B4-BE49-F238E27FC236}">
+                  <a16:creationId xmlns:a16="http://schemas.microsoft.com/office/drawing/2014/main" id="{18F346DC-0EE4-9296-1386-2BBAFC54247D}"/>
+                </a:ext>
+              </a:extLst>
+            </p:cNvPr>
+            <p:cNvPicPr>
+              <a:picLocks noChangeAspect="1"/>
+            </p:cNvPicPr>
+            <p:nvPr/>
+          </p:nvPicPr>
+          <p:blipFill>
+            <a:blip r:embed="rId5">
+              <a:extLst>
+                <a:ext uri="{28A0092B-C50C-407E-A947-70E740481C1C}">
+                  <a14:useLocalDpi xmlns:a14="http://schemas.microsoft.com/office/drawing/2010/main" val="0"/>
+                </a:ext>
+              </a:extLst>
+            </a:blip>
+            <a:stretch>
+              <a:fillRect/>
+            </a:stretch>
+          </p:blipFill>
+          <p:spPr>
+            <a:xfrm>
+              <a:off x="1568974" y="5745898"/>
+              <a:ext cx="961542" cy="961542"/>
+            </a:xfrm>
+            <a:prstGeom prst="rect">
+              <a:avLst/>
+            </a:prstGeom>
+          </p:spPr>
+        </p:pic>
+        <p:sp>
+          <p:nvSpPr>
+            <p:cNvPr id="20" name="Textfeld 19">
+              <a:extLst>
+                <a:ext uri="{FF2B5EF4-FFF2-40B4-BE49-F238E27FC236}">
+                  <a16:creationId xmlns:a16="http://schemas.microsoft.com/office/drawing/2014/main" id="{A7809688-DE08-235B-E505-983A15E0A0FD}"/>
+                </a:ext>
+              </a:extLst>
+            </p:cNvPr>
+            <p:cNvSpPr txBox="1"/>
+            <p:nvPr/>
+          </p:nvSpPr>
+          <p:spPr>
+            <a:xfrm>
+              <a:off x="1732874" y="5343994"/>
+              <a:ext cx="664477" cy="369332"/>
+            </a:xfrm>
+            <a:prstGeom prst="rect">
+              <a:avLst/>
+            </a:prstGeom>
+            <a:noFill/>
+          </p:spPr>
+          <p:txBody>
+            <a:bodyPr wrap="none" rtlCol="0">
+              <a:spAutoFit/>
+            </a:bodyPr>
+            <a:lstStyle/>
+            <a:p>
+              <a:r>
+                <a:rPr lang="de-DE" dirty="0"/>
+                <a:t>Logo</a:t>
+              </a:r>
+            </a:p>
+          </p:txBody>
+        </p:sp>
+        <p:sp>
+          <p:nvSpPr>
+            <p:cNvPr id="22" name="Textfeld 21">
+              <a:extLst>
+                <a:ext uri="{FF2B5EF4-FFF2-40B4-BE49-F238E27FC236}">
+                  <a16:creationId xmlns:a16="http://schemas.microsoft.com/office/drawing/2014/main" id="{1E2AD645-EF10-21C9-D2AC-A253DF28FB66}"/>
+                </a:ext>
+              </a:extLst>
+            </p:cNvPr>
+            <p:cNvSpPr txBox="1"/>
+            <p:nvPr/>
+          </p:nvSpPr>
+          <p:spPr>
+            <a:xfrm>
+              <a:off x="3301720" y="5331888"/>
+              <a:ext cx="1160959" cy="369332"/>
+            </a:xfrm>
+            <a:prstGeom prst="rect">
+              <a:avLst/>
+            </a:prstGeom>
+            <a:noFill/>
+          </p:spPr>
+          <p:txBody>
+            <a:bodyPr wrap="none" rtlCol="0">
+              <a:spAutoFit/>
+            </a:bodyPr>
+            <a:lstStyle/>
+            <a:p>
+              <a:r>
+                <a:rPr lang="de-DE" dirty="0"/>
+                <a:t>On Poster</a:t>
+              </a:r>
+            </a:p>
+          </p:txBody>
+        </p:sp>
+        <p:sp>
+          <p:nvSpPr>
+            <p:cNvPr id="23" name="Rechteck 22">
+              <a:extLst>
+                <a:ext uri="{FF2B5EF4-FFF2-40B4-BE49-F238E27FC236}">
+                  <a16:creationId xmlns:a16="http://schemas.microsoft.com/office/drawing/2014/main" id="{F6998BE1-2612-21F8-621E-EB02AB52449B}"/>
+                </a:ext>
+              </a:extLst>
+            </p:cNvPr>
+            <p:cNvSpPr/>
+            <p:nvPr/>
+          </p:nvSpPr>
+          <p:spPr>
+            <a:xfrm>
+              <a:off x="1457608" y="5331888"/>
+              <a:ext cx="3005071" cy="1526112"/>
+            </a:xfrm>
+            <a:prstGeom prst="rect">
+              <a:avLst/>
+            </a:prstGeom>
+            <a:noFill/>
+            <a:ln>
+              <a:solidFill>
+                <a:schemeClr val="tx1"/>
+              </a:solidFill>
+            </a:ln>
+          </p:spPr>
+          <p:style>
+            <a:lnRef idx="2">
+              <a:schemeClr val="accent1">
+                <a:shade val="15000"/>
+              </a:schemeClr>
+            </a:lnRef>
+            <a:fillRef idx="1">
+              <a:schemeClr val="accent1"/>
+            </a:fillRef>
+            <a:effectRef idx="0">
+              <a:schemeClr val="accent1"/>
+            </a:effectRef>
+            <a:fontRef idx="minor">
+              <a:schemeClr val="lt1"/>
+            </a:fontRef>
+          </p:style>
+          <p:txBody>
+            <a:bodyPr rtlCol="0" anchor="ctr"/>
+            <a:lstStyle/>
+            <a:p>
+              <a:pPr algn="ctr"/>
+              <a:endParaRPr lang="de-DE"/>
+            </a:p>
+          </p:txBody>
+        </p:sp>
+      </p:grpSp>
+      <p:sp>
+        <p:nvSpPr>
+          <p:cNvPr id="26" name="Textfeld 25">
+            <a:extLst>
+              <a:ext uri="{FF2B5EF4-FFF2-40B4-BE49-F238E27FC236}">
+                <a16:creationId xmlns:a16="http://schemas.microsoft.com/office/drawing/2014/main" id="{2B3613DE-4471-5D68-BD86-92B45062FB32}"/>
+              </a:ext>
+            </a:extLst>
+          </p:cNvPr>
+          <p:cNvSpPr txBox="1"/>
+          <p:nvPr/>
+        </p:nvSpPr>
+        <p:spPr>
+          <a:xfrm>
+            <a:off x="6001437" y="5641453"/>
+            <a:ext cx="5291128" cy="307777"/>
+          </a:xfrm>
+          <a:prstGeom prst="rect">
+            <a:avLst/>
+          </a:prstGeom>
+          <a:noFill/>
+        </p:spPr>
+        <p:txBody>
+          <a:bodyPr wrap="none" rtlCol="0">
+            <a:spAutoFit/>
+          </a:bodyPr>
+          <a:lstStyle/>
+          <a:p>
+            <a:r>
+              <a:rPr lang="de-DE" sz="1400" dirty="0" err="1">
+                <a:solidFill>
+                  <a:srgbClr val="FF0000"/>
+                </a:solidFill>
+              </a:rPr>
+              <a:t>You</a:t>
+            </a:r>
+            <a:r>
+              <a:rPr lang="de-DE" sz="1400" dirty="0">
+                <a:solidFill>
+                  <a:srgbClr val="FF0000"/>
+                </a:solidFill>
+              </a:rPr>
+              <a:t> </a:t>
+            </a:r>
+            <a:r>
+              <a:rPr lang="de-DE" sz="1400" dirty="0" err="1">
+                <a:solidFill>
+                  <a:srgbClr val="FF0000"/>
+                </a:solidFill>
+              </a:rPr>
+              <a:t>can</a:t>
+            </a:r>
+            <a:r>
+              <a:rPr lang="de-DE" sz="1400" dirty="0">
+                <a:solidFill>
+                  <a:srgbClr val="FF0000"/>
+                </a:solidFill>
+              </a:rPr>
+              <a:t> </a:t>
+            </a:r>
+            <a:r>
+              <a:rPr lang="de-DE" sz="1400" dirty="0" err="1">
+                <a:solidFill>
+                  <a:srgbClr val="FF0000"/>
+                </a:solidFill>
+              </a:rPr>
+              <a:t>use</a:t>
+            </a:r>
+            <a:r>
+              <a:rPr lang="de-DE" sz="1400" dirty="0">
+                <a:solidFill>
+                  <a:srgbClr val="FF0000"/>
+                </a:solidFill>
+              </a:rPr>
+              <a:t> the </a:t>
+            </a:r>
+            <a:r>
+              <a:rPr lang="de-DE" sz="1400" dirty="0" err="1">
+                <a:solidFill>
+                  <a:srgbClr val="FF0000"/>
+                </a:solidFill>
+              </a:rPr>
+              <a:t>next</a:t>
+            </a:r>
+            <a:r>
+              <a:rPr lang="de-DE" sz="1400" dirty="0">
+                <a:solidFill>
+                  <a:srgbClr val="FF0000"/>
+                </a:solidFill>
+              </a:rPr>
+              <a:t> </a:t>
+            </a:r>
+            <a:r>
+              <a:rPr lang="de-DE" sz="1400" dirty="0" err="1">
+                <a:solidFill>
+                  <a:srgbClr val="FF0000"/>
+                </a:solidFill>
+              </a:rPr>
+              <a:t>slide</a:t>
+            </a:r>
+            <a:r>
+              <a:rPr lang="de-DE" sz="1400" dirty="0">
+                <a:solidFill>
+                  <a:srgbClr val="FF0000"/>
+                </a:solidFill>
+              </a:rPr>
+              <a:t> to </a:t>
+            </a:r>
+            <a:r>
+              <a:rPr lang="de-DE" sz="1400" dirty="0" err="1">
+                <a:solidFill>
+                  <a:srgbClr val="FF0000"/>
+                </a:solidFill>
+              </a:rPr>
+              <a:t>adjust</a:t>
+            </a:r>
+            <a:r>
+              <a:rPr lang="de-DE" sz="1400" dirty="0">
+                <a:solidFill>
+                  <a:srgbClr val="FF0000"/>
+                </a:solidFill>
+              </a:rPr>
+              <a:t> </a:t>
+            </a:r>
+            <a:r>
+              <a:rPr lang="de-DE" sz="1400" dirty="0" err="1">
+                <a:solidFill>
+                  <a:srgbClr val="FF0000"/>
+                </a:solidFill>
+              </a:rPr>
+              <a:t>your</a:t>
+            </a:r>
+            <a:r>
+              <a:rPr lang="de-DE" sz="1400" dirty="0">
+                <a:solidFill>
+                  <a:srgbClr val="FF0000"/>
+                </a:solidFill>
+              </a:rPr>
+              <a:t> </a:t>
+            </a:r>
+            <a:r>
+              <a:rPr lang="de-DE" sz="1400" dirty="0" err="1">
+                <a:solidFill>
+                  <a:srgbClr val="FF0000"/>
+                </a:solidFill>
+              </a:rPr>
+              <a:t>chairs</a:t>
+            </a:r>
+            <a:r>
+              <a:rPr lang="de-DE" sz="1400" dirty="0">
+                <a:solidFill>
+                  <a:srgbClr val="FF0000"/>
+                </a:solidFill>
+              </a:rPr>
+              <a:t> logo to fit the </a:t>
+            </a:r>
+            <a:r>
+              <a:rPr lang="de-DE" sz="1400" dirty="0" err="1">
+                <a:solidFill>
+                  <a:srgbClr val="FF0000"/>
+                </a:solidFill>
+              </a:rPr>
+              <a:t>circle</a:t>
+            </a:r>
+            <a:endParaRPr lang="de-DE" sz="1400" dirty="0">
+              <a:solidFill>
+                <a:srgbClr val="FF0000"/>
+              </a:solidFill>
+            </a:endParaRPr>
+          </a:p>
+        </p:txBody>
+      </p:sp>
+      <p:cxnSp>
+        <p:nvCxnSpPr>
+          <p:cNvPr id="2" name="Gerade Verbindung mit Pfeil 1">
+            <a:extLst>
+              <a:ext uri="{FF2B5EF4-FFF2-40B4-BE49-F238E27FC236}">
+                <a16:creationId xmlns:a16="http://schemas.microsoft.com/office/drawing/2014/main" id="{7334C3A0-0213-A4E5-5786-BE6F428CD760}"/>
+              </a:ext>
+            </a:extLst>
+          </p:cNvPr>
+          <p:cNvCxnSpPr>
+            <a:cxnSpLocks/>
+            <a:stCxn id="13" idx="1"/>
+            <a:endCxn id="6" idx="1"/>
+          </p:cNvCxnSpPr>
+          <p:nvPr/>
+        </p:nvCxnSpPr>
+        <p:spPr>
+          <a:xfrm flipH="1">
+            <a:off x="7934539" y="846276"/>
+            <a:ext cx="397107" cy="1054791"/>
+          </a:xfrm>
+          <a:prstGeom prst="straightConnector1">
+            <a:avLst/>
+          </a:prstGeom>
+          <a:ln w="38100">
+            <a:solidFill>
+              <a:srgbClr val="FF0000"/>
+            </a:solidFill>
+            <a:tailEnd type="triangle"/>
+          </a:ln>
+        </p:spPr>
+        <p:style>
+          <a:lnRef idx="2">
+            <a:schemeClr val="accent1"/>
+          </a:lnRef>
+          <a:fillRef idx="0">
+            <a:schemeClr val="accent1"/>
+          </a:fillRef>
+          <a:effectRef idx="1">
+            <a:schemeClr val="accent1"/>
+          </a:effectRef>
+          <a:fontRef idx="minor">
+            <a:schemeClr val="tx1"/>
+          </a:fontRef>
+        </p:style>
+      </p:cxnSp>
+      <p:sp>
+        <p:nvSpPr>
+          <p:cNvPr id="6" name="Geschweifte Klammer rechts 5">
+            <a:extLst>
+              <a:ext uri="{FF2B5EF4-FFF2-40B4-BE49-F238E27FC236}">
+                <a16:creationId xmlns:a16="http://schemas.microsoft.com/office/drawing/2014/main" id="{141452B4-CFAD-7236-D8C3-D2CC34D6B2FE}"/>
+              </a:ext>
+            </a:extLst>
+          </p:cNvPr>
+          <p:cNvSpPr/>
+          <p:nvPr/>
+        </p:nvSpPr>
+        <p:spPr>
+          <a:xfrm>
+            <a:off x="7572400" y="1206012"/>
+            <a:ext cx="362139" cy="1390110"/>
+          </a:xfrm>
+          <a:prstGeom prst="rightBrace">
+            <a:avLst/>
+          </a:prstGeom>
+          <a:ln w="28575">
+            <a:solidFill>
+              <a:srgbClr val="FF0000"/>
+            </a:solidFill>
+          </a:ln>
+        </p:spPr>
+        <p:style>
+          <a:lnRef idx="2">
+            <a:schemeClr val="accent1"/>
+          </a:lnRef>
+          <a:fillRef idx="0">
+            <a:schemeClr val="accent1"/>
+          </a:fillRef>
+          <a:effectRef idx="1">
+            <a:schemeClr val="accent1"/>
+          </a:effectRef>
+          <a:fontRef idx="minor">
+            <a:schemeClr val="tx1"/>
+          </a:fontRef>
+        </p:style>
+        <p:txBody>
+          <a:bodyPr rtlCol="0" anchor="ctr"/>
+          <a:lstStyle/>
+          <a:p>
+            <a:pPr algn="ctr"/>
+            <a:endParaRPr lang="de-DE"/>
+          </a:p>
+        </p:txBody>
+      </p:sp>
+      <p:sp>
+        <p:nvSpPr>
+          <p:cNvPr id="13" name="Textfeld 12">
+            <a:extLst>
+              <a:ext uri="{FF2B5EF4-FFF2-40B4-BE49-F238E27FC236}">
+                <a16:creationId xmlns:a16="http://schemas.microsoft.com/office/drawing/2014/main" id="{967D69C0-9B8B-0A3C-40FF-230CD4AC288F}"/>
+              </a:ext>
+            </a:extLst>
+          </p:cNvPr>
+          <p:cNvSpPr txBox="1"/>
+          <p:nvPr/>
+        </p:nvSpPr>
+        <p:spPr>
+          <a:xfrm>
+            <a:off x="8331646" y="661610"/>
+            <a:ext cx="2862475" cy="369332"/>
+          </a:xfrm>
+          <a:prstGeom prst="rect">
+            <a:avLst/>
+          </a:prstGeom>
+          <a:noFill/>
+        </p:spPr>
+        <p:txBody>
+          <a:bodyPr wrap="square" rtlCol="0">
+            <a:spAutoFit/>
+          </a:bodyPr>
+          <a:lstStyle/>
+          <a:p>
+            <a:r>
+              <a:rPr lang="de-DE" dirty="0" err="1"/>
+              <a:t>Adjust</a:t>
+            </a:r>
+            <a:r>
+              <a:rPr lang="de-DE" dirty="0"/>
+              <a:t> for </a:t>
+            </a:r>
+            <a:r>
+              <a:rPr lang="de-DE" dirty="0" err="1"/>
+              <a:t>your</a:t>
+            </a:r>
+            <a:r>
+              <a:rPr lang="de-DE" dirty="0"/>
+              <a:t> </a:t>
+            </a:r>
+            <a:r>
+              <a:rPr lang="de-DE" dirty="0" err="1"/>
+              <a:t>software</a:t>
+            </a:r>
+            <a:endParaRPr lang="de-DE" dirty="0"/>
+          </a:p>
+        </p:txBody>
+      </p:sp>
+      <p:sp>
+        <p:nvSpPr>
+          <p:cNvPr id="31" name="Textfeld 30">
+            <a:extLst>
+              <a:ext uri="{FF2B5EF4-FFF2-40B4-BE49-F238E27FC236}">
+                <a16:creationId xmlns:a16="http://schemas.microsoft.com/office/drawing/2014/main" id="{FEDC8352-33E1-61E3-0511-F44E31FAD781}"/>
+              </a:ext>
+            </a:extLst>
+          </p:cNvPr>
+          <p:cNvSpPr txBox="1"/>
+          <p:nvPr/>
+        </p:nvSpPr>
+        <p:spPr>
+          <a:xfrm>
+            <a:off x="119515" y="4003313"/>
+            <a:ext cx="11342236" cy="646331"/>
+          </a:xfrm>
+          <a:prstGeom prst="rect">
+            <a:avLst/>
+          </a:prstGeom>
+          <a:noFill/>
+        </p:spPr>
+        <p:txBody>
+          <a:bodyPr wrap="square">
+            <a:spAutoFit/>
+          </a:bodyPr>
+          <a:lstStyle/>
+          <a:p>
+            <a:r>
+              <a:rPr lang="de-DE" sz="1800" dirty="0"/>
+              <a:t>Image will </a:t>
+            </a:r>
+            <a:r>
+              <a:rPr lang="de-DE" sz="1800" dirty="0" err="1"/>
+              <a:t>be</a:t>
+            </a:r>
+            <a:r>
+              <a:rPr lang="de-DE" sz="1800" dirty="0"/>
+              <a:t> </a:t>
+            </a:r>
+            <a:r>
+              <a:rPr lang="de-DE" sz="1800" dirty="0" err="1"/>
+              <a:t>clipped</a:t>
+            </a:r>
+            <a:r>
+              <a:rPr lang="de-DE" sz="1800" dirty="0"/>
+              <a:t> to fit the </a:t>
+            </a:r>
+            <a:r>
+              <a:rPr lang="de-DE" sz="1800" dirty="0" err="1"/>
+              <a:t>circle</a:t>
+            </a:r>
+            <a:r>
+              <a:rPr lang="de-DE" sz="1800" dirty="0"/>
+              <a:t>. The Circle </a:t>
+            </a:r>
+            <a:r>
+              <a:rPr lang="de-DE" sz="1800" dirty="0" err="1"/>
+              <a:t>has</a:t>
+            </a:r>
+            <a:r>
+              <a:rPr lang="de-DE" sz="1800" dirty="0"/>
+              <a:t> a </a:t>
+            </a:r>
+            <a:r>
+              <a:rPr lang="de-DE" sz="1800" dirty="0" err="1"/>
+              <a:t>white</a:t>
+            </a:r>
+            <a:r>
+              <a:rPr lang="de-DE" sz="1800" dirty="0"/>
+              <a:t> </a:t>
+            </a:r>
+            <a:r>
+              <a:rPr lang="de-DE" sz="1800" dirty="0" err="1"/>
+              <a:t>background</a:t>
+            </a:r>
+            <a:r>
+              <a:rPr lang="de-DE" sz="1800" dirty="0"/>
+              <a:t>. It </a:t>
+            </a:r>
+            <a:r>
+              <a:rPr lang="de-DE" sz="1800" dirty="0" err="1"/>
+              <a:t>is</a:t>
+            </a:r>
+            <a:r>
+              <a:rPr lang="de-DE" sz="1800" dirty="0"/>
+              <a:t> </a:t>
+            </a:r>
+            <a:r>
+              <a:rPr lang="de-DE" sz="1800" dirty="0" err="1"/>
+              <a:t>recommended</a:t>
+            </a:r>
+            <a:r>
+              <a:rPr lang="de-DE" sz="1800" dirty="0"/>
+              <a:t> to also </a:t>
+            </a:r>
+            <a:r>
+              <a:rPr lang="de-DE" sz="1800" dirty="0" err="1"/>
+              <a:t>use</a:t>
+            </a:r>
+            <a:r>
+              <a:rPr lang="de-DE" sz="1800" dirty="0"/>
+              <a:t> a logo </a:t>
+            </a:r>
+            <a:r>
+              <a:rPr lang="de-DE" sz="1800" dirty="0" err="1"/>
+              <a:t>with</a:t>
+            </a:r>
+            <a:r>
+              <a:rPr lang="de-DE" sz="1800" dirty="0"/>
+              <a:t> </a:t>
+            </a:r>
+            <a:r>
+              <a:rPr lang="de-DE" sz="1800" dirty="0" err="1"/>
+              <a:t>white</a:t>
+            </a:r>
+            <a:r>
+              <a:rPr lang="de-DE" sz="1800" dirty="0"/>
+              <a:t> </a:t>
+            </a:r>
+            <a:r>
+              <a:rPr lang="de-DE" sz="1800" dirty="0" err="1"/>
+              <a:t>background</a:t>
+            </a:r>
+            <a:r>
+              <a:rPr lang="de-DE" sz="1800" dirty="0"/>
+              <a:t>.</a:t>
+            </a:r>
+          </a:p>
+        </p:txBody>
+      </p:sp>
+    </p:spTree>
+    <p:extLst>
+      <p:ext uri="{BB962C8B-B14F-4D97-AF65-F5344CB8AC3E}">
+        <p14:creationId xmlns:p14="http://schemas.microsoft.com/office/powerpoint/2010/main" val="1473549473"/>
+      </p:ext>
+    </p:extLst>
+  </p:cSld>
+  <p:clrMapOvr>
+    <a:masterClrMapping/>
+  </p:clrMapOvr>
+</p:sld>
+</file>
+
+<file path=ppt/slides/slide9.xml><?xml version="1.0" encoding="utf-8"?>
+<p:sld xmlns:a="http://schemas.openxmlformats.org/drawingml/2006/main" xmlns:r="http://schemas.openxmlformats.org/officeDocument/2006/relationships" xmlns:p="http://schemas.openxmlformats.org/presentationml/2006/main">
+  <p:cSld>
+    <p:spTree>
+      <p:nvGrpSpPr>
+        <p:cNvPr id="1" name="">
+          <a:extLst>
+            <a:ext uri="{FF2B5EF4-FFF2-40B4-BE49-F238E27FC236}">
+              <a16:creationId xmlns:a16="http://schemas.microsoft.com/office/drawing/2014/main" id="{113EAD74-BF7F-3EFB-266E-E23510176885}"/>
+            </a:ext>
+          </a:extLst>
+        </p:cNvPr>
+        <p:cNvGrpSpPr/>
+        <p:nvPr/>
+      </p:nvGrpSpPr>
+      <p:grpSpPr>
+        <a:xfrm>
+          <a:off x="0" y="0"/>
+          <a:ext cx="0" cy="0"/>
+          <a:chOff x="0" y="0"/>
+          <a:chExt cx="0" cy="0"/>
+        </a:xfrm>
+      </p:grpSpPr>
+      <p:grpSp>
+        <p:nvGrpSpPr>
+          <p:cNvPr id="11" name="Gruppieren 10">
+            <a:extLst>
+              <a:ext uri="{FF2B5EF4-FFF2-40B4-BE49-F238E27FC236}">
+                <a16:creationId xmlns:a16="http://schemas.microsoft.com/office/drawing/2014/main" id="{DE5BB375-D00D-F74C-7E31-D8A8446E30EC}"/>
+              </a:ext>
+            </a:extLst>
+          </p:cNvPr>
+          <p:cNvGrpSpPr/>
+          <p:nvPr/>
+        </p:nvGrpSpPr>
+        <p:grpSpPr>
+          <a:xfrm>
+            <a:off x="8314027" y="2107122"/>
+            <a:ext cx="3024000" cy="3024000"/>
+            <a:chOff x="4584000" y="1917000"/>
+            <a:chExt cx="3024000" cy="3024000"/>
+          </a:xfrm>
+        </p:grpSpPr>
+        <p:grpSp>
+          <p:nvGrpSpPr>
+            <p:cNvPr id="9" name="Gruppieren 8">
+              <a:extLst>
+                <a:ext uri="{FF2B5EF4-FFF2-40B4-BE49-F238E27FC236}">
+                  <a16:creationId xmlns:a16="http://schemas.microsoft.com/office/drawing/2014/main" id="{E5A4A58E-AB10-3EDC-0E62-AE8CEEE4F759}"/>
+                </a:ext>
+              </a:extLst>
+            </p:cNvPr>
+            <p:cNvGrpSpPr/>
+            <p:nvPr/>
+          </p:nvGrpSpPr>
+          <p:grpSpPr>
+            <a:xfrm>
+              <a:off x="4955243" y="2233328"/>
+              <a:ext cx="2281513" cy="2391344"/>
+              <a:chOff x="3550532" y="2905254"/>
+              <a:chExt cx="1154885" cy="1200097"/>
+            </a:xfrm>
+          </p:grpSpPr>
+          <p:pic>
+            <p:nvPicPr>
+              <p:cNvPr id="5" name="Grafik 4">
+                <a:extLst>
+                  <a:ext uri="{FF2B5EF4-FFF2-40B4-BE49-F238E27FC236}">
+                    <a16:creationId xmlns:a16="http://schemas.microsoft.com/office/drawing/2014/main" id="{00552957-539F-02F5-9AC5-35209FD66B33}"/>
+                  </a:ext>
+                </a:extLst>
+              </p:cNvPr>
+              <p:cNvPicPr>
+                <a:picLocks noChangeAspect="1"/>
+              </p:cNvPicPr>
+              <p:nvPr/>
+            </p:nvPicPr>
+            <p:blipFill>
+              <a:blip>
+                <a:extLst>
+                  <a:ext uri="{96DAC541-7B7A-43D3-8B79-37D633B846F1}">
+                    <asvg:svgBlip xmlns:asvg="http://schemas.microsoft.com/office/drawing/2016/SVG/main" r:embed="rId2"/>
+                  </a:ext>
+                </a:extLst>
+              </a:blip>
+              <a:srcRect l="2413" t="22768" r="83472" b="23833"/>
+              <a:stretch>
+                <a:fillRect/>
+              </a:stretch>
+            </p:blipFill>
+            <p:spPr>
+              <a:xfrm>
+                <a:off x="3550532" y="2905254"/>
+                <a:ext cx="1154885" cy="999366"/>
+              </a:xfrm>
+              <a:prstGeom prst="rect">
+                <a:avLst/>
+              </a:prstGeom>
+            </p:spPr>
+          </p:pic>
+          <p:sp>
+            <p:nvSpPr>
+              <p:cNvPr id="8" name="Textfeld 7">
+                <a:extLst>
+                  <a:ext uri="{FF2B5EF4-FFF2-40B4-BE49-F238E27FC236}">
+                    <a16:creationId xmlns:a16="http://schemas.microsoft.com/office/drawing/2014/main" id="{5AF54D38-9A98-B057-9E4B-2921A76F2336}"/>
+                  </a:ext>
+                </a:extLst>
+              </p:cNvPr>
+              <p:cNvSpPr txBox="1"/>
+              <p:nvPr/>
+            </p:nvSpPr>
+            <p:spPr>
+              <a:xfrm>
+                <a:off x="3590464" y="3811881"/>
+                <a:ext cx="1075020" cy="293470"/>
+              </a:xfrm>
+              <a:prstGeom prst="rect">
+                <a:avLst/>
+              </a:prstGeom>
+              <a:noFill/>
+            </p:spPr>
+            <p:txBody>
+              <a:bodyPr wrap="square" rtlCol="0">
+                <a:spAutoFit/>
+              </a:bodyPr>
+              <a:lstStyle/>
+              <a:p>
+                <a:r>
+                  <a:rPr lang="de-DE" sz="3200" dirty="0">
+                    <a:solidFill>
+                      <a:srgbClr val="8EBAE5"/>
+                    </a:solidFill>
+                    <a:latin typeface="Cooper Black" panose="0208090404030B020404" pitchFamily="18" charset="0"/>
+                  </a:rPr>
+                  <a:t>Software</a:t>
+                </a:r>
+              </a:p>
+            </p:txBody>
+          </p:sp>
+        </p:grpSp>
+        <p:sp>
+          <p:nvSpPr>
+            <p:cNvPr id="10" name="Ellipse 9">
+              <a:extLst>
+                <a:ext uri="{FF2B5EF4-FFF2-40B4-BE49-F238E27FC236}">
+                  <a16:creationId xmlns:a16="http://schemas.microsoft.com/office/drawing/2014/main" id="{FC766E25-1356-0406-8EF9-63FD50C67D52}"/>
+                </a:ext>
+              </a:extLst>
+            </p:cNvPr>
+            <p:cNvSpPr/>
+            <p:nvPr/>
+          </p:nvSpPr>
+          <p:spPr>
+            <a:xfrm>
+              <a:off x="4584000" y="1917000"/>
+              <a:ext cx="3024000" cy="3024000"/>
+            </a:xfrm>
+            <a:prstGeom prst="ellipse">
+              <a:avLst/>
+            </a:prstGeom>
+            <a:noFill/>
+            <a:ln>
+              <a:solidFill>
+                <a:schemeClr val="tx1"/>
+              </a:solidFill>
+            </a:ln>
+          </p:spPr>
+          <p:style>
+            <a:lnRef idx="2">
+              <a:schemeClr val="accent1">
+                <a:shade val="15000"/>
+              </a:schemeClr>
+            </a:lnRef>
+            <a:fillRef idx="1">
+              <a:schemeClr val="accent1"/>
+            </a:fillRef>
+            <a:effectRef idx="0">
+              <a:schemeClr val="accent1"/>
+            </a:effectRef>
+            <a:fontRef idx="minor">
+              <a:schemeClr val="lt1"/>
+            </a:fontRef>
+          </p:style>
+          <p:txBody>
+            <a:bodyPr rtlCol="0" anchor="ctr"/>
+            <a:lstStyle/>
+            <a:p>
+              <a:pPr algn="ctr"/>
+              <a:endParaRPr lang="de-DE" dirty="0"/>
+            </a:p>
+          </p:txBody>
+        </p:sp>
+      </p:grpSp>
+      <p:sp>
+        <p:nvSpPr>
+          <p:cNvPr id="4" name="Titel 1">
+            <a:extLst>
+              <a:ext uri="{FF2B5EF4-FFF2-40B4-BE49-F238E27FC236}">
+                <a16:creationId xmlns:a16="http://schemas.microsoft.com/office/drawing/2014/main" id="{E435DA02-4A3B-87AF-EB25-33F50201A583}"/>
+              </a:ext>
+            </a:extLst>
+          </p:cNvPr>
+          <p:cNvSpPr txBox="1">
+            <a:spLocks/>
+          </p:cNvSpPr>
+          <p:nvPr/>
+        </p:nvSpPr>
+        <p:spPr>
+          <a:xfrm>
+            <a:off x="3243344" y="79874"/>
+            <a:ext cx="4528355" cy="554575"/>
+          </a:xfrm>
+          <a:prstGeom prst="rect">
+            <a:avLst/>
+          </a:prstGeom>
+        </p:spPr>
+        <p:txBody>
+          <a:bodyPr vert="horz" lIns="91440" tIns="45720" rIns="91440" bIns="45720" rtlCol="0" anchor="b">
+            <a:normAutofit fontScale="77500" lnSpcReduction="20000"/>
+          </a:bodyPr>
+          <a:lstStyle>
+            <a:lvl1pPr algn="ctr" defTabSz="914400" rtl="0" eaLnBrk="1" latinLnBrk="0" hangingPunct="1">
+              <a:lnSpc>
+                <a:spcPct val="90000"/>
+              </a:lnSpc>
+              <a:spcBef>
+                <a:spcPct val="0"/>
+              </a:spcBef>
+              <a:buNone/>
+              <a:defRPr sz="6000" kern="1200">
+                <a:solidFill>
+                  <a:schemeClr val="tx1"/>
+                </a:solidFill>
+                <a:latin typeface="+mj-lt"/>
+                <a:ea typeface="+mj-ea"/>
+                <a:cs typeface="+mj-cs"/>
+              </a:defRPr>
+            </a:lvl1pPr>
+          </a:lstStyle>
+          <a:p>
+            <a:r>
+              <a:rPr lang="de-DE" sz="3200" b="1" dirty="0" err="1">
+                <a:solidFill>
+                  <a:schemeClr val="tx2">
+                    <a:lumMod val="90000"/>
+                    <a:lumOff val="10000"/>
+                  </a:schemeClr>
+                </a:solidFill>
+              </a:rPr>
+              <a:t>Adjust</a:t>
+            </a:r>
+            <a:r>
+              <a:rPr lang="de-DE" sz="3200" b="1" dirty="0">
+                <a:solidFill>
+                  <a:schemeClr val="tx2">
+                    <a:lumMod val="90000"/>
+                    <a:lumOff val="10000"/>
+                  </a:schemeClr>
+                </a:solidFill>
+              </a:rPr>
+              <a:t> Chair Logo to fit </a:t>
+            </a:r>
+            <a:r>
+              <a:rPr lang="de-DE" sz="3200" b="1" dirty="0" err="1">
+                <a:solidFill>
+                  <a:schemeClr val="tx2">
+                    <a:lumMod val="90000"/>
+                    <a:lumOff val="10000"/>
+                  </a:schemeClr>
+                </a:solidFill>
+              </a:rPr>
+              <a:t>template</a:t>
+            </a:r>
+            <a:endParaRPr lang="de-DE" sz="3200" b="1" dirty="0">
+              <a:solidFill>
+                <a:schemeClr val="tx2">
+                  <a:lumMod val="90000"/>
+                  <a:lumOff val="10000"/>
+                </a:schemeClr>
+              </a:solidFill>
+            </a:endParaRPr>
+          </a:p>
+        </p:txBody>
+      </p:sp>
+      <p:sp>
+        <p:nvSpPr>
+          <p:cNvPr id="7" name="Textfeld 6">
+            <a:extLst>
+              <a:ext uri="{FF2B5EF4-FFF2-40B4-BE49-F238E27FC236}">
+                <a16:creationId xmlns:a16="http://schemas.microsoft.com/office/drawing/2014/main" id="{968378E3-EA16-ED21-6DDC-827463FEB970}"/>
+              </a:ext>
+            </a:extLst>
+          </p:cNvPr>
+          <p:cNvSpPr txBox="1"/>
+          <p:nvPr/>
+        </p:nvSpPr>
+        <p:spPr>
+          <a:xfrm>
+            <a:off x="393220" y="2423450"/>
+            <a:ext cx="6940939" cy="1754326"/>
+          </a:xfrm>
+          <a:prstGeom prst="rect">
+            <a:avLst/>
+          </a:prstGeom>
+          <a:noFill/>
+        </p:spPr>
+        <p:txBody>
+          <a:bodyPr wrap="none" rtlCol="0">
+            <a:spAutoFit/>
+          </a:bodyPr>
+          <a:lstStyle/>
+          <a:p>
+            <a:r>
+              <a:rPr lang="de-DE" b="1" dirty="0"/>
+              <a:t>How to </a:t>
+            </a:r>
+            <a:r>
+              <a:rPr lang="de-DE" b="1" dirty="0" err="1"/>
+              <a:t>make</a:t>
+            </a:r>
+            <a:r>
+              <a:rPr lang="de-DE" b="1" dirty="0"/>
+              <a:t> </a:t>
+            </a:r>
+            <a:r>
+              <a:rPr lang="de-DE" b="1" dirty="0" err="1"/>
+              <a:t>your</a:t>
+            </a:r>
+            <a:r>
+              <a:rPr lang="de-DE" b="1" dirty="0"/>
+              <a:t> logo fit the </a:t>
+            </a:r>
+            <a:r>
+              <a:rPr lang="de-DE" b="1" dirty="0" err="1"/>
+              <a:t>template</a:t>
+            </a:r>
+            <a:r>
+              <a:rPr lang="de-DE" b="1" dirty="0"/>
+              <a:t>:</a:t>
+            </a:r>
+          </a:p>
+          <a:p>
+            <a:pPr marL="342900" indent="-342900">
+              <a:buFont typeface="+mj-lt"/>
+              <a:buAutoNum type="arabicPeriod"/>
+            </a:pPr>
+            <a:r>
+              <a:rPr lang="de-DE" dirty="0" err="1"/>
+              <a:t>Replace</a:t>
+            </a:r>
+            <a:r>
+              <a:rPr lang="de-DE" dirty="0"/>
+              <a:t> MBD logo </a:t>
+            </a:r>
+            <a:r>
+              <a:rPr lang="de-DE" dirty="0" err="1"/>
+              <a:t>with</a:t>
+            </a:r>
+            <a:r>
+              <a:rPr lang="de-DE" dirty="0"/>
+              <a:t> </a:t>
+            </a:r>
+            <a:r>
+              <a:rPr lang="de-DE" dirty="0" err="1"/>
+              <a:t>your</a:t>
+            </a:r>
+            <a:r>
+              <a:rPr lang="de-DE" dirty="0"/>
+              <a:t> own logo</a:t>
+            </a:r>
+          </a:p>
+          <a:p>
+            <a:pPr marL="342900" indent="-342900">
+              <a:buFont typeface="+mj-lt"/>
+              <a:buAutoNum type="arabicPeriod"/>
+            </a:pPr>
+            <a:r>
+              <a:rPr lang="de-DE" dirty="0"/>
+              <a:t>Place </a:t>
+            </a:r>
+            <a:r>
+              <a:rPr lang="de-DE" dirty="0" err="1"/>
+              <a:t>central</a:t>
+            </a:r>
+            <a:r>
+              <a:rPr lang="de-DE" dirty="0"/>
+              <a:t> in the </a:t>
+            </a:r>
+            <a:r>
+              <a:rPr lang="de-DE" dirty="0" err="1"/>
+              <a:t>circle</a:t>
+            </a:r>
+            <a:endParaRPr lang="de-DE" dirty="0"/>
+          </a:p>
+          <a:p>
+            <a:pPr marL="342900" indent="-342900">
+              <a:buFont typeface="+mj-lt"/>
+              <a:buAutoNum type="arabicPeriod"/>
+            </a:pPr>
+            <a:r>
+              <a:rPr lang="de-DE" dirty="0"/>
+              <a:t>Group the logo and </a:t>
+            </a:r>
+            <a:r>
+              <a:rPr lang="de-DE" dirty="0" err="1"/>
+              <a:t>circle</a:t>
+            </a:r>
+            <a:endParaRPr lang="de-DE" dirty="0"/>
+          </a:p>
+          <a:p>
+            <a:pPr marL="342900" indent="-342900">
+              <a:buFont typeface="+mj-lt"/>
+              <a:buAutoNum type="arabicPeriod"/>
+            </a:pPr>
+            <a:r>
+              <a:rPr lang="de-DE" dirty="0"/>
+              <a:t>Change the </a:t>
+            </a:r>
+            <a:r>
+              <a:rPr lang="de-DE" dirty="0" err="1"/>
+              <a:t>outline</a:t>
+            </a:r>
+            <a:r>
+              <a:rPr lang="de-DE" dirty="0"/>
+              <a:t> of the </a:t>
+            </a:r>
+            <a:r>
+              <a:rPr lang="de-DE" dirty="0" err="1"/>
+              <a:t>circle</a:t>
+            </a:r>
+            <a:r>
+              <a:rPr lang="de-DE" dirty="0"/>
+              <a:t> to „</a:t>
+            </a:r>
+            <a:r>
+              <a:rPr lang="de-DE" dirty="0" err="1"/>
+              <a:t>No</a:t>
+            </a:r>
+            <a:r>
+              <a:rPr lang="de-DE" dirty="0"/>
+              <a:t> Outline“ (</a:t>
+            </a:r>
+            <a:r>
+              <a:rPr lang="de-DE" dirty="0" err="1"/>
+              <a:t>or</a:t>
+            </a:r>
+            <a:r>
+              <a:rPr lang="de-DE" dirty="0"/>
+              <a:t> </a:t>
+            </a:r>
+            <a:r>
+              <a:rPr lang="de-DE" dirty="0" err="1"/>
+              <a:t>make</a:t>
+            </a:r>
+            <a:r>
+              <a:rPr lang="de-DE" dirty="0"/>
+              <a:t> it </a:t>
+            </a:r>
+            <a:r>
+              <a:rPr lang="de-DE" dirty="0" err="1"/>
+              <a:t>white</a:t>
+            </a:r>
+            <a:r>
+              <a:rPr lang="de-DE" dirty="0"/>
+              <a:t>)</a:t>
+            </a:r>
+          </a:p>
+          <a:p>
+            <a:pPr marL="342900" indent="-342900">
+              <a:buFont typeface="+mj-lt"/>
+              <a:buAutoNum type="arabicPeriod"/>
+            </a:pPr>
+            <a:r>
+              <a:rPr lang="de-DE" dirty="0"/>
+              <a:t>Save the </a:t>
+            </a:r>
+            <a:r>
+              <a:rPr lang="de-DE" dirty="0" err="1"/>
+              <a:t>group</a:t>
+            </a:r>
+            <a:r>
+              <a:rPr lang="de-DE" dirty="0"/>
+              <a:t> as </a:t>
+            </a:r>
+            <a:r>
+              <a:rPr lang="de-DE" dirty="0" err="1"/>
+              <a:t>png</a:t>
+            </a:r>
+            <a:endParaRPr lang="de-DE" dirty="0"/>
+          </a:p>
+        </p:txBody>
+      </p:sp>
+      <p:sp>
+        <p:nvSpPr>
+          <p:cNvPr id="16" name="Textfeld 15">
+            <a:extLst>
+              <a:ext uri="{FF2B5EF4-FFF2-40B4-BE49-F238E27FC236}">
+                <a16:creationId xmlns:a16="http://schemas.microsoft.com/office/drawing/2014/main" id="{5FC30080-F955-468A-4414-6980E3535A95}"/>
+              </a:ext>
+            </a:extLst>
+          </p:cNvPr>
+          <p:cNvSpPr txBox="1"/>
+          <p:nvPr/>
+        </p:nvSpPr>
+        <p:spPr>
+          <a:xfrm>
+            <a:off x="393220" y="1221172"/>
+            <a:ext cx="4969694" cy="369332"/>
+          </a:xfrm>
+          <a:prstGeom prst="rect">
+            <a:avLst/>
+          </a:prstGeom>
+          <a:noFill/>
+        </p:spPr>
+        <p:txBody>
+          <a:bodyPr wrap="none" rtlCol="0">
+            <a:spAutoFit/>
+          </a:bodyPr>
+          <a:lstStyle/>
+          <a:p>
+            <a:r>
+              <a:rPr lang="de-DE" dirty="0">
+                <a:solidFill>
+                  <a:srgbClr val="FF0000"/>
+                </a:solidFill>
+              </a:rPr>
+              <a:t>Use </a:t>
+            </a:r>
+            <a:r>
+              <a:rPr lang="de-DE" dirty="0" err="1">
+                <a:solidFill>
+                  <a:srgbClr val="FF0000"/>
+                </a:solidFill>
+              </a:rPr>
+              <a:t>this</a:t>
+            </a:r>
+            <a:r>
+              <a:rPr lang="de-DE" dirty="0">
+                <a:solidFill>
+                  <a:srgbClr val="FF0000"/>
+                </a:solidFill>
+              </a:rPr>
+              <a:t> </a:t>
+            </a:r>
+            <a:r>
+              <a:rPr lang="de-DE" dirty="0" err="1">
+                <a:solidFill>
+                  <a:srgbClr val="FF0000"/>
+                </a:solidFill>
+              </a:rPr>
+              <a:t>slide</a:t>
+            </a:r>
+            <a:r>
+              <a:rPr lang="de-DE" dirty="0">
+                <a:solidFill>
+                  <a:srgbClr val="FF0000"/>
+                </a:solidFill>
+              </a:rPr>
+              <a:t> in </a:t>
+            </a:r>
+            <a:r>
+              <a:rPr lang="de-DE" dirty="0" err="1">
+                <a:solidFill>
+                  <a:srgbClr val="FF0000"/>
+                </a:solidFill>
+              </a:rPr>
+              <a:t>powerpoint</a:t>
+            </a:r>
+            <a:r>
+              <a:rPr lang="de-DE" dirty="0">
+                <a:solidFill>
+                  <a:srgbClr val="FF0000"/>
+                </a:solidFill>
+              </a:rPr>
+              <a:t> to </a:t>
+            </a:r>
+            <a:r>
+              <a:rPr lang="de-DE" dirty="0" err="1">
+                <a:solidFill>
+                  <a:srgbClr val="FF0000"/>
+                </a:solidFill>
+              </a:rPr>
+              <a:t>adjust</a:t>
+            </a:r>
+            <a:r>
+              <a:rPr lang="de-DE" dirty="0">
+                <a:solidFill>
+                  <a:srgbClr val="FF0000"/>
+                </a:solidFill>
+              </a:rPr>
+              <a:t> </a:t>
+            </a:r>
+            <a:r>
+              <a:rPr lang="de-DE" dirty="0" err="1">
+                <a:solidFill>
+                  <a:srgbClr val="FF0000"/>
+                </a:solidFill>
+              </a:rPr>
+              <a:t>your</a:t>
+            </a:r>
+            <a:r>
+              <a:rPr lang="de-DE" dirty="0">
+                <a:solidFill>
+                  <a:srgbClr val="FF0000"/>
+                </a:solidFill>
+              </a:rPr>
+              <a:t> </a:t>
+            </a:r>
+            <a:r>
+              <a:rPr lang="de-DE" dirty="0" err="1">
+                <a:solidFill>
+                  <a:srgbClr val="FF0000"/>
+                </a:solidFill>
+              </a:rPr>
+              <a:t>image</a:t>
+            </a:r>
+            <a:endParaRPr lang="de-DE" dirty="0">
+              <a:solidFill>
+                <a:srgbClr val="FF0000"/>
+              </a:solidFill>
+            </a:endParaRPr>
+          </a:p>
+        </p:txBody>
+      </p:sp>
+    </p:spTree>
+    <p:extLst>
+      <p:ext uri="{BB962C8B-B14F-4D97-AF65-F5344CB8AC3E}">
+        <p14:creationId xmlns:p14="http://schemas.microsoft.com/office/powerpoint/2010/main" val="3088996399"/>
       </p:ext>
     </p:extLst>
   </p:cSld>
